--- a/CoworkPlaybook/Cowork_教育訓練簡報_電信業版.pptx
+++ b/CoworkPlaybook/Cowork_教育訓練簡報_電信業版.pptx
@@ -3761,7 +3761,7 @@
                 <a:ea typeface="Microsoft JhengHei" pitchFamily="34" charset="-122"/>
                 <a:cs typeface="Microsoft JhengHei" pitchFamily="34" charset="-120"/>
               </a:rPr>
-              <a:t>實測八家判定全對，而且它主動點名了兩個陷阱。</a:t>
+              <a:t>八家判定全部正確，而且它會主動點名兩個陷阱。</a:t>
             </a:r>
             <a:endParaRPr lang="en-US" sz="1300" dirty="0"/>
           </a:p>
@@ -3866,7 +3866,7 @@
                 <a:ea typeface="Microsoft JhengHei" pitchFamily="34" charset="-122"/>
                 <a:cs typeface="Microsoft JhengHei" pitchFamily="34" charset="-120"/>
               </a:rPr>
-              <a:t>⭐ 核准卡的收件者欄位是空的 —— 這一格一定要看</a:t>
+              <a:t>⭐ 核准卡的收件者欄位一定要看</a:t>
             </a:r>
             <a:endParaRPr lang="en-US" sz="1600" dirty="0"/>
           </a:p>
@@ -3908,7 +3908,7 @@
                 <a:ea typeface="Microsoft JhengHei" pitchFamily="34" charset="-122"/>
                 <a:cs typeface="Microsoft JhengHei" pitchFamily="34" charset="-120"/>
               </a:rPr>
-              <a:t>這一步是本情境最實用的一課。</a:t>
+              <a:t>**寄信核准卡跳出來時，第一件事是看收件者欄位。</a:t>
             </a:r>
             <a:endParaRPr lang="en-US" sz="1300" dirty="0"/>
           </a:p>
@@ -4013,7 +4013,7 @@
                 <a:ea typeface="Microsoft JhengHei" pitchFamily="34" charset="-122"/>
                 <a:cs typeface="Microsoft JhengHei" pitchFamily="34" charset="-120"/>
               </a:rPr>
-              <a:t>一次只送一封 —— 而且是它自己堅持的</a:t>
+              <a:t>一次只送一封，是它自己堅持的</a:t>
             </a:r>
             <a:endParaRPr lang="en-US" sz="1600" dirty="0"/>
           </a:p>
@@ -4055,7 +4055,7 @@
                 <a:ea typeface="Microsoft JhengHei" pitchFamily="34" charset="-122"/>
                 <a:cs typeface="Microsoft JhengHei" pitchFamily="34" charset="-120"/>
               </a:rPr>
-              <a:t>核准第一封之後，只有長慶生技那封被寄出，另外兩封留在草稿匣，它接著問「請告知要核准哪一封，我一次只送一封」。</a:t>
+              <a:t>核准第一封之後，只有長慶生技那封被寄出，另外兩封留在草稿匣，它接著問你要核准哪一封。</a:t>
             </a:r>
             <a:endParaRPr lang="en-US" sz="1300" dirty="0"/>
           </a:p>
@@ -5362,7 +5362,7 @@
                 <a:ea typeface="Microsoft JhengHei" pitchFamily="34" charset="-122"/>
                 <a:cs typeface="Microsoft JhengHei" pitchFamily="34" charset="-120"/>
               </a:rPr>
-              <a:t>個資外洩通報最怕的不是不會寫，是**時鐘從哪一刻開始走算錯了**。事件發生與事件發現經常相差好幾天，法定 72 小時是從「發現」起算 —— 算錯一次，你會以為早就逾期，或以為還很充裕。這個情境建立一個事件觸發任務讓 Cowork 待命：資安通報信一進來就自己醒來，讀 SOP 判等級、算出還剩幾小時，並把三個里程碑排進行事曆。</a:t>
+              <a:t>個資外洩通報最怕的不是不會寫，是**時鐘從哪一刻開始走算錯了**。事件發生與事件發現經常相差好幾天，法定 72 小時是從「發現」起算 —— 算錯一次，你會以為早就逾期，或以為還很充裕。這個情境建立一個事件觸發任務讓 Cowork 待命：資安通報信一進來就自己醒來，讀 SOP 判等級、算出還剩幾小時、產出通報內容，同時也示範了觸發任務該做什麼、不該做什麼。</a:t>
             </a:r>
             <a:endParaRPr lang="en-US" sz="1600" dirty="0"/>
           </a:p>
@@ -5506,7 +5506,7 @@
                 <a:ea typeface="Microsoft JhengHei" pitchFamily="34" charset="-122"/>
                 <a:cs typeface="Microsoft JhengHei" pitchFamily="34" charset="-120"/>
               </a:rPr>
-              <a:t>建立觸發任務：把判斷基準指向 SOP，不要抄進提示詞</a:t>
+              <a:t>建立觸發任務：只讓它做不需要核准的事</a:t>
             </a:r>
             <a:endParaRPr lang="en-US" sz="1600" dirty="0"/>
           </a:p>
@@ -5548,7 +5548,7 @@
                 <a:ea typeface="Microsoft JhengHei" pitchFamily="34" charset="-122"/>
                 <a:cs typeface="Microsoft JhengHei" pitchFamily="34" charset="-120"/>
               </a:rPr>
-              <a:t>提示詞只說「依 SOP 判定，特別注意 72 小時起算點規定」，沒有把分級標準抄進去。</a:t>
+              <a:t>觸發任務的執行內容要刻意收斂：**讀信、讀 SOP、判等級、算期限、產出通報內容**，全部寫進工作結果就好…</a:t>
             </a:r>
             <a:endParaRPr lang="en-US" sz="1300" dirty="0"/>
           </a:p>
@@ -5653,7 +5653,7 @@
                 <a:ea typeface="Microsoft JhengHei" pitchFamily="34" charset="-122"/>
                 <a:cs typeface="Microsoft JhengHei" pitchFamily="34" charset="-120"/>
               </a:rPr>
-              <a:t>確認進入待命 —— 這一步別跳過</a:t>
+              <a:t>⭐ 為什麼觸發任務不能做需要核准的事</a:t>
             </a:r>
             <a:endParaRPr lang="en-US" sz="1600" dirty="0"/>
           </a:p>
@@ -5695,7 +5695,7 @@
                 <a:ea typeface="Microsoft JhengHei" pitchFamily="34" charset="-122"/>
                 <a:cs typeface="Microsoft JhengHei" pitchFamily="34" charset="-120"/>
               </a:rPr>
-              <a:t>建立完成不等於開始待命。</a:t>
+              <a:t>這是設計觸發任務時最重要的一條原則。</a:t>
             </a:r>
             <a:endParaRPr lang="en-US" sz="1300" dirty="0"/>
           </a:p>
@@ -5800,7 +5800,7 @@
                 <a:ea typeface="Microsoft JhengHei" pitchFamily="34" charset="-122"/>
                 <a:cs typeface="Microsoft JhengHei" pitchFamily="34" charset="-120"/>
               </a:rPr>
-              <a:t>自動化頁面：所有待命中的任務都在這裡</a:t>
+              <a:t>按下「啟用自動化」，並確認狀態是使用中</a:t>
             </a:r>
             <a:endParaRPr lang="en-US" sz="1600" dirty="0"/>
           </a:p>
@@ -5842,7 +5842,7 @@
                 <a:ea typeface="Microsoft JhengHei" pitchFamily="34" charset="-122"/>
                 <a:cs typeface="Microsoft JhengHei" pitchFamily="34" charset="-120"/>
               </a:rPr>
-              <a:t>自動化頁面是這個情境的「管理視角」，也是回答一個常見疑慮的地方 —— **「它會不會在我不知道的情況下一直跑？」…</a:t>
+              <a:t>下完指令會跳出一張「新的自動化」設定卡，列出名稱、觸發條件與執行內容。</a:t>
             </a:r>
             <a:endParaRPr lang="en-US" sz="1300" dirty="0"/>
           </a:p>
@@ -5947,7 +5947,7 @@
                 <a:ea typeface="Microsoft JhengHei" pitchFamily="34" charset="-122"/>
                 <a:cs typeface="Microsoft JhengHei" pitchFamily="34" charset="-120"/>
               </a:rPr>
-              <a:t>⭐ 起算點：它明確寫出「非 08-20，兩者相差約 6 日 7 小時」</a:t>
+              <a:t>觸發之後：執行記錄在觸發器裡面，不在「執行」清單</a:t>
             </a:r>
             <a:endParaRPr lang="en-US" sz="1600" dirty="0"/>
           </a:p>
@@ -5989,7 +5989,7 @@
                 <a:ea typeface="Microsoft JhengHei" pitchFamily="34" charset="-122"/>
                 <a:cs typeface="Microsoft JhengHei" pitchFamily="34" charset="-120"/>
               </a:rPr>
-              <a:t>這是整個情境的核心。</a:t>
+              <a:t>寄出測試信後，回到自動化頁面**點進這個觸發器本身**，最下方有「執行記錄」。</a:t>
             </a:r>
             <a:endParaRPr lang="en-US" sz="1300" dirty="0"/>
           </a:p>
@@ -6094,7 +6094,7 @@
                 <a:ea typeface="Microsoft JhengHei" pitchFamily="34" charset="-122"/>
                 <a:cs typeface="Microsoft JhengHei" pitchFamily="34" charset="-120"/>
               </a:rPr>
-              <a:t>批次核准的正確用法：三個內部行事曆事件</a:t>
+              <a:t>⭐ 核心考點：72 小時從「發現」起算，不是「發生」</a:t>
             </a:r>
             <a:endParaRPr lang="en-US" sz="1600" dirty="0"/>
           </a:p>
@@ -6136,7 +6136,7 @@
                 <a:ea typeface="Microsoft JhengHei" pitchFamily="34" charset="-122"/>
                 <a:cs typeface="Microsoft JhengHei" pitchFamily="34" charset="-120"/>
               </a:rPr>
-              <a:t>這裡出現了**全部核准 (3)** 的批次卡，而同一份教材的 TEL2 卻嚴禁批次核准 —— 兩者放在一起看最有…</a:t>
+              <a:t>通報信裡有兩個時間：事件**發生**於 08-20 02:14（依日誌回溯）…</a:t>
             </a:r>
             <a:endParaRPr lang="en-US" sz="1300" dirty="0"/>
           </a:p>
@@ -6144,7 +6144,154 @@
       </p:sp>
       <p:sp>
         <p:nvSpPr>
-          <p:cNvPr id="40" name="Text 37"/>
+          <p:cNvPr id="40" name="Shape 37"/>
+          <p:cNvSpPr/>
+          <p:nvPr/>
+        </p:nvSpPr>
+        <p:spPr>
+          <a:xfrm>
+            <a:off x="4526280" y="6309360"/>
+            <a:ext cx="457200" cy="457200"/>
+          </a:xfrm>
+          <a:prstGeom prst="ellipse">
+            <a:avLst/>
+          </a:prstGeom>
+          <a:solidFill>
+            <a:srgbClr val="FFFFFF">
+              <a:alpha val="12000"/>
+            </a:srgbClr>
+          </a:solidFill>
+          <a:ln w="19050">
+            <a:solidFill>
+              <a:srgbClr val="C50F1F"/>
+            </a:solidFill>
+            <a:prstDash val="solid"/>
+          </a:ln>
+        </p:spPr>
+      </p:sp>
+      <p:sp>
+        <p:nvSpPr>
+          <p:cNvPr id="41" name="Text 38"/>
+          <p:cNvSpPr/>
+          <p:nvPr/>
+        </p:nvSpPr>
+        <p:spPr>
+          <a:xfrm>
+            <a:off x="4526280" y="6309360"/>
+            <a:ext cx="457200" cy="457200"/>
+          </a:xfrm>
+          <a:prstGeom prst="rect">
+            <a:avLst/>
+          </a:prstGeom>
+          <a:noFill/>
+          <a:ln/>
+        </p:spPr>
+        <p:txBody>
+          <a:bodyPr wrap="square" rtlCol="0" anchor="ctr"/>
+          <a:lstStyle/>
+          <a:p>
+            <a:pPr algn="ctr" indent="0" marL="0">
+              <a:buNone/>
+            </a:pPr>
+            <a:r>
+              <a:rPr lang="en-US" sz="1600" b="1" dirty="0">
+                <a:solidFill>
+                  <a:srgbClr val="C50F1F"/>
+                </a:solidFill>
+                <a:latin typeface="Microsoft JhengHei" pitchFamily="34" charset="0"/>
+                <a:ea typeface="Microsoft JhengHei" pitchFamily="34" charset="-122"/>
+                <a:cs typeface="Microsoft JhengHei" pitchFamily="34" charset="-120"/>
+              </a:rPr>
+              <a:t>6</a:t>
+            </a:r>
+            <a:endParaRPr lang="en-US" sz="1600" dirty="0"/>
+          </a:p>
+        </p:txBody>
+      </p:sp>
+      <p:sp>
+        <p:nvSpPr>
+          <p:cNvPr id="42" name="Text 39"/>
+          <p:cNvSpPr/>
+          <p:nvPr/>
+        </p:nvSpPr>
+        <p:spPr>
+          <a:xfrm>
+            <a:off x="5166360" y="6291072"/>
+            <a:ext cx="6492240" cy="365760"/>
+          </a:xfrm>
+          <a:prstGeom prst="rect">
+            <a:avLst/>
+          </a:prstGeom>
+          <a:noFill/>
+          <a:ln/>
+        </p:spPr>
+        <p:txBody>
+          <a:bodyPr wrap="square" rtlCol="0" anchor="ctr"/>
+          <a:lstStyle/>
+          <a:p>
+            <a:pPr indent="0" marL="0">
+              <a:buNone/>
+            </a:pPr>
+            <a:r>
+              <a:rPr lang="en-US" sz="1600" b="1" dirty="0">
+                <a:solidFill>
+                  <a:srgbClr val="FFFFFF"/>
+                </a:solidFill>
+                <a:latin typeface="Microsoft JhengHei" pitchFamily="34" charset="0"/>
+                <a:ea typeface="Microsoft JhengHei" pitchFamily="34" charset="-122"/>
+                <a:cs typeface="Microsoft JhengHei" pitchFamily="34" charset="-120"/>
+              </a:rPr>
+              <a:t>人工接手：把行事曆與通報信補完</a:t>
+            </a:r>
+            <a:endParaRPr lang="en-US" sz="1600" dirty="0"/>
+          </a:p>
+        </p:txBody>
+      </p:sp>
+      <p:sp>
+        <p:nvSpPr>
+          <p:cNvPr id="43" name="Text 40"/>
+          <p:cNvSpPr/>
+          <p:nvPr/>
+        </p:nvSpPr>
+        <p:spPr>
+          <a:xfrm>
+            <a:off x="5166360" y="6656832"/>
+            <a:ext cx="6492240" cy="502920"/>
+          </a:xfrm>
+          <a:prstGeom prst="rect">
+            <a:avLst/>
+          </a:prstGeom>
+          <a:noFill/>
+          <a:ln/>
+        </p:spPr>
+        <p:txBody>
+          <a:bodyPr wrap="square" rtlCol="0" anchor="ctr"/>
+          <a:lstStyle/>
+          <a:p>
+            <a:pPr indent="0" marL="0">
+              <a:lnSpc>
+                <a:spcPct val="115000"/>
+              </a:lnSpc>
+              <a:buNone/>
+            </a:pPr>
+            <a:r>
+              <a:rPr lang="en-US" sz="1300" dirty="0">
+                <a:solidFill>
+                  <a:srgbClr val="AEB2D8"/>
+                </a:solidFill>
+                <a:latin typeface="Microsoft JhengHei" pitchFamily="34" charset="0"/>
+                <a:ea typeface="Microsoft JhengHei" pitchFamily="34" charset="-122"/>
+                <a:cs typeface="Microsoft JhengHei" pitchFamily="34" charset="-120"/>
+              </a:rPr>
+              <a:t>看過判定結果、確認期限與分級沒問題之後，在同一個對話裡接著下指令，把需要核准的部分做完。</a:t>
+            </a:r>
+            <a:endParaRPr lang="en-US" sz="1300" dirty="0"/>
+          </a:p>
+        </p:txBody>
+      </p:sp>
+      <p:sp>
+        <p:nvSpPr>
+          <p:cNvPr id="44" name="Text 41"/>
           <p:cNvSpPr/>
           <p:nvPr/>
         </p:nvSpPr>
@@ -6183,7 +6330,7 @@
       </p:sp>
       <p:sp>
         <p:nvSpPr>
-          <p:cNvPr id="41" name="Text 38"/>
+          <p:cNvPr id="45" name="Text 42"/>
           <p:cNvSpPr/>
           <p:nvPr/>
         </p:nvSpPr>
@@ -6681,7 +6828,7 @@
                 <a:ea typeface="Microsoft JhengHei" pitchFamily="34" charset="-122"/>
                 <a:cs typeface="Microsoft JhengHei" pitchFamily="34" charset="-120"/>
               </a:rPr>
-              <a:t>觸發任務建立後確實進入待命狀態，測試信是在待命之後才寄出</a:t>
+              <a:t>觸發任務的執行內容只包含判定與計算，沒有寄信或排行事曆</a:t>
             </a:r>
             <a:endParaRPr lang="en-US" sz="1300" dirty="0"/>
           </a:p>
@@ -6744,7 +6891,7 @@
                 <a:ea typeface="Microsoft JhengHei" pitchFamily="34" charset="-122"/>
                 <a:cs typeface="Microsoft JhengHei" pitchFamily="34" charset="-120"/>
               </a:rPr>
-              <a:t>法定 72 小時自「發現時間」起算，並同時載明發生時間與兩者落差</a:t>
+              <a:t>設定卡按下「啟用自動化」後，自動化頁面確實看得到這個觸發器</a:t>
             </a:r>
             <a:endParaRPr lang="en-US" sz="1300" dirty="0"/>
           </a:p>
@@ -6807,7 +6954,7 @@
                 <a:ea typeface="Microsoft JhengHei" pitchFamily="34" charset="-122"/>
                 <a:cs typeface="Microsoft JhengHei" pitchFamily="34" charset="-120"/>
               </a:rPr>
-              <a:t>若誤用發生時間會得出「已逾期」的錯誤結論，此差異有被指出</a:t>
+              <a:t>測試信是在觸發器進入待命之後才寄出</a:t>
             </a:r>
             <a:endParaRPr lang="en-US" sz="1300" dirty="0"/>
           </a:p>
@@ -7715,7 +7862,7 @@
                 <a:ea typeface="Microsoft JhengHei" pitchFamily="34" charset="-122"/>
                 <a:cs typeface="Microsoft JhengHei" pitchFamily="34" charset="-120"/>
               </a:rPr>
-              <a:t>實測把兩百筆歸為六類，訊號類 60 件（30.0%）為最大類。</a:t>
+              <a:t>兩百筆會被歸為六類，訊號類 60 件（30.0%）為最大類。</a:t>
             </a:r>
             <a:endParaRPr lang="en-US" sz="1300" dirty="0"/>
           </a:p>
@@ -20608,7 +20755,7 @@
                 <a:ea typeface="Microsoft JhengHei" pitchFamily="34" charset="-122"/>
                 <a:cs typeface="Microsoft JhengHei" pitchFamily="34" charset="-120"/>
               </a:rPr>
-              <a:t>看它把三個來源湊齊 —— 這一步不必你動手</a:t>
+              <a:t>看它自己把三個來源湊齊</a:t>
             </a:r>
             <a:endParaRPr lang="en-US" sz="1600" dirty="0"/>
           </a:p>
@@ -20797,7 +20944,7 @@
                 <a:ea typeface="Microsoft JhengHei" pitchFamily="34" charset="-122"/>
                 <a:cs typeface="Microsoft JhengHei" pitchFamily="34" charset="-120"/>
               </a:rPr>
-              <a:t>實測結果，它找出兩處落差並明確標示：**中斷起算** —— 客戶 8/11 10:35 才申告…</a:t>
+              <a:t>它會找出兩處落差並明確標示：**中斷起算** —— 客戶 8/11 10:35 才申告…</a:t>
             </a:r>
             <a:endParaRPr lang="en-US" sz="1300" dirty="0"/>
           </a:p>

--- a/CoworkPlaybook/Cowork_教育訓練簡報_電信業版.pptx
+++ b/CoworkPlaybook/Cowork_教育訓練簡報_電信業版.pptx
@@ -26,9 +26,10 @@
     <p:sldId id="274" r:id="rId20"/>
     <p:sldId id="275" r:id="rId21"/>
     <p:sldId id="276" r:id="rId22"/>
+    <p:sldId id="277" r:id="rId23"/>
   </p:sldIdLst>
   <p:notesMasterIdLst>
-    <p:notesMasterId r:id="rId23"/>
+    <p:notesMasterId r:id="rId24"/>
   </p:notesMasterIdLst>
   <p:sldSz cx="12191695" cy="6858000"/>
   <p:notesSz cx="6858000" cy="12191695"/>
@@ -1690,6 +1691,94 @@
             <a:fld id="{F7021451-1387-4CA6-816F-3879F97B5CBC}" type="slidenum">
               <a:rPr lang="en-US"/>
               <a:t>21</a:t>
+            </a:fld>
+            <a:endParaRPr lang="en-US"/>
+          </a:p>
+        </p:txBody>
+      </p:sp>
+    </p:spTree>
+    <p:extLst>
+      <p:ext uri="{BB962C8B-B14F-4D97-AF65-F5344CB8AC3E}">
+        <p14:creationId xmlns:p14="http://schemas.microsoft.com/office/powerpoint/2010/main" val="1024086991"/>
+      </p:ext>
+    </p:extLst>
+  </p:cSld>
+  <p:clrMapOvr>
+    <a:masterClrMapping/>
+  </p:clrMapOvr>
+</p:notes>
+</file>
+
+<file path=ppt/notesSlides/notesSlide22.xml><?xml version="1.0" encoding="utf-8"?>
+<p:notes xmlns:a="http://schemas.openxmlformats.org/drawingml/2006/main" xmlns:r="http://schemas.openxmlformats.org/officeDocument/2006/relationships" xmlns:p="http://schemas.openxmlformats.org/presentationml/2006/main">
+  <p:cSld>
+    <p:spTree>
+      <p:nvGrpSpPr>
+        <p:cNvPr id="1" name=""/>
+        <p:cNvGrpSpPr/>
+        <p:nvPr/>
+      </p:nvGrpSpPr>
+      <p:grpSpPr>
+        <a:xfrm>
+          <a:off x="0" y="0"/>
+          <a:ext cx="0" cy="0"/>
+          <a:chOff x="0" y="0"/>
+          <a:chExt cx="0" cy="0"/>
+        </a:xfrm>
+      </p:grpSpPr>
+      <p:sp>
+        <p:nvSpPr>
+          <p:cNvPr id="2" name="Slide Image Placeholder 1"/>
+          <p:cNvSpPr>
+            <a:spLocks noGrp="1" noRot="1" noChangeAspect="1"/>
+          </p:cNvSpPr>
+          <p:nvPr>
+            <p:ph type="sldImg"/>
+          </p:nvPr>
+        </p:nvSpPr>
+        <p:spPr/>
+      </p:sp>
+      <p:sp>
+        <p:nvSpPr>
+          <p:cNvPr id="3" name="Notes Placeholder 2"/>
+          <p:cNvSpPr>
+            <a:spLocks noGrp="1"/>
+          </p:cNvSpPr>
+          <p:nvPr>
+            <p:ph type="body" idx="1"/>
+          </p:nvPr>
+        </p:nvSpPr>
+        <p:spPr/>
+        <p:txBody>
+          <a:bodyPr/>
+          <a:lstStyle/>
+          <a:p>
+            <a:r>
+              <a:rPr lang="en-US" dirty="0"/>
+              <a:t/>
+            </a:r>
+            <a:endParaRPr lang="en-US" dirty="0"/>
+          </a:p>
+        </p:txBody>
+      </p:sp>
+      <p:sp>
+        <p:nvSpPr>
+          <p:cNvPr id="4" name="Slide Number Placeholder 3"/>
+          <p:cNvSpPr>
+            <a:spLocks noGrp="1"/>
+          </p:cNvSpPr>
+          <p:nvPr>
+            <p:ph type="sldNum" sz="quarter" idx="10"/>
+          </p:nvPr>
+        </p:nvSpPr>
+        <p:spPr/>
+        <p:txBody>
+          <a:bodyPr/>
+          <a:lstStyle/>
+          <a:p>
+            <a:fld id="{F7021451-1387-4CA6-816F-3879F97B5CBC}" type="slidenum">
+              <a:rPr lang="en-US"/>
+              <a:t>22</a:t>
             </a:fld>
             <a:endParaRPr lang="en-US"/>
           </a:p>
@@ -2951,6 +3040,677 @@
     <p:bg>
       <p:bgPr>
         <a:solidFill>
+          <a:srgbClr val="F7F8FC"/>
+        </a:solidFill>
+      </p:bgPr>
+    </p:bg>
+    <p:spTree>
+      <p:nvGrpSpPr>
+        <p:cNvPr id="1" name=""/>
+        <p:cNvGrpSpPr/>
+        <p:nvPr/>
+      </p:nvGrpSpPr>
+      <p:grpSpPr>
+        <a:xfrm>
+          <a:off x="0" y="0"/>
+          <a:ext cx="0" cy="0"/>
+          <a:chOff x="0" y="0"/>
+          <a:chExt cx="0" cy="0"/>
+        </a:xfrm>
+      </p:grpSpPr>
+      <p:sp>
+        <p:nvSpPr>
+          <p:cNvPr id="2" name="Shape 0"/>
+          <p:cNvSpPr/>
+          <p:nvPr/>
+        </p:nvSpPr>
+        <p:spPr>
+          <a:xfrm>
+            <a:off x="640080" y="566928"/>
+            <a:ext cx="384048" cy="128016"/>
+          </a:xfrm>
+          <a:prstGeom prst="rect">
+            <a:avLst/>
+          </a:prstGeom>
+          <a:solidFill>
+            <a:srgbClr val="1B4B8F"/>
+          </a:solidFill>
+          <a:ln/>
+        </p:spPr>
+      </p:sp>
+      <p:sp>
+        <p:nvSpPr>
+          <p:cNvPr id="3" name="Text 1"/>
+          <p:cNvSpPr/>
+          <p:nvPr/>
+        </p:nvSpPr>
+        <p:spPr>
+          <a:xfrm>
+            <a:off x="1143000" y="457200"/>
+            <a:ext cx="8229600" cy="310896"/>
+          </a:xfrm>
+          <a:prstGeom prst="rect">
+            <a:avLst/>
+          </a:prstGeom>
+          <a:noFill/>
+          <a:ln/>
+        </p:spPr>
+        <p:txBody>
+          <a:bodyPr wrap="square" rtlCol="0" anchor="ctr"/>
+          <a:lstStyle/>
+          <a:p>
+            <a:pPr indent="0" marL="0">
+              <a:buNone/>
+            </a:pPr>
+            <a:r>
+              <a:rPr lang="en-US" sz="1200" b="1" spc="200" kern="0" dirty="0">
+                <a:solidFill>
+                  <a:srgbClr val="1B4B8F"/>
+                </a:solidFill>
+                <a:latin typeface="Microsoft JhengHei" pitchFamily="34" charset="0"/>
+                <a:ea typeface="Microsoft JhengHei" pitchFamily="34" charset="-122"/>
+                <a:cs typeface="Microsoft JhengHei" pitchFamily="34" charset="-120"/>
+              </a:rPr>
+              <a:t>情境 01 · 實機示範</a:t>
+            </a:r>
+            <a:endParaRPr lang="en-US" sz="1200" dirty="0"/>
+          </a:p>
+        </p:txBody>
+      </p:sp>
+      <p:sp>
+        <p:nvSpPr>
+          <p:cNvPr id="4" name="Text 2"/>
+          <p:cNvSpPr/>
+          <p:nvPr/>
+        </p:nvSpPr>
+        <p:spPr>
+          <a:xfrm>
+            <a:off x="640080" y="786384"/>
+            <a:ext cx="10972800" cy="640080"/>
+          </a:xfrm>
+          <a:prstGeom prst="rect">
+            <a:avLst/>
+          </a:prstGeom>
+          <a:noFill/>
+          <a:ln/>
+        </p:spPr>
+        <p:txBody>
+          <a:bodyPr wrap="square" rtlCol="0" anchor="ctr"/>
+          <a:lstStyle/>
+          <a:p>
+            <a:pPr indent="0" marL="0">
+              <a:buNone/>
+            </a:pPr>
+            <a:r>
+              <a:rPr lang="en-US" sz="3000" b="1" dirty="0">
+                <a:solidFill>
+                  <a:srgbClr val="1E2235"/>
+                </a:solidFill>
+                <a:latin typeface="Microsoft JhengHei" pitchFamily="34" charset="0"/>
+                <a:ea typeface="Microsoft JhengHei" pitchFamily="34" charset="-122"/>
+                <a:cs typeface="Microsoft JhengHei" pitchFamily="34" charset="-120"/>
+              </a:rPr>
+              <a:t>看 Cowork 怎麼做、產出什麼</a:t>
+            </a:r>
+            <a:endParaRPr lang="en-US" sz="3000" dirty="0"/>
+          </a:p>
+        </p:txBody>
+      </p:sp>
+      <p:sp>
+        <p:nvSpPr>
+          <p:cNvPr id="5" name="Shape 3"/>
+          <p:cNvSpPr/>
+          <p:nvPr/>
+        </p:nvSpPr>
+        <p:spPr>
+          <a:xfrm>
+            <a:off x="585216" y="1773936"/>
+            <a:ext cx="5184648" cy="3433186"/>
+          </a:xfrm>
+          <a:prstGeom prst="rect">
+            <a:avLst/>
+          </a:prstGeom>
+          <a:solidFill>
+            <a:srgbClr val="FFFFFF"/>
+          </a:solidFill>
+          <a:ln w="12700">
+            <a:solidFill>
+              <a:srgbClr val="E4E7F2"/>
+            </a:solidFill>
+            <a:prstDash val="solid"/>
+          </a:ln>
+          <a:effectLst>
+            <a:outerShdw sx="100000" sy="100000" kx="0" ky="0" algn="bl" rotWithShape="0" blurRad="114300" dist="38100" dir="5400000">
+              <a:srgbClr val="8A90B5">
+                <a:alpha val="22000"/>
+              </a:srgbClr>
+            </a:outerShdw>
+          </a:effectLst>
+        </p:spPr>
+      </p:sp>
+      <p:pic>
+        <p:nvPicPr>
+          <p:cNvPr id="6" name="Image 0" descr="C:\temp\CoworkLab\v2\_working\screenshots\tel1_01_input.png">    </p:cNvPr>
+          <p:cNvPicPr>
+            <a:picLocks noChangeAspect="1"/>
+          </p:cNvPicPr>
+          <p:nvPr/>
+        </p:nvPicPr>
+        <p:blipFill>
+          <a:blip r:embed="rId1"/>
+          <a:stretch>
+            <a:fillRect/>
+          </a:stretch>
+        </p:blipFill>
+        <p:spPr>
+          <a:xfrm>
+            <a:off x="640080" y="1828800"/>
+            <a:ext cx="5074920" cy="3323458"/>
+          </a:xfrm>
+          <a:prstGeom prst="rect">
+            <a:avLst/>
+          </a:prstGeom>
+        </p:spPr>
+      </p:pic>
+      <p:sp>
+        <p:nvSpPr>
+          <p:cNvPr id="7" name="Text 4"/>
+          <p:cNvSpPr/>
+          <p:nvPr/>
+        </p:nvSpPr>
+        <p:spPr>
+          <a:xfrm>
+            <a:off x="640080" y="5261986"/>
+            <a:ext cx="5074920" cy="320040"/>
+          </a:xfrm>
+          <a:prstGeom prst="rect">
+            <a:avLst/>
+          </a:prstGeom>
+          <a:noFill/>
+          <a:ln/>
+        </p:spPr>
+        <p:txBody>
+          <a:bodyPr wrap="square" rtlCol="0" anchor="ctr"/>
+          <a:lstStyle/>
+          <a:p>
+            <a:pPr algn="ctr" indent="0" marL="0">
+              <a:buNone/>
+            </a:pPr>
+            <a:r>
+              <a:rPr lang="en-US" sz="1350" b="1" dirty="0">
+                <a:solidFill>
+                  <a:srgbClr val="1B4B8F"/>
+                </a:solidFill>
+                <a:latin typeface="Microsoft JhengHei" pitchFamily="34" charset="0"/>
+                <a:ea typeface="Microsoft JhengHei" pitchFamily="34" charset="-122"/>
+                <a:cs typeface="Microsoft JhengHei" pitchFamily="34" charset="-120"/>
+              </a:rPr>
+              <a:t>① 你的輸入與指令</a:t>
+            </a:r>
+            <a:endParaRPr lang="en-US" sz="1350" dirty="0"/>
+          </a:p>
+        </p:txBody>
+      </p:sp>
+      <p:sp>
+        <p:nvSpPr>
+          <p:cNvPr id="8" name="Shape 5"/>
+          <p:cNvSpPr/>
+          <p:nvPr/>
+        </p:nvSpPr>
+        <p:spPr>
+          <a:xfrm>
+            <a:off x="6163056" y="1773936"/>
+            <a:ext cx="5184648" cy="3433186"/>
+          </a:xfrm>
+          <a:prstGeom prst="rect">
+            <a:avLst/>
+          </a:prstGeom>
+          <a:solidFill>
+            <a:srgbClr val="FFFFFF"/>
+          </a:solidFill>
+          <a:ln w="12700">
+            <a:solidFill>
+              <a:srgbClr val="E4E7F2"/>
+            </a:solidFill>
+            <a:prstDash val="solid"/>
+          </a:ln>
+          <a:effectLst>
+            <a:outerShdw sx="100000" sy="100000" kx="0" ky="0" algn="bl" rotWithShape="0" blurRad="114300" dist="38100" dir="5400000">
+              <a:srgbClr val="8A90B5">
+                <a:alpha val="22000"/>
+              </a:srgbClr>
+            </a:outerShdw>
+          </a:effectLst>
+        </p:spPr>
+      </p:sp>
+      <p:pic>
+        <p:nvPicPr>
+          <p:cNvPr id="9" name="Image 1" descr="C:\temp\CoworkLab\v2\_working\screenshots\tel1_04_summary.png">    </p:cNvPr>
+          <p:cNvPicPr>
+            <a:picLocks noChangeAspect="1"/>
+          </p:cNvPicPr>
+          <p:nvPr/>
+        </p:nvPicPr>
+        <p:blipFill>
+          <a:blip r:embed="rId2"/>
+          <a:stretch>
+            <a:fillRect/>
+          </a:stretch>
+        </p:blipFill>
+        <p:spPr>
+          <a:xfrm>
+            <a:off x="6217920" y="1828800"/>
+            <a:ext cx="5074920" cy="3323458"/>
+          </a:xfrm>
+          <a:prstGeom prst="rect">
+            <a:avLst/>
+          </a:prstGeom>
+        </p:spPr>
+      </p:pic>
+      <p:sp>
+        <p:nvSpPr>
+          <p:cNvPr id="10" name="Text 6"/>
+          <p:cNvSpPr/>
+          <p:nvPr/>
+        </p:nvSpPr>
+        <p:spPr>
+          <a:xfrm>
+            <a:off x="6217920" y="5261986"/>
+            <a:ext cx="5074920" cy="320040"/>
+          </a:xfrm>
+          <a:prstGeom prst="rect">
+            <a:avLst/>
+          </a:prstGeom>
+          <a:noFill/>
+          <a:ln/>
+        </p:spPr>
+        <p:txBody>
+          <a:bodyPr wrap="square" rtlCol="0" anchor="ctr"/>
+          <a:lstStyle/>
+          <a:p>
+            <a:pPr algn="ctr" indent="0" marL="0">
+              <a:buNone/>
+            </a:pPr>
+            <a:r>
+              <a:rPr lang="en-US" sz="1350" b="1" dirty="0">
+                <a:solidFill>
+                  <a:srgbClr val="1B4B8F"/>
+                </a:solidFill>
+                <a:latin typeface="Microsoft JhengHei" pitchFamily="34" charset="0"/>
+                <a:ea typeface="Microsoft JhengHei" pitchFamily="34" charset="-122"/>
+                <a:cs typeface="Microsoft JhengHei" pitchFamily="34" charset="-120"/>
+              </a:rPr>
+              <a:t>② 產出成果</a:t>
+            </a:r>
+            <a:endParaRPr lang="en-US" sz="1350" dirty="0"/>
+          </a:p>
+        </p:txBody>
+      </p:sp>
+      <p:sp>
+        <p:nvSpPr>
+          <p:cNvPr id="11" name="Shape 7"/>
+          <p:cNvSpPr/>
+          <p:nvPr/>
+        </p:nvSpPr>
+        <p:spPr>
+          <a:xfrm>
+            <a:off x="640080" y="5074920"/>
+            <a:ext cx="10911535" cy="1143000"/>
+          </a:xfrm>
+          <a:prstGeom prst="rect">
+            <a:avLst/>
+          </a:prstGeom>
+          <a:solidFill>
+            <a:srgbClr val="FFFFFF"/>
+          </a:solidFill>
+          <a:ln w="12700">
+            <a:solidFill>
+              <a:srgbClr val="E4E7F2"/>
+            </a:solidFill>
+            <a:prstDash val="solid"/>
+          </a:ln>
+        </p:spPr>
+      </p:sp>
+      <p:sp>
+        <p:nvSpPr>
+          <p:cNvPr id="12" name="Shape 8"/>
+          <p:cNvSpPr/>
+          <p:nvPr/>
+        </p:nvSpPr>
+        <p:spPr>
+          <a:xfrm>
+            <a:off x="640080" y="5074920"/>
+            <a:ext cx="91440" cy="1143000"/>
+          </a:xfrm>
+          <a:prstGeom prst="rect">
+            <a:avLst/>
+          </a:prstGeom>
+          <a:solidFill>
+            <a:srgbClr val="1B4B8F"/>
+          </a:solidFill>
+          <a:ln/>
+        </p:spPr>
+      </p:sp>
+      <p:sp>
+        <p:nvSpPr>
+          <p:cNvPr id="13" name="Text 9"/>
+          <p:cNvSpPr/>
+          <p:nvPr/>
+        </p:nvSpPr>
+        <p:spPr>
+          <a:xfrm>
+            <a:off x="914400" y="5184648"/>
+            <a:ext cx="1828800" cy="320040"/>
+          </a:xfrm>
+          <a:prstGeom prst="rect">
+            <a:avLst/>
+          </a:prstGeom>
+          <a:noFill/>
+          <a:ln/>
+        </p:spPr>
+        <p:txBody>
+          <a:bodyPr wrap="square" rtlCol="0" anchor="ctr"/>
+          <a:lstStyle/>
+          <a:p>
+            <a:pPr indent="0" marL="0">
+              <a:buNone/>
+            </a:pPr>
+            <a:r>
+              <a:rPr lang="en-US" sz="1400" b="1" dirty="0">
+                <a:solidFill>
+                  <a:srgbClr val="1E2235"/>
+                </a:solidFill>
+                <a:latin typeface="Microsoft JhengHei" pitchFamily="34" charset="0"/>
+                <a:ea typeface="Microsoft JhengHei" pitchFamily="34" charset="-122"/>
+                <a:cs typeface="Microsoft JhengHei" pitchFamily="34" charset="-120"/>
+              </a:rPr>
+              <a:t>產出驗收</a:t>
+            </a:r>
+            <a:endParaRPr lang="en-US" sz="1400" dirty="0"/>
+          </a:p>
+        </p:txBody>
+      </p:sp>
+      <p:pic>
+        <p:nvPicPr>
+          <p:cNvPr id="14" name="Image 2" descr="preencoded.png">    </p:cNvPr>
+          <p:cNvPicPr>
+            <a:picLocks noChangeAspect="1"/>
+          </p:cNvPicPr>
+          <p:nvPr/>
+        </p:nvPicPr>
+        <p:blipFill>
+          <a:blip r:embed="rId3"/>
+          <a:stretch>
+            <a:fillRect/>
+          </a:stretch>
+        </p:blipFill>
+        <p:spPr>
+          <a:xfrm>
+            <a:off x="2834640" y="5221224"/>
+            <a:ext cx="182880" cy="182880"/>
+          </a:xfrm>
+          <a:prstGeom prst="rect">
+            <a:avLst/>
+          </a:prstGeom>
+        </p:spPr>
+      </p:pic>
+      <p:sp>
+        <p:nvSpPr>
+          <p:cNvPr id="15" name="Text 10"/>
+          <p:cNvSpPr/>
+          <p:nvPr/>
+        </p:nvSpPr>
+        <p:spPr>
+          <a:xfrm>
+            <a:off x="3108960" y="5166360"/>
+            <a:ext cx="8168335" cy="310896"/>
+          </a:xfrm>
+          <a:prstGeom prst="rect">
+            <a:avLst/>
+          </a:prstGeom>
+          <a:noFill/>
+          <a:ln/>
+        </p:spPr>
+        <p:txBody>
+          <a:bodyPr wrap="square" rtlCol="0" anchor="ctr"/>
+          <a:lstStyle/>
+          <a:p>
+            <a:pPr indent="0" marL="0">
+              <a:buNone/>
+            </a:pPr>
+            <a:r>
+              <a:rPr lang="en-US" sz="1300" dirty="0">
+                <a:solidFill>
+                  <a:srgbClr val="1E2235"/>
+                </a:solidFill>
+                <a:latin typeface="Microsoft JhengHei" pitchFamily="34" charset="0"/>
+                <a:ea typeface="Microsoft JhengHei" pitchFamily="34" charset="-122"/>
+                <a:cs typeface="Microsoft JhengHei" pitchFamily="34" charset="-120"/>
+              </a:rPr>
+              <a:t>〔操作〕沒有上傳任何附件，Cowork 自己從信箱與 OneDrive 取得全部素材</a:t>
+            </a:r>
+            <a:endParaRPr lang="en-US" sz="1300" dirty="0"/>
+          </a:p>
+        </p:txBody>
+      </p:sp>
+      <p:pic>
+        <p:nvPicPr>
+          <p:cNvPr id="16" name="Image 3" descr="preencoded.png">    </p:cNvPr>
+          <p:cNvPicPr>
+            <a:picLocks noChangeAspect="1"/>
+          </p:cNvPicPr>
+          <p:nvPr/>
+        </p:nvPicPr>
+        <p:blipFill>
+          <a:blip r:embed="rId4"/>
+          <a:stretch>
+            <a:fillRect/>
+          </a:stretch>
+        </p:blipFill>
+        <p:spPr>
+          <a:xfrm>
+            <a:off x="2834640" y="5559552"/>
+            <a:ext cx="182880" cy="182880"/>
+          </a:xfrm>
+          <a:prstGeom prst="rect">
+            <a:avLst/>
+          </a:prstGeom>
+        </p:spPr>
+      </p:pic>
+      <p:sp>
+        <p:nvSpPr>
+          <p:cNvPr id="17" name="Text 11"/>
+          <p:cNvSpPr/>
+          <p:nvPr/>
+        </p:nvSpPr>
+        <p:spPr>
+          <a:xfrm>
+            <a:off x="3108960" y="5504688"/>
+            <a:ext cx="8168335" cy="310896"/>
+          </a:xfrm>
+          <a:prstGeom prst="rect">
+            <a:avLst/>
+          </a:prstGeom>
+          <a:noFill/>
+          <a:ln/>
+        </p:spPr>
+        <p:txBody>
+          <a:bodyPr wrap="square" rtlCol="0" anchor="ctr"/>
+          <a:lstStyle/>
+          <a:p>
+            <a:pPr indent="0" marL="0">
+              <a:buNone/>
+            </a:pPr>
+            <a:r>
+              <a:rPr lang="en-US" sz="1300" dirty="0">
+                <a:solidFill>
+                  <a:srgbClr val="1E2235"/>
+                </a:solidFill>
+                <a:latin typeface="Microsoft JhengHei" pitchFamily="34" charset="0"/>
+                <a:ea typeface="Microsoft JhengHei" pitchFamily="34" charset="-122"/>
+                <a:cs typeface="Microsoft JhengHei" pitchFamily="34" charset="-120"/>
+              </a:rPr>
+              <a:t>〔操作〕兩份回覆都停留在 Outlook 草稿匣，你已實際打開草稿匣核對過</a:t>
+            </a:r>
+            <a:endParaRPr lang="en-US" sz="1300" dirty="0"/>
+          </a:p>
+        </p:txBody>
+      </p:sp>
+      <p:pic>
+        <p:nvPicPr>
+          <p:cNvPr id="18" name="Image 4" descr="preencoded.png">    </p:cNvPr>
+          <p:cNvPicPr>
+            <a:picLocks noChangeAspect="1"/>
+          </p:cNvPicPr>
+          <p:nvPr/>
+        </p:nvPicPr>
+        <p:blipFill>
+          <a:blip r:embed="rId5"/>
+          <a:stretch>
+            <a:fillRect/>
+          </a:stretch>
+        </p:blipFill>
+        <p:spPr>
+          <a:xfrm>
+            <a:off x="2834640" y="5897880"/>
+            <a:ext cx="182880" cy="182880"/>
+          </a:xfrm>
+          <a:prstGeom prst="rect">
+            <a:avLst/>
+          </a:prstGeom>
+        </p:spPr>
+      </p:pic>
+      <p:sp>
+        <p:nvSpPr>
+          <p:cNvPr id="19" name="Text 12"/>
+          <p:cNvSpPr/>
+          <p:nvPr/>
+        </p:nvSpPr>
+        <p:spPr>
+          <a:xfrm>
+            <a:off x="3108960" y="5843016"/>
+            <a:ext cx="8168335" cy="310896"/>
+          </a:xfrm>
+          <a:prstGeom prst="rect">
+            <a:avLst/>
+          </a:prstGeom>
+          <a:noFill/>
+          <a:ln/>
+        </p:spPr>
+        <p:txBody>
+          <a:bodyPr wrap="square" rtlCol="0" anchor="ctr"/>
+          <a:lstStyle/>
+          <a:p>
+            <a:pPr indent="0" marL="0">
+              <a:buNone/>
+            </a:pPr>
+            <a:r>
+              <a:rPr lang="en-US" sz="1300" dirty="0">
+                <a:solidFill>
+                  <a:srgbClr val="1E2235"/>
+                </a:solidFill>
+                <a:latin typeface="Microsoft JhengHei" pitchFamily="34" charset="0"/>
+                <a:ea typeface="Microsoft JhengHei" pitchFamily="34" charset="-122"/>
+                <a:cs typeface="Microsoft JhengHei" pitchFamily="34" charset="-120"/>
+              </a:rPr>
+              <a:t>〔時間線〕明確指出客服「當日派工」承諾與工單實際建立時間的落差，未沿用錯誤陳述</a:t>
+            </a:r>
+            <a:endParaRPr lang="en-US" sz="1300" dirty="0"/>
+          </a:p>
+        </p:txBody>
+      </p:sp>
+      <p:sp>
+        <p:nvSpPr>
+          <p:cNvPr id="20" name="Text 13"/>
+          <p:cNvSpPr/>
+          <p:nvPr/>
+        </p:nvSpPr>
+        <p:spPr>
+          <a:xfrm>
+            <a:off x="640080" y="6473952"/>
+            <a:ext cx="5486400" cy="274320"/>
+          </a:xfrm>
+          <a:prstGeom prst="rect">
+            <a:avLst/>
+          </a:prstGeom>
+          <a:noFill/>
+          <a:ln/>
+        </p:spPr>
+        <p:txBody>
+          <a:bodyPr wrap="square" rtlCol="0" anchor="ctr"/>
+          <a:lstStyle/>
+          <a:p>
+            <a:pPr algn="l" indent="0" marL="0">
+              <a:buNone/>
+            </a:pPr>
+            <a:r>
+              <a:rPr lang="en-US" sz="900" dirty="0">
+                <a:solidFill>
+                  <a:srgbClr val="5B6079"/>
+                </a:solidFill>
+                <a:latin typeface="Microsoft JhengHei" pitchFamily="34" charset="0"/>
+                <a:ea typeface="Microsoft JhengHei" pitchFamily="34" charset="-122"/>
+                <a:cs typeface="Microsoft JhengHei" pitchFamily="34" charset="-120"/>
+              </a:rPr>
+              <a:t>Microsoft 365 Copilot Cowork</a:t>
+            </a:r>
+            <a:endParaRPr lang="en-US" sz="900" dirty="0"/>
+          </a:p>
+        </p:txBody>
+      </p:sp>
+      <p:sp>
+        <p:nvSpPr>
+          <p:cNvPr id="21" name="Text 14"/>
+          <p:cNvSpPr/>
+          <p:nvPr/>
+        </p:nvSpPr>
+        <p:spPr>
+          <a:xfrm>
+            <a:off x="11002975" y="6473952"/>
+            <a:ext cx="548640" cy="274320"/>
+          </a:xfrm>
+          <a:prstGeom prst="rect">
+            <a:avLst/>
+          </a:prstGeom>
+          <a:noFill/>
+          <a:ln/>
+        </p:spPr>
+        <p:txBody>
+          <a:bodyPr wrap="square" rtlCol="0" anchor="ctr"/>
+          <a:lstStyle/>
+          <a:p>
+            <a:pPr algn="r" indent="0" marL="0">
+              <a:buNone/>
+            </a:pPr>
+            <a:r>
+              <a:rPr lang="en-US" sz="900" dirty="0">
+                <a:solidFill>
+                  <a:srgbClr val="5B6079"/>
+                </a:solidFill>
+                <a:latin typeface="Microsoft JhengHei" pitchFamily="34" charset="0"/>
+                <a:ea typeface="Microsoft JhengHei" pitchFamily="34" charset="-122"/>
+                <a:cs typeface="Microsoft JhengHei" pitchFamily="34" charset="-120"/>
+              </a:rPr>
+              <a:t>9</a:t>
+            </a:r>
+            <a:endParaRPr lang="en-US" sz="900" dirty="0"/>
+          </a:p>
+        </p:txBody>
+      </p:sp>
+    </p:spTree>
+  </p:cSld>
+  <p:clrMapOvr>
+    <a:masterClrMapping/>
+  </p:clrMapOvr>
+</p:sld>
+</file>
+
+<file path=ppt/slides/slide11.xml><?xml version="1.0" encoding="utf-8"?>
+<p:sld xmlns:a="http://schemas.openxmlformats.org/drawingml/2006/main" xmlns:r="http://schemas.openxmlformats.org/officeDocument/2006/relationships" xmlns:p="http://schemas.openxmlformats.org/presentationml/2006/main">
+  <p:cSld name="Slide 11">
+    <p:bg>
+      <p:bgPr>
+        <a:solidFill>
           <a:srgbClr val="0F1031"/>
         </a:solidFill>
       </p:bgPr>
@@ -3428,7 +4188,7 @@
                 <a:ea typeface="Microsoft JhengHei" pitchFamily="34" charset="-122"/>
                 <a:cs typeface="Microsoft JhengHei" pitchFamily="34" charset="-120"/>
               </a:rPr>
-              <a:t>八家企業客戶的專線月結，判定誰該賠、賠多少、然後寄出賠償通知。這個情境的重點不在計算 —— 而在**它會不會請求你一次核准八封信**。答案是不會，而且是它自己說「我一次只送一封」。這個情境刻意與其他用批次核准的情境形成對照：涉及對外承諾金額的動作，效率不該優先於正確。</a:t>
+              <a:t>八家企業客戶的專線月結，判定誰該賠、賠多少、然後寄出賠償通知。這個情境的重點不在計算 —— 而在它會不會請求你一次核准八封信。答案是不會，而且是它自己說「我一次只送一封」。這個情境刻意與其他用批次核准的情境形成對照：涉及對外承諾金額的動作，效率不該優先於正確。</a:t>
             </a:r>
             <a:endParaRPr lang="en-US" sz="1600" dirty="0"/>
           </a:p>
@@ -3614,7 +4374,7 @@
                 <a:ea typeface="Microsoft JhengHei" pitchFamily="34" charset="-122"/>
                 <a:cs typeface="Microsoft JhengHei" pitchFamily="34" charset="-120"/>
               </a:rPr>
-              <a:t>提示詞裡刻意要求「不論賠或不賠都要列，並寫出判定理由」。</a:t>
+              <a:t>直接送出下面的提示詞。</a:t>
             </a:r>
             <a:endParaRPr lang="en-US" sz="1300" dirty="0"/>
           </a:p>
@@ -3719,7 +4479,7 @@
                 <a:ea typeface="Microsoft JhengHei" pitchFamily="34" charset="-122"/>
                 <a:cs typeface="Microsoft JhengHei" pitchFamily="34" charset="-120"/>
               </a:rPr>
-              <a:t>驗收總表：兩個最容易算錯的地方</a:t>
+              <a:t>自己驗算兩家，再看它的判定對不對</a:t>
             </a:r>
             <a:endParaRPr lang="en-US" sz="1600" dirty="0"/>
           </a:p>
@@ -3761,7 +4521,7 @@
                 <a:ea typeface="Microsoft JhengHei" pitchFamily="34" charset="-122"/>
                 <a:cs typeface="Microsoft JhengHei" pitchFamily="34" charset="-120"/>
               </a:rPr>
-              <a:t>八家判定全部正確，而且它會主動點名兩個陷阱。</a:t>
+              <a:t>先別急著往下走。</a:t>
             </a:r>
             <a:endParaRPr lang="en-US" sz="1300" dirty="0"/>
           </a:p>
@@ -3866,7 +4626,7 @@
                 <a:ea typeface="Microsoft JhengHei" pitchFamily="34" charset="-122"/>
                 <a:cs typeface="Microsoft JhengHei" pitchFamily="34" charset="-120"/>
               </a:rPr>
-              <a:t>⭐ 核准卡的收件者欄位一定要看</a:t>
+              <a:t>⭐ 核准第一封，並逐格檢查核准卡的收件者欄位</a:t>
             </a:r>
             <a:endParaRPr lang="en-US" sz="1600" dirty="0"/>
           </a:p>
@@ -3908,7 +4668,7 @@
                 <a:ea typeface="Microsoft JhengHei" pitchFamily="34" charset="-122"/>
                 <a:cs typeface="Microsoft JhengHei" pitchFamily="34" charset="-120"/>
               </a:rPr>
-              <a:t>**寄信核准卡跳出來時，第一件事是看收件者欄位。</a:t>
+              <a:t>用下面的提示詞核准第一封。</a:t>
             </a:r>
             <a:endParaRPr lang="en-US" sz="1300" dirty="0"/>
           </a:p>
@@ -4013,7 +4773,7 @@
                 <a:ea typeface="Microsoft JhengHei" pitchFamily="34" charset="-122"/>
                 <a:cs typeface="Microsoft JhengHei" pitchFamily="34" charset="-120"/>
               </a:rPr>
-              <a:t>一次只送一封，是它自己堅持的</a:t>
+              <a:t>確認只寄出一封，並問它為什麼不批次送</a:t>
             </a:r>
             <a:endParaRPr lang="en-US" sz="1600" dirty="0"/>
           </a:p>
@@ -4055,7 +4815,7 @@
                 <a:ea typeface="Microsoft JhengHei" pitchFamily="34" charset="-122"/>
                 <a:cs typeface="Microsoft JhengHei" pitchFamily="34" charset="-120"/>
               </a:rPr>
-              <a:t>核准第一封之後，只有長慶生技那封被寄出，另外兩封留在草稿匣，它接著問你要核准哪一封。</a:t>
+              <a:t>到 Outlook 確認只有第一封離開草稿匣、其餘仍在，再用下面的提示詞問它為什麼不一次送完。</a:t>
             </a:r>
             <a:endParaRPr lang="en-US" sz="1300" dirty="0"/>
           </a:p>
@@ -4133,7 +4893,7 @@
                 <a:ea typeface="Microsoft JhengHei" pitchFamily="34" charset="-122"/>
                 <a:cs typeface="Microsoft JhengHei" pitchFamily="34" charset="-120"/>
               </a:rPr>
-              <a:t>9</a:t>
+              <a:t>10</a:t>
             </a:r>
             <a:endParaRPr lang="en-US" sz="900" dirty="0"/>
           </a:p>
@@ -4147,9 +4907,9 @@
 </p:sld>
 </file>
 
-<file path=ppt/slides/slide11.xml><?xml version="1.0" encoding="utf-8"?>
+<file path=ppt/slides/slide12.xml><?xml version="1.0" encoding="utf-8"?>
 <p:sld xmlns:a="http://schemas.openxmlformats.org/drawingml/2006/main" xmlns:r="http://schemas.openxmlformats.org/officeDocument/2006/relationships" xmlns:p="http://schemas.openxmlformats.org/presentationml/2006/main">
-  <p:cSld name="Slide 11">
+  <p:cSld name="Slide 12">
     <p:bg>
       <p:bgPr>
         <a:solidFill>
@@ -4600,7 +5360,7 @@
                 <a:ea typeface="Microsoft JhengHei" pitchFamily="34" charset="-122"/>
                 <a:cs typeface="Microsoft JhengHei" pitchFamily="34" charset="-120"/>
               </a:rPr>
-              <a:t>總表列出全部八家，不論賠或不賠都附判定理由</a:t>
+              <a:t>〔總表〕列出全部八家，不論賠或不賠都附判定理由</a:t>
             </a:r>
             <a:endParaRPr lang="en-US" sz="1300" dirty="0"/>
           </a:p>
@@ -4663,7 +5423,7 @@
                 <a:ea typeface="Microsoft JhengHei" pitchFamily="34" charset="-122"/>
                 <a:cs typeface="Microsoft JhengHei" pitchFamily="34" charset="-120"/>
               </a:rPr>
-              <a:t>宏遠科技扣除計畫性維護後判為不賠（若只看總中斷會誤賠）</a:t>
+              <a:t>〔總表〕宏遠科技扣除計畫性維護後判為不賠（只看總中斷會誤賠）</a:t>
             </a:r>
             <a:endParaRPr lang="en-US" sz="1300" dirty="0"/>
           </a:p>
@@ -4726,7 +5486,7 @@
                 <a:ea typeface="Microsoft JhengHei" pitchFamily="34" charset="-122"/>
                 <a:cs typeface="Microsoft JhengHei" pitchFamily="34" charset="-120"/>
               </a:rPr>
-              <a:t>凱鈺網通因可用率未達標而判為要賠（若只看時數門檻會漏賠）</a:t>
+              <a:t>〔總表〕凱鈺網通因可用率未達標而判為要賠（只看時數門檻會漏賠）</a:t>
             </a:r>
             <a:endParaRPr lang="en-US" sz="1300" dirty="0"/>
           </a:p>
@@ -4804,7 +5564,7 @@
                 <a:ea typeface="Microsoft JhengHei" pitchFamily="34" charset="-122"/>
                 <a:cs typeface="Microsoft JhengHei" pitchFamily="34" charset="-120"/>
               </a:rPr>
-              <a:t>10</a:t>
+              <a:t>11</a:t>
             </a:r>
             <a:endParaRPr lang="en-US" sz="900" dirty="0"/>
           </a:p>
@@ -4818,9 +5578,9 @@
 </p:sld>
 </file>
 
-<file path=ppt/slides/slide12.xml><?xml version="1.0" encoding="utf-8"?>
+<file path=ppt/slides/slide13.xml><?xml version="1.0" encoding="utf-8"?>
 <p:sld xmlns:a="http://schemas.openxmlformats.org/drawingml/2006/main" xmlns:r="http://schemas.openxmlformats.org/officeDocument/2006/relationships" xmlns:p="http://schemas.openxmlformats.org/presentationml/2006/main">
-  <p:cSld name="Slide 12">
+  <p:cSld name="Slide 13">
     <p:bg>
       <p:bgPr>
         <a:solidFill>
@@ -5362,7 +6122,7 @@
                 <a:ea typeface="Microsoft JhengHei" pitchFamily="34" charset="-122"/>
                 <a:cs typeface="Microsoft JhengHei" pitchFamily="34" charset="-120"/>
               </a:rPr>
-              <a:t>個資外洩通報最怕的不是不會寫，是**時鐘從哪一刻開始走算錯了**。事件發生與事件發現經常相差好幾天，法定 72 小時是從「發現」起算 —— 算錯一次，你會以為早就逾期，或以為還很充裕。這個情境建立一個事件觸發任務讓 Cowork 待命：資安通報信一進來就自己醒來，讀 SOP 判等級、算出還剩幾小時、產出通報內容，同時也示範了觸發任務該做什麼、不該做什麼。</a:t>
+              <a:t>個資外洩通報最怕的不是不會寫，是時鐘從哪一刻開始走算錯了。事件發生與事件發現經常相差好幾天，法定 72 小時是從「發現」起算 —— 算錯一次，你會以為早就逾期，或以為還很充裕。這個情境建立一個事件觸發任務讓 Cowork 待命：資安通報信一進來就自己醒來，讀 SOP 判等級、算出還剩幾小時、產出通報內容，同時也示範了觸發任務該做什麼、不該做什麼。</a:t>
             </a:r>
             <a:endParaRPr lang="en-US" sz="1600" dirty="0"/>
           </a:p>
@@ -5548,7 +6308,7 @@
                 <a:ea typeface="Microsoft JhengHei" pitchFamily="34" charset="-122"/>
                 <a:cs typeface="Microsoft JhengHei" pitchFamily="34" charset="-120"/>
               </a:rPr>
-              <a:t>觸發任務的執行內容要刻意收斂：**讀信、讀 SOP、判等級、算期限、產出通報內容**，全部寫進工作結果就好…</a:t>
+              <a:t>送出下面的提示詞建立觸發任務。</a:t>
             </a:r>
             <a:endParaRPr lang="en-US" sz="1300" dirty="0"/>
           </a:p>
@@ -5653,7 +6413,7 @@
                 <a:ea typeface="Microsoft JhengHei" pitchFamily="34" charset="-122"/>
                 <a:cs typeface="Microsoft JhengHei" pitchFamily="34" charset="-120"/>
               </a:rPr>
-              <a:t>⭐ 為什麼觸發任務不能做需要核准的事</a:t>
+              <a:t>⭐ 問它為什麼觸發任務不能包含需要核准的動作</a:t>
             </a:r>
             <a:endParaRPr lang="en-US" sz="1600" dirty="0"/>
           </a:p>
@@ -5695,7 +6455,7 @@
                 <a:ea typeface="Microsoft JhengHei" pitchFamily="34" charset="-122"/>
                 <a:cs typeface="Microsoft JhengHei" pitchFamily="34" charset="-120"/>
               </a:rPr>
-              <a:t>這是設計觸發任務時最重要的一條原則。</a:t>
+              <a:t>用下面的提示詞讓它自己解釋這條限制。</a:t>
             </a:r>
             <a:endParaRPr lang="en-US" sz="1300" dirty="0"/>
           </a:p>
@@ -5842,7 +6602,7 @@
                 <a:ea typeface="Microsoft JhengHei" pitchFamily="34" charset="-122"/>
                 <a:cs typeface="Microsoft JhengHei" pitchFamily="34" charset="-120"/>
               </a:rPr>
-              <a:t>下完指令會跳出一張「新的自動化」設定卡，列出名稱、觸發條件與執行內容。</a:t>
+              <a:t>在「新的自動化」設定卡上按下右下角的「啟用自動化」，到自動化頁面確認它列在上面且不是「已暫停」。</a:t>
             </a:r>
             <a:endParaRPr lang="en-US" sz="1300" dirty="0"/>
           </a:p>
@@ -5947,7 +6707,7 @@
                 <a:ea typeface="Microsoft JhengHei" pitchFamily="34" charset="-122"/>
                 <a:cs typeface="Microsoft JhengHei" pitchFamily="34" charset="-120"/>
               </a:rPr>
-              <a:t>觸發之後：執行記錄在觸發器裡面，不在「執行」清單</a:t>
+              <a:t>到觸發器詳細頁看執行記錄，不是看「執行」清單</a:t>
             </a:r>
             <a:endParaRPr lang="en-US" sz="1600" dirty="0"/>
           </a:p>
@@ -5989,7 +6749,7 @@
                 <a:ea typeface="Microsoft JhengHei" pitchFamily="34" charset="-122"/>
                 <a:cs typeface="Microsoft JhengHei" pitchFamily="34" charset="-120"/>
               </a:rPr>
-              <a:t>寄出測試信後，回到自動化頁面**點進這個觸發器本身**，最下方有「執行記錄」。</a:t>
+              <a:t>寄出測試信後，回到自動化頁面點進這個觸發器本身，捲到最下方看「執行記錄」。</a:t>
             </a:r>
             <a:endParaRPr lang="en-US" sz="1300" dirty="0"/>
           </a:p>
@@ -6094,7 +6854,7 @@
                 <a:ea typeface="Microsoft JhengHei" pitchFamily="34" charset="-122"/>
                 <a:cs typeface="Microsoft JhengHei" pitchFamily="34" charset="-120"/>
               </a:rPr>
-              <a:t>⭐ 核心考點：72 小時從「發現」起算，不是「發生」</a:t>
+              <a:t>⭐ 核心考點：自己找出信裡的兩個時間，再驗它取哪一個</a:t>
             </a:r>
             <a:endParaRPr lang="en-US" sz="1600" dirty="0"/>
           </a:p>
@@ -6136,7 +6896,7 @@
                 <a:ea typeface="Microsoft JhengHei" pitchFamily="34" charset="-122"/>
                 <a:cs typeface="Microsoft JhengHei" pitchFamily="34" charset="-120"/>
               </a:rPr>
-              <a:t>通報信裡有兩個時間：事件**發生**於 08-20 02:14（依日誌回溯）…</a:t>
+              <a:t>先自己讀一遍測試信，找出裡面的兩個時間 —— 事件發生時間與事件發現時間。</a:t>
             </a:r>
             <a:endParaRPr lang="en-US" sz="1300" dirty="0"/>
           </a:p>
@@ -6283,7 +7043,7 @@
                 <a:ea typeface="Microsoft JhengHei" pitchFamily="34" charset="-122"/>
                 <a:cs typeface="Microsoft JhengHei" pitchFamily="34" charset="-120"/>
               </a:rPr>
-              <a:t>看過判定結果、確認期限與分級沒問題之後，在同一個對話裡接著下指令，把需要核准的部分做完。</a:t>
+              <a:t>確認期限與分級沒問題後，在同一個對話裡接著下指令，把需要核准的部分做完。</a:t>
             </a:r>
             <a:endParaRPr lang="en-US" sz="1300" dirty="0"/>
           </a:p>
@@ -6361,7 +7121,7 @@
                 <a:ea typeface="Microsoft JhengHei" pitchFamily="34" charset="-122"/>
                 <a:cs typeface="Microsoft JhengHei" pitchFamily="34" charset="-120"/>
               </a:rPr>
-              <a:t>11</a:t>
+              <a:t>12</a:t>
             </a:r>
             <a:endParaRPr lang="en-US" sz="900" dirty="0"/>
           </a:p>
@@ -6375,9 +7135,9 @@
 </p:sld>
 </file>
 
-<file path=ppt/slides/slide13.xml><?xml version="1.0" encoding="utf-8"?>
+<file path=ppt/slides/slide14.xml><?xml version="1.0" encoding="utf-8"?>
 <p:sld xmlns:a="http://schemas.openxmlformats.org/drawingml/2006/main" xmlns:r="http://schemas.openxmlformats.org/officeDocument/2006/relationships" xmlns:p="http://schemas.openxmlformats.org/presentationml/2006/main">
-  <p:cSld name="Slide 13">
+  <p:cSld name="Slide 14">
     <p:bg>
       <p:bgPr>
         <a:solidFill>
@@ -6828,7 +7588,7 @@
                 <a:ea typeface="Microsoft JhengHei" pitchFamily="34" charset="-122"/>
                 <a:cs typeface="Microsoft JhengHei" pitchFamily="34" charset="-120"/>
               </a:rPr>
-              <a:t>觸發任務的執行內容只包含判定與計算，沒有寄信或排行事曆</a:t>
+              <a:t>〔觸發器〕執行內容只包含判定與計算，沒有寄信或排行事曆</a:t>
             </a:r>
             <a:endParaRPr lang="en-US" sz="1300" dirty="0"/>
           </a:p>
@@ -6891,7 +7651,7 @@
                 <a:ea typeface="Microsoft JhengHei" pitchFamily="34" charset="-122"/>
                 <a:cs typeface="Microsoft JhengHei" pitchFamily="34" charset="-120"/>
               </a:rPr>
-              <a:t>設定卡按下「啟用自動化」後，自動化頁面確實看得到這個觸發器</a:t>
+              <a:t>〔觸發器〕設定卡按下「啟用自動化」後，自動化頁面確實看得到這個觸發器</a:t>
             </a:r>
             <a:endParaRPr lang="en-US" sz="1300" dirty="0"/>
           </a:p>
@@ -6954,7 +7714,7 @@
                 <a:ea typeface="Microsoft JhengHei" pitchFamily="34" charset="-122"/>
                 <a:cs typeface="Microsoft JhengHei" pitchFamily="34" charset="-120"/>
               </a:rPr>
-              <a:t>測試信是在觸發器進入待命之後才寄出</a:t>
+              <a:t>〔觸發器〕測試信是在觸發器進入待命之後才寄出</a:t>
             </a:r>
             <a:endParaRPr lang="en-US" sz="1300" dirty="0"/>
           </a:p>
@@ -7032,7 +7792,7 @@
                 <a:ea typeface="Microsoft JhengHei" pitchFamily="34" charset="-122"/>
                 <a:cs typeface="Microsoft JhengHei" pitchFamily="34" charset="-120"/>
               </a:rPr>
-              <a:t>12</a:t>
+              <a:t>13</a:t>
             </a:r>
             <a:endParaRPr lang="en-US" sz="900" dirty="0"/>
           </a:p>
@@ -7046,9 +7806,9 @@
 </p:sld>
 </file>
 
-<file path=ppt/slides/slide14.xml><?xml version="1.0" encoding="utf-8"?>
+<file path=ppt/slides/slide15.xml><?xml version="1.0" encoding="utf-8"?>
 <p:sld xmlns:a="http://schemas.openxmlformats.org/drawingml/2006/main" xmlns:r="http://schemas.openxmlformats.org/officeDocument/2006/relationships" xmlns:p="http://schemas.openxmlformats.org/presentationml/2006/main">
-  <p:cSld name="Slide 14">
+  <p:cSld name="Slide 15">
     <p:bg>
       <p:bgPr>
         <a:solidFill>
@@ -7529,7 +8289,7 @@
                 <a:ea typeface="Microsoft JhengHei" pitchFamily="34" charset="-122"/>
                 <a:cs typeface="Microsoft JhengHei" pitchFamily="34" charset="-120"/>
               </a:rPr>
-              <a:t>兩百筆客訴原始文字，沒有分類、沒有標籤，就是客戶怎麼說就怎麼記。一般做法是分類、統計、然後照件數排優先序 —— 而這正是最容易做錯的地方。這個情境要示範的是：**件數最多的類別，不一定是最該優先處理的問題。**差別在集中度，而集中度要靠跨檔案比對才看得出來。</a:t>
+              <a:t>兩百筆客訴原始文字，沒有分類、沒有標籤，就是客戶怎麼說就怎麼記。一般做法是分類、統計、然後照件數排優先序 —— 而這正是最容易做錯的地方。這個情境要示範的是：件數最多的類別，不一定是最該優先處理的問題。差別在集中度，而集中度要靠跨檔案比對才看得出來。</a:t>
             </a:r>
             <a:endParaRPr lang="en-US" sz="1600" dirty="0"/>
           </a:p>
@@ -7715,7 +8475,7 @@
                 <a:ea typeface="Microsoft JhengHei" pitchFamily="34" charset="-122"/>
                 <a:cs typeface="Microsoft JhengHei" pitchFamily="34" charset="-120"/>
               </a:rPr>
-              <a:t>提示詞的關鍵在最後一句：「報告要同時呈現件數排序與建議處理優先序，並說明兩者為何不同」。</a:t>
+              <a:t>直接送出下面的提示詞。</a:t>
             </a:r>
             <a:endParaRPr lang="en-US" sz="1300" dirty="0"/>
           </a:p>
@@ -7820,7 +8580,7 @@
                 <a:ea typeface="Microsoft JhengHei" pitchFamily="34" charset="-122"/>
                 <a:cs typeface="Microsoft JhengHei" pitchFamily="34" charset="-120"/>
               </a:rPr>
-              <a:t>⭐ 結論：修一個基站，消除三成客訴</a:t>
+              <a:t>⭐ 核對它為什麼把最大類別排在第一：件數，還是集中度？</a:t>
             </a:r>
             <a:endParaRPr lang="en-US" sz="1600" dirty="0"/>
           </a:p>
@@ -7862,7 +8622,7 @@
                 <a:ea typeface="Microsoft JhengHei" pitchFamily="34" charset="-122"/>
                 <a:cs typeface="Microsoft JhengHei" pitchFamily="34" charset="-120"/>
               </a:rPr>
-              <a:t>兩百筆會被歸為六類，訊號類 60 件（30.0%）為最大類。</a:t>
+              <a:t>看完報告後，用下面的提示詞追問它排序的依據。</a:t>
             </a:r>
             <a:endParaRPr lang="en-US" sz="1300" dirty="0"/>
           </a:p>
@@ -7967,7 +8727,7 @@
                 <a:ea typeface="Microsoft JhengHei" pitchFamily="34" charset="-122"/>
                 <a:cs typeface="Microsoft JhengHei" pitchFamily="34" charset="-120"/>
               </a:rPr>
-              <a:t>它多做的三件事，比分析本身更值得看</a:t>
+              <a:t>找出它「多做的三件事」，這比分析本身更值得看</a:t>
             </a:r>
             <a:endParaRPr lang="en-US" sz="1600" dirty="0"/>
           </a:p>
@@ -8009,7 +8769,7 @@
                 <a:ea typeface="Microsoft JhengHei" pitchFamily="34" charset="-122"/>
                 <a:cs typeface="Microsoft JhengHei" pitchFamily="34" charset="-120"/>
               </a:rPr>
-              <a:t>**一、它發現修復後客訴沒有停。</a:t>
+              <a:t>在報告裡找出三處沒有人要求它做的內容，再用下面的提示詞請它把不確定的部分全部列出來對照。</a:t>
             </a:r>
             <a:endParaRPr lang="en-US" sz="1300" dirty="0"/>
           </a:p>
@@ -8141,7 +8901,7 @@
                 <a:ea typeface="Microsoft JhengHei" pitchFamily="34" charset="-122"/>
                 <a:cs typeface="Microsoft JhengHei" pitchFamily="34" charset="-120"/>
               </a:rPr>
-              <a:t>這個情境全程沒有對外動作，因此不會出現核准卡 —— 產出是一份存進 OneDrive 的分析報告。</a:t>
+              <a:t>這個情境全程不會出現核准卡 —— 沒有對外動作，產出是一份存進 OneDrive 的分析報告。</a:t>
             </a:r>
             <a:endParaRPr lang="en-US" sz="1250" dirty="0"/>
           </a:p>
@@ -8219,7 +8979,7 @@
                 <a:ea typeface="Microsoft JhengHei" pitchFamily="34" charset="-122"/>
                 <a:cs typeface="Microsoft JhengHei" pitchFamily="34" charset="-120"/>
               </a:rPr>
-              <a:t>13</a:t>
+              <a:t>14</a:t>
             </a:r>
             <a:endParaRPr lang="en-US" sz="900" dirty="0"/>
           </a:p>
@@ -8233,9 +8993,9 @@
 </p:sld>
 </file>
 
-<file path=ppt/slides/slide15.xml><?xml version="1.0" encoding="utf-8"?>
+<file path=ppt/slides/slide16.xml><?xml version="1.0" encoding="utf-8"?>
 <p:sld xmlns:a="http://schemas.openxmlformats.org/drawingml/2006/main" xmlns:r="http://schemas.openxmlformats.org/officeDocument/2006/relationships" xmlns:p="http://schemas.openxmlformats.org/presentationml/2006/main">
-  <p:cSld name="Slide 15">
+  <p:cSld name="Slide 16">
     <p:bg>
       <p:bgPr>
         <a:solidFill>
@@ -8591,7 +9351,7 @@
                 <a:ea typeface="Microsoft JhengHei" pitchFamily="34" charset="-122"/>
                 <a:cs typeface="Microsoft JhengHei" pitchFamily="34" charset="-120"/>
               </a:rPr>
-              <a:t>兩百筆原始文字被歸納成不超過八個類別，並附件數與佔比</a:t>
+              <a:t>〔歸類〕兩百筆原始文字被歸納成不超過八個類別，並附件數與佔比</a:t>
             </a:r>
             <a:endParaRPr lang="en-US" sz="1300" dirty="0"/>
           </a:p>
@@ -8654,7 +9414,7 @@
                 <a:ea typeface="Microsoft JhengHei" pitchFamily="34" charset="-122"/>
                 <a:cs typeface="Microsoft JhengHei" pitchFamily="34" charset="-120"/>
               </a:rPr>
-              <a:t>報告同時呈現件數排序與建議處理優先序，並說明兩者不同的理由</a:t>
+              <a:t>〔兩份排序〕報告同時呈現件數排序與建議處理優先序，並說明兩者不同的理由</a:t>
             </a:r>
             <a:endParaRPr lang="en-US" sz="1300" dirty="0"/>
           </a:p>
@@ -8717,7 +9477,7 @@
                 <a:ea typeface="Microsoft JhengHei" pitchFamily="34" charset="-122"/>
                 <a:cs typeface="Microsoft JhengHei" pitchFamily="34" charset="-120"/>
               </a:rPr>
-              <a:t>最大類別的集中維度有被指出（集中在哪、集中度多少）</a:t>
+              <a:t>〔根因〕最大類別的集中維度有被指出（集中在哪、集中度多少）</a:t>
             </a:r>
             <a:endParaRPr lang="en-US" sz="1300" dirty="0"/>
           </a:p>
@@ -8795,7 +9555,7 @@
                 <a:ea typeface="Microsoft JhengHei" pitchFamily="34" charset="-122"/>
                 <a:cs typeface="Microsoft JhengHei" pitchFamily="34" charset="-120"/>
               </a:rPr>
-              <a:t>14</a:t>
+              <a:t>15</a:t>
             </a:r>
             <a:endParaRPr lang="en-US" sz="900" dirty="0"/>
           </a:p>
@@ -8809,9 +9569,9 @@
 </p:sld>
 </file>
 
-<file path=ppt/slides/slide16.xml><?xml version="1.0" encoding="utf-8"?>
+<file path=ppt/slides/slide17.xml><?xml version="1.0" encoding="utf-8"?>
 <p:sld xmlns:a="http://schemas.openxmlformats.org/drawingml/2006/main" xmlns:r="http://schemas.openxmlformats.org/officeDocument/2006/relationships" xmlns:p="http://schemas.openxmlformats.org/presentationml/2006/main">
-  <p:cSld name="Slide 16">
+  <p:cSld name="Slide 17">
     <p:bg>
       <p:bgPr>
         <a:solidFill>
@@ -9231,7 +9991,7 @@
                 <a:ea typeface="Microsoft JhengHei" pitchFamily="34" charset="-122"/>
                 <a:cs typeface="Microsoft JhengHei" pitchFamily="34" charset="-120"/>
               </a:rPr>
-              <a:t>把 TEL2 的 SLA 判定邏輯寫成自訂技能，規則就從「每次要重講」變成「一次寫好、永遠生效」。但技能一多就會出現新問題：**它們會搶同一批請求**。這個情境的重點不是把技能做出來，而是讓它先去比對你既有的技能清單，找出哪些會打架，再把排除條款寫進描述裡。</a:t>
+              <a:t>把 TEL2 的 SLA 判定邏輯寫成自訂技能，規則就從「每次要重講」變成「一次寫好、永遠生效」。但技能一多就會出現新問題：它們會搶同一批請求。這個情境的重點不是把技能做出來，而是讓它先去比對你既有的技能清單，找出哪些會打架，再把排除條款寫進描述裡。</a:t>
             </a:r>
             <a:endParaRPr lang="en-US" sz="1600" dirty="0"/>
           </a:p>
@@ -9417,7 +10177,7 @@
                 <a:ea typeface="Microsoft JhengHei" pitchFamily="34" charset="-122"/>
                 <a:cs typeface="Microsoft JhengHei" pitchFamily="34" charset="-120"/>
               </a:rPr>
-              <a:t>提示詞裡有一句話決定了這個情境的成敗：「在寫描述之前，請先比對我現有的技能清單…</a:t>
+              <a:t>送出下面的提示詞。</a:t>
             </a:r>
             <a:endParaRPr lang="en-US" sz="1300" dirty="0"/>
           </a:p>
@@ -9522,7 +10282,7 @@
                 <a:ea typeface="Microsoft JhengHei" pitchFamily="34" charset="-122"/>
                 <a:cs typeface="Microsoft JhengHei" pitchFamily="34" charset="-120"/>
               </a:rPr>
-              <a:t>⭐ 它找出六個會搶觸發的技能，並各自指名接手</a:t>
+              <a:t>⭐ 檢查每條排除條款有沒有「指名接手」</a:t>
             </a:r>
             <a:endParaRPr lang="en-US" sz="1600" dirty="0"/>
           </a:p>
@@ -9564,7 +10324,7 @@
                 <a:ea typeface="Microsoft JhengHei" pitchFamily="34" charset="-122"/>
                 <a:cs typeface="Microsoft JhengHei" pitchFamily="34" charset="-120"/>
               </a:rPr>
-              <a:t>這是本情境最有價值的產出。</a:t>
+              <a:t>打開它產出的衝突對照表，逐條檢查排除條款有沒有指名該由哪個技能接手，再用下面的提示詞補問。</a:t>
             </a:r>
             <a:endParaRPr lang="en-US" sz="1300" dirty="0"/>
           </a:p>
@@ -9669,7 +10429,7 @@
                 <a:ea typeface="Microsoft JhengHei" pitchFamily="34" charset="-122"/>
                 <a:cs typeface="Microsoft JhengHei" pitchFamily="34" charset="-120"/>
               </a:rPr>
-              <a:t>技能報告：分數不是評語，是可以拆解的診斷</a:t>
+              <a:t>讀技能報告的四個面向，並追問失分原因</a:t>
             </a:r>
             <a:endParaRPr lang="en-US" sz="1600" dirty="0"/>
           </a:p>
@@ -9711,7 +10471,7 @@
                 <a:ea typeface="Microsoft JhengHei" pitchFamily="34" charset="-122"/>
                 <a:cs typeface="Microsoft JhengHei" pitchFamily="34" charset="-120"/>
               </a:rPr>
-              <a:t>技能建立、更新或驗證時，Cowork 會**自動**回傳一份技能報告：0～100 分…</a:t>
+              <a:t>技能建立完成時，Cowork 會自動回傳一份技能報告。</a:t>
             </a:r>
             <a:endParaRPr lang="en-US" sz="1300" dirty="0"/>
           </a:p>
@@ -9816,7 +10576,7 @@
                 <a:ea typeface="Microsoft JhengHei" pitchFamily="34" charset="-122"/>
                 <a:cs typeface="Microsoft JhengHei" pitchFamily="34" charset="-120"/>
               </a:rPr>
-              <a:t>用真實資料驗證：宏遠改判、凱鈺照賠</a:t>
+              <a:t>拿 TEL2 的真實資料實跑一次，驗證技能真的有效</a:t>
             </a:r>
             <a:endParaRPr lang="en-US" sz="1600" dirty="0"/>
           </a:p>
@@ -9931,677 +10691,6 @@
               <a:rPr lang="en-US" sz="900" dirty="0">
                 <a:solidFill>
                   <a:srgbClr val="8A8FB5"/>
-                </a:solidFill>
-                <a:latin typeface="Microsoft JhengHei" pitchFamily="34" charset="0"/>
-                <a:ea typeface="Microsoft JhengHei" pitchFamily="34" charset="-122"/>
-                <a:cs typeface="Microsoft JhengHei" pitchFamily="34" charset="-120"/>
-              </a:rPr>
-              <a:t>15</a:t>
-            </a:r>
-            <a:endParaRPr lang="en-US" sz="900" dirty="0"/>
-          </a:p>
-        </p:txBody>
-      </p:sp>
-    </p:spTree>
-  </p:cSld>
-  <p:clrMapOvr>
-    <a:masterClrMapping/>
-  </p:clrMapOvr>
-</p:sld>
-</file>
-
-<file path=ppt/slides/slide17.xml><?xml version="1.0" encoding="utf-8"?>
-<p:sld xmlns:a="http://schemas.openxmlformats.org/drawingml/2006/main" xmlns:r="http://schemas.openxmlformats.org/officeDocument/2006/relationships" xmlns:p="http://schemas.openxmlformats.org/presentationml/2006/main">
-  <p:cSld name="Slide 17">
-    <p:bg>
-      <p:bgPr>
-        <a:solidFill>
-          <a:srgbClr val="F7F8FC"/>
-        </a:solidFill>
-      </p:bgPr>
-    </p:bg>
-    <p:spTree>
-      <p:nvGrpSpPr>
-        <p:cNvPr id="1" name=""/>
-        <p:cNvGrpSpPr/>
-        <p:nvPr/>
-      </p:nvGrpSpPr>
-      <p:grpSpPr>
-        <a:xfrm>
-          <a:off x="0" y="0"/>
-          <a:ext cx="0" cy="0"/>
-          <a:chOff x="0" y="0"/>
-          <a:chExt cx="0" cy="0"/>
-        </a:xfrm>
-      </p:grpSpPr>
-      <p:sp>
-        <p:nvSpPr>
-          <p:cNvPr id="2" name="Shape 0"/>
-          <p:cNvSpPr/>
-          <p:nvPr/>
-        </p:nvSpPr>
-        <p:spPr>
-          <a:xfrm>
-            <a:off x="640080" y="566928"/>
-            <a:ext cx="384048" cy="128016"/>
-          </a:xfrm>
-          <a:prstGeom prst="rect">
-            <a:avLst/>
-          </a:prstGeom>
-          <a:solidFill>
-            <a:srgbClr val="038387"/>
-          </a:solidFill>
-          <a:ln/>
-        </p:spPr>
-      </p:sp>
-      <p:sp>
-        <p:nvSpPr>
-          <p:cNvPr id="3" name="Text 1"/>
-          <p:cNvSpPr/>
-          <p:nvPr/>
-        </p:nvSpPr>
-        <p:spPr>
-          <a:xfrm>
-            <a:off x="1143000" y="457200"/>
-            <a:ext cx="8229600" cy="310896"/>
-          </a:xfrm>
-          <a:prstGeom prst="rect">
-            <a:avLst/>
-          </a:prstGeom>
-          <a:noFill/>
-          <a:ln/>
-        </p:spPr>
-        <p:txBody>
-          <a:bodyPr wrap="square" rtlCol="0" anchor="ctr"/>
-          <a:lstStyle/>
-          <a:p>
-            <a:pPr indent="0" marL="0">
-              <a:buNone/>
-            </a:pPr>
-            <a:r>
-              <a:rPr lang="en-US" sz="1200" b="1" spc="200" kern="0" dirty="0">
-                <a:solidFill>
-                  <a:srgbClr val="038387"/>
-                </a:solidFill>
-                <a:latin typeface="Microsoft JhengHei" pitchFamily="34" charset="0"/>
-                <a:ea typeface="Microsoft JhengHei" pitchFamily="34" charset="-122"/>
-                <a:cs typeface="Microsoft JhengHei" pitchFamily="34" charset="-120"/>
-              </a:rPr>
-              <a:t>情境 05 · 實機示範</a:t>
-            </a:r>
-            <a:endParaRPr lang="en-US" sz="1200" dirty="0"/>
-          </a:p>
-        </p:txBody>
-      </p:sp>
-      <p:sp>
-        <p:nvSpPr>
-          <p:cNvPr id="4" name="Text 2"/>
-          <p:cNvSpPr/>
-          <p:nvPr/>
-        </p:nvSpPr>
-        <p:spPr>
-          <a:xfrm>
-            <a:off x="640080" y="786384"/>
-            <a:ext cx="10972800" cy="640080"/>
-          </a:xfrm>
-          <a:prstGeom prst="rect">
-            <a:avLst/>
-          </a:prstGeom>
-          <a:noFill/>
-          <a:ln/>
-        </p:spPr>
-        <p:txBody>
-          <a:bodyPr wrap="square" rtlCol="0" anchor="ctr"/>
-          <a:lstStyle/>
-          <a:p>
-            <a:pPr indent="0" marL="0">
-              <a:buNone/>
-            </a:pPr>
-            <a:r>
-              <a:rPr lang="en-US" sz="3000" b="1" dirty="0">
-                <a:solidFill>
-                  <a:srgbClr val="1E2235"/>
-                </a:solidFill>
-                <a:latin typeface="Microsoft JhengHei" pitchFamily="34" charset="0"/>
-                <a:ea typeface="Microsoft JhengHei" pitchFamily="34" charset="-122"/>
-                <a:cs typeface="Microsoft JhengHei" pitchFamily="34" charset="-120"/>
-              </a:rPr>
-              <a:t>看 Cowork 怎麼做、產出什麼</a:t>
-            </a:r>
-            <a:endParaRPr lang="en-US" sz="3000" dirty="0"/>
-          </a:p>
-        </p:txBody>
-      </p:sp>
-      <p:sp>
-        <p:nvSpPr>
-          <p:cNvPr id="5" name="Shape 3"/>
-          <p:cNvSpPr/>
-          <p:nvPr/>
-        </p:nvSpPr>
-        <p:spPr>
-          <a:xfrm>
-            <a:off x="585216" y="1773936"/>
-            <a:ext cx="5184648" cy="3433186"/>
-          </a:xfrm>
-          <a:prstGeom prst="rect">
-            <a:avLst/>
-          </a:prstGeom>
-          <a:solidFill>
-            <a:srgbClr val="FFFFFF"/>
-          </a:solidFill>
-          <a:ln w="12700">
-            <a:solidFill>
-              <a:srgbClr val="E4E7F2"/>
-            </a:solidFill>
-            <a:prstDash val="solid"/>
-          </a:ln>
-          <a:effectLst>
-            <a:outerShdw sx="100000" sy="100000" kx="0" ky="0" algn="bl" rotWithShape="0" blurRad="114300" dist="38100" dir="5400000">
-              <a:srgbClr val="8A90B5">
-                <a:alpha val="22000"/>
-              </a:srgbClr>
-            </a:outerShdw>
-          </a:effectLst>
-        </p:spPr>
-      </p:sp>
-      <p:pic>
-        <p:nvPicPr>
-          <p:cNvPr id="6" name="Image 0" descr="C:\temp\CoworkLab\v2\_working\screenshots\tel5_01_copyfile_approval.png">    </p:cNvPr>
-          <p:cNvPicPr>
-            <a:picLocks noChangeAspect="1"/>
-          </p:cNvPicPr>
-          <p:nvPr/>
-        </p:nvPicPr>
-        <p:blipFill>
-          <a:blip r:embed="rId1"/>
-          <a:stretch>
-            <a:fillRect/>
-          </a:stretch>
-        </p:blipFill>
-        <p:spPr>
-          <a:xfrm>
-            <a:off x="640080" y="1828800"/>
-            <a:ext cx="5074920" cy="3323458"/>
-          </a:xfrm>
-          <a:prstGeom prst="rect">
-            <a:avLst/>
-          </a:prstGeom>
-        </p:spPr>
-      </p:pic>
-      <p:sp>
-        <p:nvSpPr>
-          <p:cNvPr id="7" name="Text 4"/>
-          <p:cNvSpPr/>
-          <p:nvPr/>
-        </p:nvSpPr>
-        <p:spPr>
-          <a:xfrm>
-            <a:off x="640080" y="5261986"/>
-            <a:ext cx="5074920" cy="320040"/>
-          </a:xfrm>
-          <a:prstGeom prst="rect">
-            <a:avLst/>
-          </a:prstGeom>
-          <a:noFill/>
-          <a:ln/>
-        </p:spPr>
-        <p:txBody>
-          <a:bodyPr wrap="square" rtlCol="0" anchor="ctr"/>
-          <a:lstStyle/>
-          <a:p>
-            <a:pPr algn="ctr" indent="0" marL="0">
-              <a:buNone/>
-            </a:pPr>
-            <a:r>
-              <a:rPr lang="en-US" sz="1350" b="1" dirty="0">
-                <a:solidFill>
-                  <a:srgbClr val="038387"/>
-                </a:solidFill>
-                <a:latin typeface="Microsoft JhengHei" pitchFamily="34" charset="0"/>
-                <a:ea typeface="Microsoft JhengHei" pitchFamily="34" charset="-122"/>
-                <a:cs typeface="Microsoft JhengHei" pitchFamily="34" charset="-120"/>
-              </a:rPr>
-              <a:t>① 你的輸入與指令</a:t>
-            </a:r>
-            <a:endParaRPr lang="en-US" sz="1350" dirty="0"/>
-          </a:p>
-        </p:txBody>
-      </p:sp>
-      <p:sp>
-        <p:nvSpPr>
-          <p:cNvPr id="8" name="Shape 5"/>
-          <p:cNvSpPr/>
-          <p:nvPr/>
-        </p:nvSpPr>
-        <p:spPr>
-          <a:xfrm>
-            <a:off x="6163056" y="1773936"/>
-            <a:ext cx="5184648" cy="3433186"/>
-          </a:xfrm>
-          <a:prstGeom prst="rect">
-            <a:avLst/>
-          </a:prstGeom>
-          <a:solidFill>
-            <a:srgbClr val="FFFFFF"/>
-          </a:solidFill>
-          <a:ln w="12700">
-            <a:solidFill>
-              <a:srgbClr val="E4E7F2"/>
-            </a:solidFill>
-            <a:prstDash val="solid"/>
-          </a:ln>
-          <a:effectLst>
-            <a:outerShdw sx="100000" sy="100000" kx="0" ky="0" algn="bl" rotWithShape="0" blurRad="114300" dist="38100" dir="5400000">
-              <a:srgbClr val="8A90B5">
-                <a:alpha val="22000"/>
-              </a:srgbClr>
-            </a:outerShdw>
-          </a:effectLst>
-        </p:spPr>
-      </p:sp>
-      <p:pic>
-        <p:nvPicPr>
-          <p:cNvPr id="9" name="Image 1" descr="C:\temp\CoworkLab\v2\_working\screenshots\tel5_03_skill_verify.png">    </p:cNvPr>
-          <p:cNvPicPr>
-            <a:picLocks noChangeAspect="1"/>
-          </p:cNvPicPr>
-          <p:nvPr/>
-        </p:nvPicPr>
-        <p:blipFill>
-          <a:blip r:embed="rId2"/>
-          <a:stretch>
-            <a:fillRect/>
-          </a:stretch>
-        </p:blipFill>
-        <p:spPr>
-          <a:xfrm>
-            <a:off x="6217920" y="1828800"/>
-            <a:ext cx="5074920" cy="3323458"/>
-          </a:xfrm>
-          <a:prstGeom prst="rect">
-            <a:avLst/>
-          </a:prstGeom>
-        </p:spPr>
-      </p:pic>
-      <p:sp>
-        <p:nvSpPr>
-          <p:cNvPr id="10" name="Text 6"/>
-          <p:cNvSpPr/>
-          <p:nvPr/>
-        </p:nvSpPr>
-        <p:spPr>
-          <a:xfrm>
-            <a:off x="6217920" y="5261986"/>
-            <a:ext cx="5074920" cy="320040"/>
-          </a:xfrm>
-          <a:prstGeom prst="rect">
-            <a:avLst/>
-          </a:prstGeom>
-          <a:noFill/>
-          <a:ln/>
-        </p:spPr>
-        <p:txBody>
-          <a:bodyPr wrap="square" rtlCol="0" anchor="ctr"/>
-          <a:lstStyle/>
-          <a:p>
-            <a:pPr algn="ctr" indent="0" marL="0">
-              <a:buNone/>
-            </a:pPr>
-            <a:r>
-              <a:rPr lang="en-US" sz="1350" b="1" dirty="0">
-                <a:solidFill>
-                  <a:srgbClr val="038387"/>
-                </a:solidFill>
-                <a:latin typeface="Microsoft JhengHei" pitchFamily="34" charset="0"/>
-                <a:ea typeface="Microsoft JhengHei" pitchFamily="34" charset="-122"/>
-                <a:cs typeface="Microsoft JhengHei" pitchFamily="34" charset="-120"/>
-              </a:rPr>
-              <a:t>② 產出成果</a:t>
-            </a:r>
-            <a:endParaRPr lang="en-US" sz="1350" dirty="0"/>
-          </a:p>
-        </p:txBody>
-      </p:sp>
-      <p:sp>
-        <p:nvSpPr>
-          <p:cNvPr id="11" name="Shape 7"/>
-          <p:cNvSpPr/>
-          <p:nvPr/>
-        </p:nvSpPr>
-        <p:spPr>
-          <a:xfrm>
-            <a:off x="640080" y="5074920"/>
-            <a:ext cx="10911535" cy="1143000"/>
-          </a:xfrm>
-          <a:prstGeom prst="rect">
-            <a:avLst/>
-          </a:prstGeom>
-          <a:solidFill>
-            <a:srgbClr val="FFFFFF"/>
-          </a:solidFill>
-          <a:ln w="12700">
-            <a:solidFill>
-              <a:srgbClr val="E4E7F2"/>
-            </a:solidFill>
-            <a:prstDash val="solid"/>
-          </a:ln>
-        </p:spPr>
-      </p:sp>
-      <p:sp>
-        <p:nvSpPr>
-          <p:cNvPr id="12" name="Shape 8"/>
-          <p:cNvSpPr/>
-          <p:nvPr/>
-        </p:nvSpPr>
-        <p:spPr>
-          <a:xfrm>
-            <a:off x="640080" y="5074920"/>
-            <a:ext cx="91440" cy="1143000"/>
-          </a:xfrm>
-          <a:prstGeom prst="rect">
-            <a:avLst/>
-          </a:prstGeom>
-          <a:solidFill>
-            <a:srgbClr val="038387"/>
-          </a:solidFill>
-          <a:ln/>
-        </p:spPr>
-      </p:sp>
-      <p:sp>
-        <p:nvSpPr>
-          <p:cNvPr id="13" name="Text 9"/>
-          <p:cNvSpPr/>
-          <p:nvPr/>
-        </p:nvSpPr>
-        <p:spPr>
-          <a:xfrm>
-            <a:off x="914400" y="5184648"/>
-            <a:ext cx="1828800" cy="320040"/>
-          </a:xfrm>
-          <a:prstGeom prst="rect">
-            <a:avLst/>
-          </a:prstGeom>
-          <a:noFill/>
-          <a:ln/>
-        </p:spPr>
-        <p:txBody>
-          <a:bodyPr wrap="square" rtlCol="0" anchor="ctr"/>
-          <a:lstStyle/>
-          <a:p>
-            <a:pPr indent="0" marL="0">
-              <a:buNone/>
-            </a:pPr>
-            <a:r>
-              <a:rPr lang="en-US" sz="1400" b="1" dirty="0">
-                <a:solidFill>
-                  <a:srgbClr val="1E2235"/>
-                </a:solidFill>
-                <a:latin typeface="Microsoft JhengHei" pitchFamily="34" charset="0"/>
-                <a:ea typeface="Microsoft JhengHei" pitchFamily="34" charset="-122"/>
-                <a:cs typeface="Microsoft JhengHei" pitchFamily="34" charset="-120"/>
-              </a:rPr>
-              <a:t>產出驗收</a:t>
-            </a:r>
-            <a:endParaRPr lang="en-US" sz="1400" dirty="0"/>
-          </a:p>
-        </p:txBody>
-      </p:sp>
-      <p:pic>
-        <p:nvPicPr>
-          <p:cNvPr id="14" name="Image 2" descr="preencoded.png">    </p:cNvPr>
-          <p:cNvPicPr>
-            <a:picLocks noChangeAspect="1"/>
-          </p:cNvPicPr>
-          <p:nvPr/>
-        </p:nvPicPr>
-        <p:blipFill>
-          <a:blip r:embed="rId3"/>
-          <a:stretch>
-            <a:fillRect/>
-          </a:stretch>
-        </p:blipFill>
-        <p:spPr>
-          <a:xfrm>
-            <a:off x="2834640" y="5221224"/>
-            <a:ext cx="182880" cy="182880"/>
-          </a:xfrm>
-          <a:prstGeom prst="rect">
-            <a:avLst/>
-          </a:prstGeom>
-        </p:spPr>
-      </p:pic>
-      <p:sp>
-        <p:nvSpPr>
-          <p:cNvPr id="15" name="Text 10"/>
-          <p:cNvSpPr/>
-          <p:nvPr/>
-        </p:nvSpPr>
-        <p:spPr>
-          <a:xfrm>
-            <a:off x="3108960" y="5166360"/>
-            <a:ext cx="8168335" cy="310896"/>
-          </a:xfrm>
-          <a:prstGeom prst="rect">
-            <a:avLst/>
-          </a:prstGeom>
-          <a:noFill/>
-          <a:ln/>
-        </p:spPr>
-        <p:txBody>
-          <a:bodyPr wrap="square" rtlCol="0" anchor="ctr"/>
-          <a:lstStyle/>
-          <a:p>
-            <a:pPr indent="0" marL="0">
-              <a:buNone/>
-            </a:pPr>
-            <a:r>
-              <a:rPr lang="en-US" sz="1300" dirty="0">
-                <a:solidFill>
-                  <a:srgbClr val="1E2235"/>
-                </a:solidFill>
-                <a:latin typeface="Microsoft JhengHei" pitchFamily="34" charset="0"/>
-                <a:ea typeface="Microsoft JhengHei" pitchFamily="34" charset="-122"/>
-                <a:cs typeface="Microsoft JhengHei" pitchFamily="34" charset="-120"/>
-              </a:rPr>
-              <a:t>SKILL.md 有 YAML frontmatter，name 與 description 兩個欄位都存在</a:t>
-            </a:r>
-            <a:endParaRPr lang="en-US" sz="1300" dirty="0"/>
-          </a:p>
-        </p:txBody>
-      </p:sp>
-      <p:pic>
-        <p:nvPicPr>
-          <p:cNvPr id="16" name="Image 3" descr="preencoded.png">    </p:cNvPr>
-          <p:cNvPicPr>
-            <a:picLocks noChangeAspect="1"/>
-          </p:cNvPicPr>
-          <p:nvPr/>
-        </p:nvPicPr>
-        <p:blipFill>
-          <a:blip r:embed="rId4"/>
-          <a:stretch>
-            <a:fillRect/>
-          </a:stretch>
-        </p:blipFill>
-        <p:spPr>
-          <a:xfrm>
-            <a:off x="2834640" y="5559552"/>
-            <a:ext cx="182880" cy="182880"/>
-          </a:xfrm>
-          <a:prstGeom prst="rect">
-            <a:avLst/>
-          </a:prstGeom>
-        </p:spPr>
-      </p:pic>
-      <p:sp>
-        <p:nvSpPr>
-          <p:cNvPr id="17" name="Text 11"/>
-          <p:cNvSpPr/>
-          <p:nvPr/>
-        </p:nvSpPr>
-        <p:spPr>
-          <a:xfrm>
-            <a:off x="3108960" y="5504688"/>
-            <a:ext cx="8168335" cy="310896"/>
-          </a:xfrm>
-          <a:prstGeom prst="rect">
-            <a:avLst/>
-          </a:prstGeom>
-          <a:noFill/>
-          <a:ln/>
-        </p:spPr>
-        <p:txBody>
-          <a:bodyPr wrap="square" rtlCol="0" anchor="ctr"/>
-          <a:lstStyle/>
-          <a:p>
-            <a:pPr indent="0" marL="0">
-              <a:buNone/>
-            </a:pPr>
-            <a:r>
-              <a:rPr lang="en-US" sz="1300" dirty="0">
-                <a:solidFill>
-                  <a:srgbClr val="1E2235"/>
-                </a:solidFill>
-                <a:latin typeface="Microsoft JhengHei" pitchFamily="34" charset="0"/>
-                <a:ea typeface="Microsoft JhengHei" pitchFamily="34" charset="-122"/>
-                <a:cs typeface="Microsoft JhengHei" pitchFamily="34" charset="-120"/>
-              </a:rPr>
-              <a:t>description 裡有明確的觸發語句，不只是功能說明</a:t>
-            </a:r>
-            <a:endParaRPr lang="en-US" sz="1300" dirty="0"/>
-          </a:p>
-        </p:txBody>
-      </p:sp>
-      <p:pic>
-        <p:nvPicPr>
-          <p:cNvPr id="18" name="Image 4" descr="preencoded.png">    </p:cNvPr>
-          <p:cNvPicPr>
-            <a:picLocks noChangeAspect="1"/>
-          </p:cNvPicPr>
-          <p:nvPr/>
-        </p:nvPicPr>
-        <p:blipFill>
-          <a:blip r:embed="rId5"/>
-          <a:stretch>
-            <a:fillRect/>
-          </a:stretch>
-        </p:blipFill>
-        <p:spPr>
-          <a:xfrm>
-            <a:off x="2834640" y="5897880"/>
-            <a:ext cx="182880" cy="182880"/>
-          </a:xfrm>
-          <a:prstGeom prst="rect">
-            <a:avLst/>
-          </a:prstGeom>
-        </p:spPr>
-      </p:pic>
-      <p:sp>
-        <p:nvSpPr>
-          <p:cNvPr id="19" name="Text 12"/>
-          <p:cNvSpPr/>
-          <p:nvPr/>
-        </p:nvSpPr>
-        <p:spPr>
-          <a:xfrm>
-            <a:off x="3108960" y="5843016"/>
-            <a:ext cx="8168335" cy="310896"/>
-          </a:xfrm>
-          <a:prstGeom prst="rect">
-            <a:avLst/>
-          </a:prstGeom>
-          <a:noFill/>
-          <a:ln/>
-        </p:spPr>
-        <p:txBody>
-          <a:bodyPr wrap="square" rtlCol="0" anchor="ctr"/>
-          <a:lstStyle/>
-          <a:p>
-            <a:pPr indent="0" marL="0">
-              <a:buNone/>
-            </a:pPr>
-            <a:r>
-              <a:rPr lang="en-US" sz="1300" dirty="0">
-                <a:solidFill>
-                  <a:srgbClr val="1E2235"/>
-                </a:solidFill>
-                <a:latin typeface="Microsoft JhengHei" pitchFamily="34" charset="0"/>
-                <a:ea typeface="Microsoft JhengHei" pitchFamily="34" charset="-122"/>
-                <a:cs typeface="Microsoft JhengHei" pitchFamily="34" charset="-120"/>
-              </a:rPr>
-              <a:t>比對過既有技能清單，找出會搶觸發的技能並列出</a:t>
-            </a:r>
-            <a:endParaRPr lang="en-US" sz="1300" dirty="0"/>
-          </a:p>
-        </p:txBody>
-      </p:sp>
-      <p:sp>
-        <p:nvSpPr>
-          <p:cNvPr id="20" name="Text 13"/>
-          <p:cNvSpPr/>
-          <p:nvPr/>
-        </p:nvSpPr>
-        <p:spPr>
-          <a:xfrm>
-            <a:off x="640080" y="6473952"/>
-            <a:ext cx="5486400" cy="274320"/>
-          </a:xfrm>
-          <a:prstGeom prst="rect">
-            <a:avLst/>
-          </a:prstGeom>
-          <a:noFill/>
-          <a:ln/>
-        </p:spPr>
-        <p:txBody>
-          <a:bodyPr wrap="square" rtlCol="0" anchor="ctr"/>
-          <a:lstStyle/>
-          <a:p>
-            <a:pPr algn="l" indent="0" marL="0">
-              <a:buNone/>
-            </a:pPr>
-            <a:r>
-              <a:rPr lang="en-US" sz="900" dirty="0">
-                <a:solidFill>
-                  <a:srgbClr val="5B6079"/>
-                </a:solidFill>
-                <a:latin typeface="Microsoft JhengHei" pitchFamily="34" charset="0"/>
-                <a:ea typeface="Microsoft JhengHei" pitchFamily="34" charset="-122"/>
-                <a:cs typeface="Microsoft JhengHei" pitchFamily="34" charset="-120"/>
-              </a:rPr>
-              <a:t>Microsoft 365 Copilot Cowork</a:t>
-            </a:r>
-            <a:endParaRPr lang="en-US" sz="900" dirty="0"/>
-          </a:p>
-        </p:txBody>
-      </p:sp>
-      <p:sp>
-        <p:nvSpPr>
-          <p:cNvPr id="21" name="Text 14"/>
-          <p:cNvSpPr/>
-          <p:nvPr/>
-        </p:nvSpPr>
-        <p:spPr>
-          <a:xfrm>
-            <a:off x="11002975" y="6473952"/>
-            <a:ext cx="548640" cy="274320"/>
-          </a:xfrm>
-          <a:prstGeom prst="rect">
-            <a:avLst/>
-          </a:prstGeom>
-          <a:noFill/>
-          <a:ln/>
-        </p:spPr>
-        <p:txBody>
-          <a:bodyPr wrap="square" rtlCol="0" anchor="ctr"/>
-          <a:lstStyle/>
-          <a:p>
-            <a:pPr algn="r" indent="0" marL="0">
-              <a:buNone/>
-            </a:pPr>
-            <a:r>
-              <a:rPr lang="en-US" sz="900" dirty="0">
-                <a:solidFill>
-                  <a:srgbClr val="5B6079"/>
                 </a:solidFill>
                 <a:latin typeface="Microsoft JhengHei" pitchFamily="34" charset="0"/>
                 <a:ea typeface="Microsoft JhengHei" pitchFamily="34" charset="-122"/>
@@ -10660,7 +10749,7 @@
             <a:avLst/>
           </a:prstGeom>
           <a:solidFill>
-            <a:srgbClr val="6366F1"/>
+            <a:srgbClr val="038387"/>
           </a:solidFill>
           <a:ln/>
         </p:spPr>
@@ -10692,13 +10781,13 @@
             <a:r>
               <a:rPr lang="en-US" sz="1200" b="1" spc="200" kern="0" dirty="0">
                 <a:solidFill>
-                  <a:srgbClr val="6366F1"/>
-                </a:solidFill>
-                <a:latin typeface="Microsoft JhengHei" pitchFamily="34" charset="0"/>
-                <a:ea typeface="Microsoft JhengHei" pitchFamily="34" charset="-122"/>
-                <a:cs typeface="Microsoft JhengHei" pitchFamily="34" charset="-120"/>
-              </a:rPr>
-              <a:t>MAKE IT YOURS</a:t>
+                  <a:srgbClr val="038387"/>
+                </a:solidFill>
+                <a:latin typeface="Microsoft JhengHei" pitchFamily="34" charset="0"/>
+                <a:ea typeface="Microsoft JhengHei" pitchFamily="34" charset="-122"/>
+                <a:cs typeface="Microsoft JhengHei" pitchFamily="34" charset="-120"/>
+              </a:rPr>
+              <a:t>情境 05 · 實機示範</a:t>
             </a:r>
             <a:endParaRPr lang="en-US" sz="1200" dirty="0"/>
           </a:p>
@@ -10737,7 +10826,7 @@
                 <a:ea typeface="Microsoft JhengHei" pitchFamily="34" charset="-122"/>
                 <a:cs typeface="Microsoft JhengHei" pitchFamily="34" charset="-120"/>
               </a:rPr>
-              <a:t>把情境延伸到你的日常</a:t>
+              <a:t>看 Cowork 怎麼做、產出什麼</a:t>
             </a:r>
             <a:endParaRPr lang="en-US" sz="3000" dirty="0"/>
           </a:p>
@@ -10751,8 +10840,8 @@
         </p:nvSpPr>
         <p:spPr>
           <a:xfrm>
-            <a:off x="640080" y="1783080"/>
-            <a:ext cx="10911535" cy="731520"/>
+            <a:off x="585216" y="1773936"/>
+            <a:ext cx="5184648" cy="3433186"/>
           </a:xfrm>
           <a:prstGeom prst="rect">
             <a:avLst/>
@@ -10766,38 +10855,88 @@
             </a:solidFill>
             <a:prstDash val="solid"/>
           </a:ln>
-        </p:spPr>
-      </p:sp>
-      <p:sp>
-        <p:nvSpPr>
-          <p:cNvPr id="6" name="Shape 4"/>
-          <p:cNvSpPr/>
-          <p:nvPr/>
-        </p:nvSpPr>
-        <p:spPr>
-          <a:xfrm>
-            <a:off x="841248" y="1929384"/>
-            <a:ext cx="438912" cy="438912"/>
-          </a:xfrm>
-          <a:prstGeom prst="ellipse">
-            <a:avLst/>
-          </a:prstGeom>
-          <a:solidFill>
-            <a:srgbClr val="1B4B8F"/>
-          </a:solidFill>
-          <a:ln/>
-        </p:spPr>
-      </p:sp>
-      <p:sp>
-        <p:nvSpPr>
-          <p:cNvPr id="7" name="Shape 5"/>
-          <p:cNvSpPr/>
-          <p:nvPr/>
-        </p:nvSpPr>
-        <p:spPr>
-          <a:xfrm>
-            <a:off x="640080" y="2624328"/>
-            <a:ext cx="10911535" cy="731520"/>
+          <a:effectLst>
+            <a:outerShdw sx="100000" sy="100000" kx="0" ky="0" algn="bl" rotWithShape="0" blurRad="114300" dist="38100" dir="5400000">
+              <a:srgbClr val="8A90B5">
+                <a:alpha val="22000"/>
+              </a:srgbClr>
+            </a:outerShdw>
+          </a:effectLst>
+        </p:spPr>
+      </p:sp>
+      <p:pic>
+        <p:nvPicPr>
+          <p:cNvPr id="6" name="Image 0" descr="C:\temp\CoworkLab\v2\_working\screenshots\tel5_01_copyfile_approval.png">    </p:cNvPr>
+          <p:cNvPicPr>
+            <a:picLocks noChangeAspect="1"/>
+          </p:cNvPicPr>
+          <p:nvPr/>
+        </p:nvPicPr>
+        <p:blipFill>
+          <a:blip r:embed="rId1"/>
+          <a:stretch>
+            <a:fillRect/>
+          </a:stretch>
+        </p:blipFill>
+        <p:spPr>
+          <a:xfrm>
+            <a:off x="640080" y="1828800"/>
+            <a:ext cx="5074920" cy="3323458"/>
+          </a:xfrm>
+          <a:prstGeom prst="rect">
+            <a:avLst/>
+          </a:prstGeom>
+        </p:spPr>
+      </p:pic>
+      <p:sp>
+        <p:nvSpPr>
+          <p:cNvPr id="7" name="Text 4"/>
+          <p:cNvSpPr/>
+          <p:nvPr/>
+        </p:nvSpPr>
+        <p:spPr>
+          <a:xfrm>
+            <a:off x="640080" y="5261986"/>
+            <a:ext cx="5074920" cy="320040"/>
+          </a:xfrm>
+          <a:prstGeom prst="rect">
+            <a:avLst/>
+          </a:prstGeom>
+          <a:noFill/>
+          <a:ln/>
+        </p:spPr>
+        <p:txBody>
+          <a:bodyPr wrap="square" rtlCol="0" anchor="ctr"/>
+          <a:lstStyle/>
+          <a:p>
+            <a:pPr algn="ctr" indent="0" marL="0">
+              <a:buNone/>
+            </a:pPr>
+            <a:r>
+              <a:rPr lang="en-US" sz="1350" b="1" dirty="0">
+                <a:solidFill>
+                  <a:srgbClr val="038387"/>
+                </a:solidFill>
+                <a:latin typeface="Microsoft JhengHei" pitchFamily="34" charset="0"/>
+                <a:ea typeface="Microsoft JhengHei" pitchFamily="34" charset="-122"/>
+                <a:cs typeface="Microsoft JhengHei" pitchFamily="34" charset="-120"/>
+              </a:rPr>
+              <a:t>① 你的輸入與指令</a:t>
+            </a:r>
+            <a:endParaRPr lang="en-US" sz="1350" dirty="0"/>
+          </a:p>
+        </p:txBody>
+      </p:sp>
+      <p:sp>
+        <p:nvSpPr>
+          <p:cNvPr id="8" name="Shape 5"/>
+          <p:cNvSpPr/>
+          <p:nvPr/>
+        </p:nvSpPr>
+        <p:spPr>
+          <a:xfrm>
+            <a:off x="6163056" y="1773936"/>
+            <a:ext cx="5184648" cy="3433186"/>
           </a:xfrm>
           <a:prstGeom prst="rect">
             <a:avLst/>
@@ -10811,38 +10950,88 @@
             </a:solidFill>
             <a:prstDash val="solid"/>
           </a:ln>
-        </p:spPr>
-      </p:sp>
-      <p:sp>
-        <p:nvSpPr>
-          <p:cNvPr id="8" name="Shape 6"/>
-          <p:cNvSpPr/>
-          <p:nvPr/>
-        </p:nvSpPr>
-        <p:spPr>
-          <a:xfrm>
-            <a:off x="841248" y="2770632"/>
-            <a:ext cx="438912" cy="438912"/>
-          </a:xfrm>
-          <a:prstGeom prst="ellipse">
-            <a:avLst/>
-          </a:prstGeom>
-          <a:solidFill>
-            <a:srgbClr val="0F6CBD"/>
-          </a:solidFill>
-          <a:ln/>
-        </p:spPr>
-      </p:sp>
-      <p:sp>
-        <p:nvSpPr>
-          <p:cNvPr id="9" name="Shape 7"/>
-          <p:cNvSpPr/>
-          <p:nvPr/>
-        </p:nvSpPr>
-        <p:spPr>
-          <a:xfrm>
-            <a:off x="640080" y="3465576"/>
-            <a:ext cx="10911535" cy="731520"/>
+          <a:effectLst>
+            <a:outerShdw sx="100000" sy="100000" kx="0" ky="0" algn="bl" rotWithShape="0" blurRad="114300" dist="38100" dir="5400000">
+              <a:srgbClr val="8A90B5">
+                <a:alpha val="22000"/>
+              </a:srgbClr>
+            </a:outerShdw>
+          </a:effectLst>
+        </p:spPr>
+      </p:sp>
+      <p:pic>
+        <p:nvPicPr>
+          <p:cNvPr id="9" name="Image 1" descr="C:\temp\CoworkLab\v2\_working\screenshots\tel5_03_skill_verify.png">    </p:cNvPr>
+          <p:cNvPicPr>
+            <a:picLocks noChangeAspect="1"/>
+          </p:cNvPicPr>
+          <p:nvPr/>
+        </p:nvPicPr>
+        <p:blipFill>
+          <a:blip r:embed="rId2"/>
+          <a:stretch>
+            <a:fillRect/>
+          </a:stretch>
+        </p:blipFill>
+        <p:spPr>
+          <a:xfrm>
+            <a:off x="6217920" y="1828800"/>
+            <a:ext cx="5074920" cy="3323458"/>
+          </a:xfrm>
+          <a:prstGeom prst="rect">
+            <a:avLst/>
+          </a:prstGeom>
+        </p:spPr>
+      </p:pic>
+      <p:sp>
+        <p:nvSpPr>
+          <p:cNvPr id="10" name="Text 6"/>
+          <p:cNvSpPr/>
+          <p:nvPr/>
+        </p:nvSpPr>
+        <p:spPr>
+          <a:xfrm>
+            <a:off x="6217920" y="5261986"/>
+            <a:ext cx="5074920" cy="320040"/>
+          </a:xfrm>
+          <a:prstGeom prst="rect">
+            <a:avLst/>
+          </a:prstGeom>
+          <a:noFill/>
+          <a:ln/>
+        </p:spPr>
+        <p:txBody>
+          <a:bodyPr wrap="square" rtlCol="0" anchor="ctr"/>
+          <a:lstStyle/>
+          <a:p>
+            <a:pPr algn="ctr" indent="0" marL="0">
+              <a:buNone/>
+            </a:pPr>
+            <a:r>
+              <a:rPr lang="en-US" sz="1350" b="1" dirty="0">
+                <a:solidFill>
+                  <a:srgbClr val="038387"/>
+                </a:solidFill>
+                <a:latin typeface="Microsoft JhengHei" pitchFamily="34" charset="0"/>
+                <a:ea typeface="Microsoft JhengHei" pitchFamily="34" charset="-122"/>
+                <a:cs typeface="Microsoft JhengHei" pitchFamily="34" charset="-120"/>
+              </a:rPr>
+              <a:t>② 產出成果</a:t>
+            </a:r>
+            <a:endParaRPr lang="en-US" sz="1350" dirty="0"/>
+          </a:p>
+        </p:txBody>
+      </p:sp>
+      <p:sp>
+        <p:nvSpPr>
+          <p:cNvPr id="11" name="Shape 7"/>
+          <p:cNvSpPr/>
+          <p:nvPr/>
+        </p:nvSpPr>
+        <p:spPr>
+          <a:xfrm>
+            <a:off x="640080" y="5074920"/>
+            <a:ext cx="10911535" cy="1143000"/>
           </a:xfrm>
           <a:prstGeom prst="rect">
             <a:avLst/>
@@ -10860,106 +11049,16 @@
       </p:sp>
       <p:sp>
         <p:nvSpPr>
-          <p:cNvPr id="10" name="Shape 8"/>
-          <p:cNvSpPr/>
-          <p:nvPr/>
-        </p:nvSpPr>
-        <p:spPr>
-          <a:xfrm>
-            <a:off x="841248" y="3611880"/>
-            <a:ext cx="438912" cy="438912"/>
-          </a:xfrm>
-          <a:prstGeom prst="ellipse">
-            <a:avLst/>
-          </a:prstGeom>
-          <a:solidFill>
-            <a:srgbClr val="C50F1F"/>
-          </a:solidFill>
-          <a:ln/>
-        </p:spPr>
-      </p:sp>
-      <p:sp>
-        <p:nvSpPr>
-          <p:cNvPr id="11" name="Shape 9"/>
-          <p:cNvSpPr/>
-          <p:nvPr/>
-        </p:nvSpPr>
-        <p:spPr>
-          <a:xfrm>
-            <a:off x="640080" y="4306824"/>
-            <a:ext cx="10911535" cy="731520"/>
-          </a:xfrm>
-          <a:prstGeom prst="rect">
-            <a:avLst/>
-          </a:prstGeom>
-          <a:solidFill>
-            <a:srgbClr val="FFFFFF"/>
-          </a:solidFill>
-          <a:ln w="12700">
-            <a:solidFill>
-              <a:srgbClr val="E4E7F2"/>
-            </a:solidFill>
-            <a:prstDash val="solid"/>
-          </a:ln>
-        </p:spPr>
-      </p:sp>
-      <p:sp>
-        <p:nvSpPr>
-          <p:cNvPr id="12" name="Shape 10"/>
-          <p:cNvSpPr/>
-          <p:nvPr/>
-        </p:nvSpPr>
-        <p:spPr>
-          <a:xfrm>
-            <a:off x="841248" y="4453128"/>
-            <a:ext cx="438912" cy="438912"/>
-          </a:xfrm>
-          <a:prstGeom prst="ellipse">
-            <a:avLst/>
-          </a:prstGeom>
-          <a:solidFill>
-            <a:srgbClr val="8764B8"/>
-          </a:solidFill>
-          <a:ln/>
-        </p:spPr>
-      </p:sp>
-      <p:sp>
-        <p:nvSpPr>
-          <p:cNvPr id="13" name="Shape 11"/>
-          <p:cNvSpPr/>
-          <p:nvPr/>
-        </p:nvSpPr>
-        <p:spPr>
-          <a:xfrm>
-            <a:off x="640080" y="5148072"/>
-            <a:ext cx="10911535" cy="731520"/>
-          </a:xfrm>
-          <a:prstGeom prst="rect">
-            <a:avLst/>
-          </a:prstGeom>
-          <a:solidFill>
-            <a:srgbClr val="FFFFFF"/>
-          </a:solidFill>
-          <a:ln w="12700">
-            <a:solidFill>
-              <a:srgbClr val="E4E7F2"/>
-            </a:solidFill>
-            <a:prstDash val="solid"/>
-          </a:ln>
-        </p:spPr>
-      </p:sp>
-      <p:sp>
-        <p:nvSpPr>
-          <p:cNvPr id="14" name="Shape 12"/>
-          <p:cNvSpPr/>
-          <p:nvPr/>
-        </p:nvSpPr>
-        <p:spPr>
-          <a:xfrm>
-            <a:off x="841248" y="5294376"/>
-            <a:ext cx="438912" cy="438912"/>
-          </a:xfrm>
-          <a:prstGeom prst="ellipse">
+          <p:cNvPr id="12" name="Shape 8"/>
+          <p:cNvSpPr/>
+          <p:nvPr/>
+        </p:nvSpPr>
+        <p:spPr>
+          <a:xfrm>
+            <a:off x="640080" y="5074920"/>
+            <a:ext cx="91440" cy="1143000"/>
+          </a:xfrm>
+          <a:prstGeom prst="rect">
             <a:avLst/>
           </a:prstGeom>
           <a:solidFill>
@@ -10968,219 +11067,48 @@
           <a:ln/>
         </p:spPr>
       </p:sp>
+      <p:sp>
+        <p:nvSpPr>
+          <p:cNvPr id="13" name="Text 9"/>
+          <p:cNvSpPr/>
+          <p:nvPr/>
+        </p:nvSpPr>
+        <p:spPr>
+          <a:xfrm>
+            <a:off x="914400" y="5184648"/>
+            <a:ext cx="1828800" cy="320040"/>
+          </a:xfrm>
+          <a:prstGeom prst="rect">
+            <a:avLst/>
+          </a:prstGeom>
+          <a:noFill/>
+          <a:ln/>
+        </p:spPr>
+        <p:txBody>
+          <a:bodyPr wrap="square" rtlCol="0" anchor="ctr"/>
+          <a:lstStyle/>
+          <a:p>
+            <a:pPr indent="0" marL="0">
+              <a:buNone/>
+            </a:pPr>
+            <a:r>
+              <a:rPr lang="en-US" sz="1400" b="1" dirty="0">
+                <a:solidFill>
+                  <a:srgbClr val="1E2235"/>
+                </a:solidFill>
+                <a:latin typeface="Microsoft JhengHei" pitchFamily="34" charset="0"/>
+                <a:ea typeface="Microsoft JhengHei" pitchFamily="34" charset="-122"/>
+                <a:cs typeface="Microsoft JhengHei" pitchFamily="34" charset="-120"/>
+              </a:rPr>
+              <a:t>產出驗收</a:t>
+            </a:r>
+            <a:endParaRPr lang="en-US" sz="1400" dirty="0"/>
+          </a:p>
+        </p:txBody>
+      </p:sp>
       <p:pic>
         <p:nvPicPr>
-          <p:cNvPr id="15" name="Image 0" descr="preencoded.png">    </p:cNvPr>
-          <p:cNvPicPr>
-            <a:picLocks noChangeAspect="1"/>
-          </p:cNvPicPr>
-          <p:nvPr/>
-        </p:nvPicPr>
-        <p:blipFill>
-          <a:blip r:embed="rId1"/>
-          <a:stretch>
-            <a:fillRect/>
-          </a:stretch>
-        </p:blipFill>
-        <p:spPr>
-          <a:xfrm>
-            <a:off x="950976" y="2039112"/>
-            <a:ext cx="219456" cy="219456"/>
-          </a:xfrm>
-          <a:prstGeom prst="rect">
-            <a:avLst/>
-          </a:prstGeom>
-        </p:spPr>
-      </p:pic>
-      <p:sp>
-        <p:nvSpPr>
-          <p:cNvPr id="16" name="Text 13"/>
-          <p:cNvSpPr/>
-          <p:nvPr/>
-        </p:nvSpPr>
-        <p:spPr>
-          <a:xfrm>
-            <a:off x="1417320" y="1819656"/>
-            <a:ext cx="2182307" cy="658368"/>
-          </a:xfrm>
-          <a:prstGeom prst="rect">
-            <a:avLst/>
-          </a:prstGeom>
-          <a:noFill/>
-          <a:ln/>
-        </p:spPr>
-        <p:txBody>
-          <a:bodyPr wrap="square" rtlCol="0" anchor="ctr"/>
-          <a:lstStyle/>
-          <a:p>
-            <a:pPr indent="0" marL="0">
-              <a:buNone/>
-            </a:pPr>
-            <a:r>
-              <a:rPr lang="en-US" sz="1400" b="1" dirty="0">
-                <a:solidFill>
-                  <a:srgbClr val="1B4B8F"/>
-                </a:solidFill>
-                <a:latin typeface="Microsoft JhengHei" pitchFamily="34" charset="0"/>
-                <a:ea typeface="Microsoft JhengHei" pitchFamily="34" charset="-122"/>
-                <a:cs typeface="Microsoft JhengHei" pitchFamily="34" charset="-120"/>
-              </a:rPr>
-              <a:t>電信業 · 申訴處理</a:t>
-            </a:r>
-            <a:endParaRPr lang="en-US" sz="1400" dirty="0"/>
-          </a:p>
-        </p:txBody>
-      </p:sp>
-      <p:sp>
-        <p:nvSpPr>
-          <p:cNvPr id="17" name="Text 14"/>
-          <p:cNvSpPr/>
-          <p:nvPr/>
-        </p:nvSpPr>
-        <p:spPr>
-          <a:xfrm>
-            <a:off x="3586195" y="1819656"/>
-            <a:ext cx="7747190" cy="658368"/>
-          </a:xfrm>
-          <a:prstGeom prst="rect">
-            <a:avLst/>
-          </a:prstGeom>
-          <a:noFill/>
-          <a:ln/>
-        </p:spPr>
-        <p:txBody>
-          <a:bodyPr wrap="square" rtlCol="0" anchor="ctr"/>
-          <a:lstStyle/>
-          <a:p>
-            <a:pPr indent="0" marL="0">
-              <a:lnSpc>
-                <a:spcPct val="108000"/>
-              </a:lnSpc>
-              <a:buNone/>
-            </a:pPr>
-            <a:r>
-              <a:rPr lang="en-US" sz="1350" dirty="0">
-                <a:solidFill>
-                  <a:srgbClr val="1E2235"/>
-                </a:solidFill>
-                <a:latin typeface="Microsoft JhengHei" pitchFamily="34" charset="0"/>
-                <a:ea typeface="Microsoft JhengHei" pitchFamily="34" charset="-122"/>
-                <a:cs typeface="Microsoft JhengHei" pitchFamily="34" charset="-120"/>
-              </a:rPr>
-              <a:t>💡 換成你們自己的申訴處理原則文件，測試同一套流程能不能直接沿用。</a:t>
-            </a:r>
-            <a:endParaRPr lang="en-US" sz="1350" dirty="0"/>
-          </a:p>
-        </p:txBody>
-      </p:sp>
-      <p:pic>
-        <p:nvPicPr>
-          <p:cNvPr id="18" name="Image 1" descr="preencoded.png">    </p:cNvPr>
-          <p:cNvPicPr>
-            <a:picLocks noChangeAspect="1"/>
-          </p:cNvPicPr>
-          <p:nvPr/>
-        </p:nvPicPr>
-        <p:blipFill>
-          <a:blip r:embed="rId2"/>
-          <a:stretch>
-            <a:fillRect/>
-          </a:stretch>
-        </p:blipFill>
-        <p:spPr>
-          <a:xfrm>
-            <a:off x="950976" y="2880360"/>
-            <a:ext cx="219456" cy="219456"/>
-          </a:xfrm>
-          <a:prstGeom prst="rect">
-            <a:avLst/>
-          </a:prstGeom>
-        </p:spPr>
-      </p:pic>
-      <p:sp>
-        <p:nvSpPr>
-          <p:cNvPr id="19" name="Text 15"/>
-          <p:cNvSpPr/>
-          <p:nvPr/>
-        </p:nvSpPr>
-        <p:spPr>
-          <a:xfrm>
-            <a:off x="1417320" y="2660904"/>
-            <a:ext cx="2182307" cy="658368"/>
-          </a:xfrm>
-          <a:prstGeom prst="rect">
-            <a:avLst/>
-          </a:prstGeom>
-          <a:noFill/>
-          <a:ln/>
-        </p:spPr>
-        <p:txBody>
-          <a:bodyPr wrap="square" rtlCol="0" anchor="ctr"/>
-          <a:lstStyle/>
-          <a:p>
-            <a:pPr indent="0" marL="0">
-              <a:buNone/>
-            </a:pPr>
-            <a:r>
-              <a:rPr lang="en-US" sz="1400" b="1" dirty="0">
-                <a:solidFill>
-                  <a:srgbClr val="0F6CBD"/>
-                </a:solidFill>
-                <a:latin typeface="Microsoft JhengHei" pitchFamily="34" charset="0"/>
-                <a:ea typeface="Microsoft JhengHei" pitchFamily="34" charset="-122"/>
-                <a:cs typeface="Microsoft JhengHei" pitchFamily="34" charset="-120"/>
-              </a:rPr>
-              <a:t>電信業 · 企業服務</a:t>
-            </a:r>
-            <a:endParaRPr lang="en-US" sz="1400" dirty="0"/>
-          </a:p>
-        </p:txBody>
-      </p:sp>
-      <p:sp>
-        <p:nvSpPr>
-          <p:cNvPr id="20" name="Text 16"/>
-          <p:cNvSpPr/>
-          <p:nvPr/>
-        </p:nvSpPr>
-        <p:spPr>
-          <a:xfrm>
-            <a:off x="3586195" y="2660904"/>
-            <a:ext cx="7747190" cy="658368"/>
-          </a:xfrm>
-          <a:prstGeom prst="rect">
-            <a:avLst/>
-          </a:prstGeom>
-          <a:noFill/>
-          <a:ln/>
-        </p:spPr>
-        <p:txBody>
-          <a:bodyPr wrap="square" rtlCol="0" anchor="ctr"/>
-          <a:lstStyle/>
-          <a:p>
-            <a:pPr indent="0" marL="0">
-              <a:lnSpc>
-                <a:spcPct val="108000"/>
-              </a:lnSpc>
-              <a:buNone/>
-            </a:pPr>
-            <a:r>
-              <a:rPr lang="en-US" sz="1350" dirty="0">
-                <a:solidFill>
-                  <a:srgbClr val="1E2235"/>
-                </a:solidFill>
-                <a:latin typeface="Microsoft JhengHei" pitchFamily="34" charset="0"/>
-                <a:ea typeface="Microsoft JhengHei" pitchFamily="34" charset="-122"/>
-                <a:cs typeface="Microsoft JhengHei" pitchFamily="34" charset="-120"/>
-              </a:rPr>
-              <a:t>💡 把門檻與比率改成你們自己的 SLA 條款，只改規則文件、不動提示詞。</a:t>
-            </a:r>
-            <a:endParaRPr lang="en-US" sz="1350" dirty="0"/>
-          </a:p>
-        </p:txBody>
-      </p:sp>
-      <p:pic>
-        <p:nvPicPr>
-          <p:cNvPr id="21" name="Image 2" descr="preencoded.png">    </p:cNvPr>
+          <p:cNvPr id="14" name="Image 2" descr="preencoded.png">    </p:cNvPr>
           <p:cNvPicPr>
             <a:picLocks noChangeAspect="1"/>
           </p:cNvPicPr>
@@ -11194,8 +11122,8 @@
         </p:blipFill>
         <p:spPr>
           <a:xfrm>
-            <a:off x="950976" y="3721608"/>
-            <a:ext cx="219456" cy="219456"/>
+            <a:off x="2834640" y="5221224"/>
+            <a:ext cx="182880" cy="182880"/>
           </a:xfrm>
           <a:prstGeom prst="rect">
             <a:avLst/>
@@ -11204,14 +11132,14 @@
       </p:pic>
       <p:sp>
         <p:nvSpPr>
-          <p:cNvPr id="22" name="Text 17"/>
-          <p:cNvSpPr/>
-          <p:nvPr/>
-        </p:nvSpPr>
-        <p:spPr>
-          <a:xfrm>
-            <a:off x="1417320" y="3502152"/>
-            <a:ext cx="2182307" cy="658368"/>
+          <p:cNvPr id="15" name="Text 10"/>
+          <p:cNvSpPr/>
+          <p:nvPr/>
+        </p:nvSpPr>
+        <p:spPr>
+          <a:xfrm>
+            <a:off x="3108960" y="5166360"/>
+            <a:ext cx="8168335" cy="310896"/>
           </a:xfrm>
           <a:prstGeom prst="rect">
             <a:avLst/>
@@ -11227,49 +11155,7 @@
               <a:buNone/>
             </a:pPr>
             <a:r>
-              <a:rPr lang="en-US" sz="1400" b="1" dirty="0">
-                <a:solidFill>
-                  <a:srgbClr val="C50F1F"/>
-                </a:solidFill>
-                <a:latin typeface="Microsoft JhengHei" pitchFamily="34" charset="0"/>
-                <a:ea typeface="Microsoft JhengHei" pitchFamily="34" charset="-122"/>
-                <a:cs typeface="Microsoft JhengHei" pitchFamily="34" charset="-120"/>
-              </a:rPr>
-              <a:t>電信業 · 資安通報</a:t>
-            </a:r>
-            <a:endParaRPr lang="en-US" sz="1400" dirty="0"/>
-          </a:p>
-        </p:txBody>
-      </p:sp>
-      <p:sp>
-        <p:nvSpPr>
-          <p:cNvPr id="23" name="Text 18"/>
-          <p:cNvSpPr/>
-          <p:nvPr/>
-        </p:nvSpPr>
-        <p:spPr>
-          <a:xfrm>
-            <a:off x="3586195" y="3502152"/>
-            <a:ext cx="7747190" cy="658368"/>
-          </a:xfrm>
-          <a:prstGeom prst="rect">
-            <a:avLst/>
-          </a:prstGeom>
-          <a:noFill/>
-          <a:ln/>
-        </p:spPr>
-        <p:txBody>
-          <a:bodyPr wrap="square" rtlCol="0" anchor="ctr"/>
-          <a:lstStyle/>
-          <a:p>
-            <a:pPr indent="0" marL="0">
-              <a:lnSpc>
-                <a:spcPct val="108000"/>
-              </a:lnSpc>
-              <a:buNone/>
-            </a:pPr>
-            <a:r>
-              <a:rPr lang="en-US" sz="1350" dirty="0">
+              <a:rPr lang="en-US" sz="1300" dirty="0">
                 <a:solidFill>
                   <a:srgbClr val="1E2235"/>
                 </a:solidFill>
@@ -11277,15 +11163,15 @@
                 <a:ea typeface="Microsoft JhengHei" pitchFamily="34" charset="-122"/>
                 <a:cs typeface="Microsoft JhengHei" pitchFamily="34" charset="-120"/>
               </a:rPr>
-              <a:t>💡 把觸發關鍵字換成你們實際的資安通報主旨前綴。</a:t>
-            </a:r>
-            <a:endParaRPr lang="en-US" sz="1350" dirty="0"/>
+              <a:t>〔技能檔〕SKILL.md 有 YAML frontmatter，name 與 description 兩個欄位都存在</a:t>
+            </a:r>
+            <a:endParaRPr lang="en-US" sz="1300" dirty="0"/>
           </a:p>
         </p:txBody>
       </p:sp>
       <p:pic>
         <p:nvPicPr>
-          <p:cNvPr id="24" name="Image 3" descr="preencoded.png">    </p:cNvPr>
+          <p:cNvPr id="16" name="Image 3" descr="preencoded.png">    </p:cNvPr>
           <p:cNvPicPr>
             <a:picLocks noChangeAspect="1"/>
           </p:cNvPicPr>
@@ -11299,8 +11185,8 @@
         </p:blipFill>
         <p:spPr>
           <a:xfrm>
-            <a:off x="950976" y="4562856"/>
-            <a:ext cx="219456" cy="219456"/>
+            <a:off x="2834640" y="5559552"/>
+            <a:ext cx="182880" cy="182880"/>
           </a:xfrm>
           <a:prstGeom prst="rect">
             <a:avLst/>
@@ -11309,14 +11195,14 @@
       </p:pic>
       <p:sp>
         <p:nvSpPr>
-          <p:cNvPr id="25" name="Text 19"/>
-          <p:cNvSpPr/>
-          <p:nvPr/>
-        </p:nvSpPr>
-        <p:spPr>
-          <a:xfrm>
-            <a:off x="1417320" y="4343400"/>
-            <a:ext cx="2182307" cy="658368"/>
+          <p:cNvPr id="17" name="Text 11"/>
+          <p:cNvSpPr/>
+          <p:nvPr/>
+        </p:nvSpPr>
+        <p:spPr>
+          <a:xfrm>
+            <a:off x="3108960" y="5504688"/>
+            <a:ext cx="8168335" cy="310896"/>
           </a:xfrm>
           <a:prstGeom prst="rect">
             <a:avLst/>
@@ -11332,49 +11218,7 @@
               <a:buNone/>
             </a:pPr>
             <a:r>
-              <a:rPr lang="en-US" sz="1400" b="1" dirty="0">
-                <a:solidFill>
-                  <a:srgbClr val="8764B8"/>
-                </a:solidFill>
-                <a:latin typeface="Microsoft JhengHei" pitchFamily="34" charset="0"/>
-                <a:ea typeface="Microsoft JhengHei" pitchFamily="34" charset="-122"/>
-                <a:cs typeface="Microsoft JhengHei" pitchFamily="34" charset="-120"/>
-              </a:rPr>
-              <a:t>電信業 · 客訴分析</a:t>
-            </a:r>
-            <a:endParaRPr lang="en-US" sz="1400" dirty="0"/>
-          </a:p>
-        </p:txBody>
-      </p:sp>
-      <p:sp>
-        <p:nvSpPr>
-          <p:cNvPr id="26" name="Text 20"/>
-          <p:cNvSpPr/>
-          <p:nvPr/>
-        </p:nvSpPr>
-        <p:spPr>
-          <a:xfrm>
-            <a:off x="3586195" y="4343400"/>
-            <a:ext cx="7747190" cy="658368"/>
-          </a:xfrm>
-          <a:prstGeom prst="rect">
-            <a:avLst/>
-          </a:prstGeom>
-          <a:noFill/>
-          <a:ln/>
-        </p:spPr>
-        <p:txBody>
-          <a:bodyPr wrap="square" rtlCol="0" anchor="ctr"/>
-          <a:lstStyle/>
-          <a:p>
-            <a:pPr indent="0" marL="0">
-              <a:lnSpc>
-                <a:spcPct val="108000"/>
-              </a:lnSpc>
-              <a:buNone/>
-            </a:pPr>
-            <a:r>
-              <a:rPr lang="en-US" sz="1350" dirty="0">
+              <a:rPr lang="en-US" sz="1300" dirty="0">
                 <a:solidFill>
                   <a:srgbClr val="1E2235"/>
                 </a:solidFill>
@@ -11382,15 +11226,15 @@
                 <a:ea typeface="Microsoft JhengHei" pitchFamily="34" charset="-122"/>
                 <a:cs typeface="Microsoft JhengHei" pitchFamily="34" charset="-120"/>
               </a:rPr>
-              <a:t>💡 把上個月的客訴一起丟進去，讓它比較兩個月的類別消長。</a:t>
-            </a:r>
-            <a:endParaRPr lang="en-US" sz="1350" dirty="0"/>
+              <a:t>〔技能檔〕description 裡有明確的觸發語句，不只是功能說明</a:t>
+            </a:r>
+            <a:endParaRPr lang="en-US" sz="1300" dirty="0"/>
           </a:p>
         </p:txBody>
       </p:sp>
       <p:pic>
         <p:nvPicPr>
-          <p:cNvPr id="27" name="Image 4" descr="preencoded.png">    </p:cNvPr>
+          <p:cNvPr id="18" name="Image 4" descr="preencoded.png">    </p:cNvPr>
           <p:cNvPicPr>
             <a:picLocks noChangeAspect="1"/>
           </p:cNvPicPr>
@@ -11404,8 +11248,8 @@
         </p:blipFill>
         <p:spPr>
           <a:xfrm>
-            <a:off x="950976" y="5404104"/>
-            <a:ext cx="219456" cy="219456"/>
+            <a:off x="2834640" y="5897880"/>
+            <a:ext cx="182880" cy="182880"/>
           </a:xfrm>
           <a:prstGeom prst="rect">
             <a:avLst/>
@@ -11414,14 +11258,14 @@
       </p:pic>
       <p:sp>
         <p:nvSpPr>
-          <p:cNvPr id="28" name="Text 21"/>
-          <p:cNvSpPr/>
-          <p:nvPr/>
-        </p:nvSpPr>
-        <p:spPr>
-          <a:xfrm>
-            <a:off x="1417320" y="5184648"/>
-            <a:ext cx="2182307" cy="658368"/>
+          <p:cNvPr id="19" name="Text 12"/>
+          <p:cNvSpPr/>
+          <p:nvPr/>
+        </p:nvSpPr>
+        <p:spPr>
+          <a:xfrm>
+            <a:off x="3108960" y="5843016"/>
+            <a:ext cx="8168335" cy="310896"/>
           </a:xfrm>
           <a:prstGeom prst="rect">
             <a:avLst/>
@@ -11437,49 +11281,7 @@
               <a:buNone/>
             </a:pPr>
             <a:r>
-              <a:rPr lang="en-US" sz="1400" b="1" dirty="0">
-                <a:solidFill>
-                  <a:srgbClr val="038387"/>
-                </a:solidFill>
-                <a:latin typeface="Microsoft JhengHei" pitchFamily="34" charset="0"/>
-                <a:ea typeface="Microsoft JhengHei" pitchFamily="34" charset="-122"/>
-                <a:cs typeface="Microsoft JhengHei" pitchFamily="34" charset="-120"/>
-              </a:rPr>
-              <a:t>電信業 · 自訂技能</a:t>
-            </a:r>
-            <a:endParaRPr lang="en-US" sz="1400" dirty="0"/>
-          </a:p>
-        </p:txBody>
-      </p:sp>
-      <p:sp>
-        <p:nvSpPr>
-          <p:cNvPr id="29" name="Text 22"/>
-          <p:cNvSpPr/>
-          <p:nvPr/>
-        </p:nvSpPr>
-        <p:spPr>
-          <a:xfrm>
-            <a:off x="3586195" y="5184648"/>
-            <a:ext cx="7747190" cy="658368"/>
-          </a:xfrm>
-          <a:prstGeom prst="rect">
-            <a:avLst/>
-          </a:prstGeom>
-          <a:noFill/>
-          <a:ln/>
-        </p:spPr>
-        <p:txBody>
-          <a:bodyPr wrap="square" rtlCol="0" anchor="ctr"/>
-          <a:lstStyle/>
-          <a:p>
-            <a:pPr indent="0" marL="0">
-              <a:lnSpc>
-                <a:spcPct val="108000"/>
-              </a:lnSpc>
-              <a:buNone/>
-            </a:pPr>
-            <a:r>
-              <a:rPr lang="en-US" sz="1350" dirty="0">
+              <a:rPr lang="en-US" sz="1300" dirty="0">
                 <a:solidFill>
                   <a:srgbClr val="1E2235"/>
                 </a:solidFill>
@@ -11487,15 +11289,15 @@
                 <a:ea typeface="Microsoft JhengHei" pitchFamily="34" charset="-122"/>
                 <a:cs typeface="Microsoft JhengHei" pitchFamily="34" charset="-120"/>
               </a:rPr>
-              <a:t>💡 把 TEL1 的申訴時序還原也做成技能，讓兩個技能各司其職。</a:t>
-            </a:r>
-            <a:endParaRPr lang="en-US" sz="1350" dirty="0"/>
-          </a:p>
-        </p:txBody>
-      </p:sp>
-      <p:sp>
-        <p:nvSpPr>
-          <p:cNvPr id="30" name="Text 23"/>
+              <a:t>〔衝突表〕比對過既有技能清單，找出會搶觸發的技能並列出</a:t>
+            </a:r>
+            <a:endParaRPr lang="en-US" sz="1300" dirty="0"/>
+          </a:p>
+        </p:txBody>
+      </p:sp>
+      <p:sp>
+        <p:nvSpPr>
+          <p:cNvPr id="20" name="Text 13"/>
           <p:cNvSpPr/>
           <p:nvPr/>
         </p:nvSpPr>
@@ -11534,7 +11336,7 @@
       </p:sp>
       <p:sp>
         <p:nvSpPr>
-          <p:cNvPr id="31" name="Text 24"/>
+          <p:cNvPr id="21" name="Text 14"/>
           <p:cNvSpPr/>
           <p:nvPr/>
         </p:nvSpPr>
@@ -11584,16 +11386,9 @@
   <p:cSld name="Slide 19">
     <p:bg>
       <p:bgPr>
-        <a:blipFill dpi="0" rotWithShape="1">
-          <a:blip r:embed="rId1">
-            <a:lum/>
-          </a:blip>
-          <a:srcRect/>
-          <a:stretch>
-            <a:fillRect/>
-          </a:stretch>
-        </a:blipFill>
-        <a:effectLst/>
+        <a:solidFill>
+          <a:srgbClr val="F7F8FC"/>
+        </a:solidFill>
       </p:bgPr>
     </p:bg>
     <p:spTree>
@@ -11625,7 +11420,7 @@
             <a:avLst/>
           </a:prstGeom>
           <a:solidFill>
-            <a:srgbClr val="22D3EE"/>
+            <a:srgbClr val="6366F1"/>
           </a:solidFill>
           <a:ln/>
         </p:spPr>
@@ -11657,13 +11452,13 @@
             <a:r>
               <a:rPr lang="en-US" sz="1200" b="1" spc="200" kern="0" dirty="0">
                 <a:solidFill>
-                  <a:srgbClr val="22D3EE"/>
-                </a:solidFill>
-                <a:latin typeface="Microsoft JhengHei" pitchFamily="34" charset="0"/>
-                <a:ea typeface="Microsoft JhengHei" pitchFamily="34" charset="-122"/>
-                <a:cs typeface="Microsoft JhengHei" pitchFamily="34" charset="-120"/>
-              </a:rPr>
-              <a:t>TRUST &amp; CONTROL</a:t>
+                  <a:srgbClr val="6366F1"/>
+                </a:solidFill>
+                <a:latin typeface="Microsoft JhengHei" pitchFamily="34" charset="0"/>
+                <a:ea typeface="Microsoft JhengHei" pitchFamily="34" charset="-122"/>
+                <a:cs typeface="Microsoft JhengHei" pitchFamily="34" charset="-120"/>
+              </a:rPr>
+              <a:t>MAKE IT YOURS</a:t>
             </a:r>
             <a:endParaRPr lang="en-US" sz="1200" dirty="0"/>
           </a:p>
@@ -11696,13 +11491,13 @@
             <a:r>
               <a:rPr lang="en-US" sz="3000" b="1" dirty="0">
                 <a:solidFill>
-                  <a:srgbClr val="FFFFFF"/>
-                </a:solidFill>
-                <a:latin typeface="Microsoft JhengHei" pitchFamily="34" charset="0"/>
-                <a:ea typeface="Microsoft JhengHei" pitchFamily="34" charset="-122"/>
-                <a:cs typeface="Microsoft JhengHei" pitchFamily="34" charset="-120"/>
-              </a:rPr>
-              <a:t>自動化，但你始終是決策者</a:t>
+                  <a:srgbClr val="1E2235"/>
+                </a:solidFill>
+                <a:latin typeface="Microsoft JhengHei" pitchFamily="34" charset="0"/>
+                <a:ea typeface="Microsoft JhengHei" pitchFamily="34" charset="-122"/>
+                <a:cs typeface="Microsoft JhengHei" pitchFamily="34" charset="-120"/>
+              </a:rPr>
+              <a:t>把情境延伸到你的日常</a:t>
             </a:r>
             <a:endParaRPr lang="en-US" sz="3000" dirty="0"/>
           </a:p>
@@ -11716,32 +11511,331 @@
         </p:nvSpPr>
         <p:spPr>
           <a:xfrm>
-            <a:off x="640080" y="1874520"/>
-            <a:ext cx="777240" cy="777240"/>
-          </a:xfrm>
-          <a:prstGeom prst="roundRect">
-            <a:avLst>
-              <a:gd name="adj" fmla="val 18824"/>
-            </a:avLst>
+            <a:off x="640080" y="1783080"/>
+            <a:ext cx="10911535" cy="731520"/>
+          </a:xfrm>
+          <a:prstGeom prst="rect">
+            <a:avLst/>
           </a:prstGeom>
           <a:solidFill>
-            <a:srgbClr val="FFFFFF">
-              <a:alpha val="14000"/>
-            </a:srgbClr>
+            <a:srgbClr val="FFFFFF"/>
           </a:solidFill>
           <a:ln w="12700">
             <a:solidFill>
-              <a:srgbClr val="22D3EE">
-                <a:alpha val="60000"/>
-              </a:srgbClr>
+              <a:srgbClr val="E4E7F2"/>
             </a:solidFill>
             <a:prstDash val="solid"/>
           </a:ln>
         </p:spPr>
       </p:sp>
+      <p:sp>
+        <p:nvSpPr>
+          <p:cNvPr id="6" name="Shape 4"/>
+          <p:cNvSpPr/>
+          <p:nvPr/>
+        </p:nvSpPr>
+        <p:spPr>
+          <a:xfrm>
+            <a:off x="841248" y="1929384"/>
+            <a:ext cx="438912" cy="438912"/>
+          </a:xfrm>
+          <a:prstGeom prst="ellipse">
+            <a:avLst/>
+          </a:prstGeom>
+          <a:solidFill>
+            <a:srgbClr val="1B4B8F"/>
+          </a:solidFill>
+          <a:ln/>
+        </p:spPr>
+      </p:sp>
+      <p:sp>
+        <p:nvSpPr>
+          <p:cNvPr id="7" name="Shape 5"/>
+          <p:cNvSpPr/>
+          <p:nvPr/>
+        </p:nvSpPr>
+        <p:spPr>
+          <a:xfrm>
+            <a:off x="640080" y="2624328"/>
+            <a:ext cx="10911535" cy="731520"/>
+          </a:xfrm>
+          <a:prstGeom prst="rect">
+            <a:avLst/>
+          </a:prstGeom>
+          <a:solidFill>
+            <a:srgbClr val="FFFFFF"/>
+          </a:solidFill>
+          <a:ln w="12700">
+            <a:solidFill>
+              <a:srgbClr val="E4E7F2"/>
+            </a:solidFill>
+            <a:prstDash val="solid"/>
+          </a:ln>
+        </p:spPr>
+      </p:sp>
+      <p:sp>
+        <p:nvSpPr>
+          <p:cNvPr id="8" name="Shape 6"/>
+          <p:cNvSpPr/>
+          <p:nvPr/>
+        </p:nvSpPr>
+        <p:spPr>
+          <a:xfrm>
+            <a:off x="841248" y="2770632"/>
+            <a:ext cx="438912" cy="438912"/>
+          </a:xfrm>
+          <a:prstGeom prst="ellipse">
+            <a:avLst/>
+          </a:prstGeom>
+          <a:solidFill>
+            <a:srgbClr val="0F6CBD"/>
+          </a:solidFill>
+          <a:ln/>
+        </p:spPr>
+      </p:sp>
+      <p:sp>
+        <p:nvSpPr>
+          <p:cNvPr id="9" name="Shape 7"/>
+          <p:cNvSpPr/>
+          <p:nvPr/>
+        </p:nvSpPr>
+        <p:spPr>
+          <a:xfrm>
+            <a:off x="640080" y="3465576"/>
+            <a:ext cx="10911535" cy="731520"/>
+          </a:xfrm>
+          <a:prstGeom prst="rect">
+            <a:avLst/>
+          </a:prstGeom>
+          <a:solidFill>
+            <a:srgbClr val="FFFFFF"/>
+          </a:solidFill>
+          <a:ln w="12700">
+            <a:solidFill>
+              <a:srgbClr val="E4E7F2"/>
+            </a:solidFill>
+            <a:prstDash val="solid"/>
+          </a:ln>
+        </p:spPr>
+      </p:sp>
+      <p:sp>
+        <p:nvSpPr>
+          <p:cNvPr id="10" name="Shape 8"/>
+          <p:cNvSpPr/>
+          <p:nvPr/>
+        </p:nvSpPr>
+        <p:spPr>
+          <a:xfrm>
+            <a:off x="841248" y="3611880"/>
+            <a:ext cx="438912" cy="438912"/>
+          </a:xfrm>
+          <a:prstGeom prst="ellipse">
+            <a:avLst/>
+          </a:prstGeom>
+          <a:solidFill>
+            <a:srgbClr val="C50F1F"/>
+          </a:solidFill>
+          <a:ln/>
+        </p:spPr>
+      </p:sp>
+      <p:sp>
+        <p:nvSpPr>
+          <p:cNvPr id="11" name="Shape 9"/>
+          <p:cNvSpPr/>
+          <p:nvPr/>
+        </p:nvSpPr>
+        <p:spPr>
+          <a:xfrm>
+            <a:off x="640080" y="4306824"/>
+            <a:ext cx="10911535" cy="731520"/>
+          </a:xfrm>
+          <a:prstGeom prst="rect">
+            <a:avLst/>
+          </a:prstGeom>
+          <a:solidFill>
+            <a:srgbClr val="FFFFFF"/>
+          </a:solidFill>
+          <a:ln w="12700">
+            <a:solidFill>
+              <a:srgbClr val="E4E7F2"/>
+            </a:solidFill>
+            <a:prstDash val="solid"/>
+          </a:ln>
+        </p:spPr>
+      </p:sp>
+      <p:sp>
+        <p:nvSpPr>
+          <p:cNvPr id="12" name="Shape 10"/>
+          <p:cNvSpPr/>
+          <p:nvPr/>
+        </p:nvSpPr>
+        <p:spPr>
+          <a:xfrm>
+            <a:off x="841248" y="4453128"/>
+            <a:ext cx="438912" cy="438912"/>
+          </a:xfrm>
+          <a:prstGeom prst="ellipse">
+            <a:avLst/>
+          </a:prstGeom>
+          <a:solidFill>
+            <a:srgbClr val="8764B8"/>
+          </a:solidFill>
+          <a:ln/>
+        </p:spPr>
+      </p:sp>
+      <p:sp>
+        <p:nvSpPr>
+          <p:cNvPr id="13" name="Shape 11"/>
+          <p:cNvSpPr/>
+          <p:nvPr/>
+        </p:nvSpPr>
+        <p:spPr>
+          <a:xfrm>
+            <a:off x="640080" y="5148072"/>
+            <a:ext cx="10911535" cy="731520"/>
+          </a:xfrm>
+          <a:prstGeom prst="rect">
+            <a:avLst/>
+          </a:prstGeom>
+          <a:solidFill>
+            <a:srgbClr val="FFFFFF"/>
+          </a:solidFill>
+          <a:ln w="12700">
+            <a:solidFill>
+              <a:srgbClr val="E4E7F2"/>
+            </a:solidFill>
+            <a:prstDash val="solid"/>
+          </a:ln>
+        </p:spPr>
+      </p:sp>
+      <p:sp>
+        <p:nvSpPr>
+          <p:cNvPr id="14" name="Shape 12"/>
+          <p:cNvSpPr/>
+          <p:nvPr/>
+        </p:nvSpPr>
+        <p:spPr>
+          <a:xfrm>
+            <a:off x="841248" y="5294376"/>
+            <a:ext cx="438912" cy="438912"/>
+          </a:xfrm>
+          <a:prstGeom prst="ellipse">
+            <a:avLst/>
+          </a:prstGeom>
+          <a:solidFill>
+            <a:srgbClr val="038387"/>
+          </a:solidFill>
+          <a:ln/>
+        </p:spPr>
+      </p:sp>
       <p:pic>
         <p:nvPicPr>
-          <p:cNvPr id="6" name="Image 0" descr="preencoded.png">    </p:cNvPr>
+          <p:cNvPr id="15" name="Image 0" descr="preencoded.png">    </p:cNvPr>
+          <p:cNvPicPr>
+            <a:picLocks noChangeAspect="1"/>
+          </p:cNvPicPr>
+          <p:nvPr/>
+        </p:nvPicPr>
+        <p:blipFill>
+          <a:blip r:embed="rId1"/>
+          <a:stretch>
+            <a:fillRect/>
+          </a:stretch>
+        </p:blipFill>
+        <p:spPr>
+          <a:xfrm>
+            <a:off x="950976" y="2039112"/>
+            <a:ext cx="219456" cy="219456"/>
+          </a:xfrm>
+          <a:prstGeom prst="rect">
+            <a:avLst/>
+          </a:prstGeom>
+        </p:spPr>
+      </p:pic>
+      <p:sp>
+        <p:nvSpPr>
+          <p:cNvPr id="16" name="Text 13"/>
+          <p:cNvSpPr/>
+          <p:nvPr/>
+        </p:nvSpPr>
+        <p:spPr>
+          <a:xfrm>
+            <a:off x="1417320" y="1819656"/>
+            <a:ext cx="2182307" cy="658368"/>
+          </a:xfrm>
+          <a:prstGeom prst="rect">
+            <a:avLst/>
+          </a:prstGeom>
+          <a:noFill/>
+          <a:ln/>
+        </p:spPr>
+        <p:txBody>
+          <a:bodyPr wrap="square" rtlCol="0" anchor="ctr"/>
+          <a:lstStyle/>
+          <a:p>
+            <a:pPr indent="0" marL="0">
+              <a:buNone/>
+            </a:pPr>
+            <a:r>
+              <a:rPr lang="en-US" sz="1400" b="1" dirty="0">
+                <a:solidFill>
+                  <a:srgbClr val="1B4B8F"/>
+                </a:solidFill>
+                <a:latin typeface="Microsoft JhengHei" pitchFamily="34" charset="0"/>
+                <a:ea typeface="Microsoft JhengHei" pitchFamily="34" charset="-122"/>
+                <a:cs typeface="Microsoft JhengHei" pitchFamily="34" charset="-120"/>
+              </a:rPr>
+              <a:t>電信業 · 申訴處理</a:t>
+            </a:r>
+            <a:endParaRPr lang="en-US" sz="1400" dirty="0"/>
+          </a:p>
+        </p:txBody>
+      </p:sp>
+      <p:sp>
+        <p:nvSpPr>
+          <p:cNvPr id="17" name="Text 14"/>
+          <p:cNvSpPr/>
+          <p:nvPr/>
+        </p:nvSpPr>
+        <p:spPr>
+          <a:xfrm>
+            <a:off x="3586195" y="1819656"/>
+            <a:ext cx="7747190" cy="658368"/>
+          </a:xfrm>
+          <a:prstGeom prst="rect">
+            <a:avLst/>
+          </a:prstGeom>
+          <a:noFill/>
+          <a:ln/>
+        </p:spPr>
+        <p:txBody>
+          <a:bodyPr wrap="square" rtlCol="0" anchor="ctr"/>
+          <a:lstStyle/>
+          <a:p>
+            <a:pPr indent="0" marL="0">
+              <a:lnSpc>
+                <a:spcPct val="108000"/>
+              </a:lnSpc>
+              <a:buNone/>
+            </a:pPr>
+            <a:r>
+              <a:rPr lang="en-US" sz="1350" dirty="0">
+                <a:solidFill>
+                  <a:srgbClr val="1E2235"/>
+                </a:solidFill>
+                <a:latin typeface="Microsoft JhengHei" pitchFamily="34" charset="0"/>
+                <a:ea typeface="Microsoft JhengHei" pitchFamily="34" charset="-122"/>
+                <a:cs typeface="Microsoft JhengHei" pitchFamily="34" charset="-120"/>
+              </a:rPr>
+              <a:t>💡 換成你們自己的申訴處理原則文件，測試同一套流程能不能直接沿用。</a:t>
+            </a:r>
+            <a:endParaRPr lang="en-US" sz="1350" dirty="0"/>
+          </a:p>
+        </p:txBody>
+      </p:sp>
+      <p:pic>
+        <p:nvPicPr>
+          <p:cNvPr id="18" name="Image 1" descr="preencoded.png">    </p:cNvPr>
           <p:cNvPicPr>
             <a:picLocks noChangeAspect="1"/>
           </p:cNvPicPr>
@@ -11755,8 +11849,8 @@
         </p:blipFill>
         <p:spPr>
           <a:xfrm>
-            <a:off x="804672" y="2039112"/>
-            <a:ext cx="448056" cy="448056"/>
+            <a:off x="950976" y="2880360"/>
+            <a:ext cx="219456" cy="219456"/>
           </a:xfrm>
           <a:prstGeom prst="rect">
             <a:avLst/>
@@ -11765,14 +11859,14 @@
       </p:pic>
       <p:sp>
         <p:nvSpPr>
-          <p:cNvPr id="7" name="Text 4"/>
-          <p:cNvSpPr/>
-          <p:nvPr/>
-        </p:nvSpPr>
-        <p:spPr>
-          <a:xfrm>
-            <a:off x="1691640" y="1856232"/>
-            <a:ext cx="6858000" cy="347472"/>
+          <p:cNvPr id="19" name="Text 15"/>
+          <p:cNvSpPr/>
+          <p:nvPr/>
+        </p:nvSpPr>
+        <p:spPr>
+          <a:xfrm>
+            <a:off x="1417320" y="2660904"/>
+            <a:ext cx="2182307" cy="658368"/>
           </a:xfrm>
           <a:prstGeom prst="rect">
             <a:avLst/>
@@ -11788,30 +11882,30 @@
               <a:buNone/>
             </a:pPr>
             <a:r>
-              <a:rPr lang="en-US" sz="1700" b="1" dirty="0">
-                <a:solidFill>
-                  <a:srgbClr val="FFFFFF"/>
-                </a:solidFill>
-                <a:latin typeface="Microsoft JhengHei" pitchFamily="34" charset="0"/>
-                <a:ea typeface="Microsoft JhengHei" pitchFamily="34" charset="-122"/>
-                <a:cs typeface="Microsoft JhengHei" pitchFamily="34" charset="-120"/>
-              </a:rPr>
-              <a:t>行動前審核</a:t>
-            </a:r>
-            <a:endParaRPr lang="en-US" sz="1700" dirty="0"/>
-          </a:p>
-        </p:txBody>
-      </p:sp>
-      <p:sp>
-        <p:nvSpPr>
-          <p:cNvPr id="8" name="Text 5"/>
-          <p:cNvSpPr/>
-          <p:nvPr/>
-        </p:nvSpPr>
-        <p:spPr>
-          <a:xfrm>
-            <a:off x="1691640" y="2203704"/>
-            <a:ext cx="9966960" cy="658368"/>
+              <a:rPr lang="en-US" sz="1400" b="1" dirty="0">
+                <a:solidFill>
+                  <a:srgbClr val="0F6CBD"/>
+                </a:solidFill>
+                <a:latin typeface="Microsoft JhengHei" pitchFamily="34" charset="0"/>
+                <a:ea typeface="Microsoft JhengHei" pitchFamily="34" charset="-122"/>
+                <a:cs typeface="Microsoft JhengHei" pitchFamily="34" charset="-120"/>
+              </a:rPr>
+              <a:t>電信業 · 企業服務</a:t>
+            </a:r>
+            <a:endParaRPr lang="en-US" sz="1400" dirty="0"/>
+          </a:p>
+        </p:txBody>
+      </p:sp>
+      <p:sp>
+        <p:nvSpPr>
+          <p:cNvPr id="20" name="Text 16"/>
+          <p:cNvSpPr/>
+          <p:nvPr/>
+        </p:nvSpPr>
+        <p:spPr>
+          <a:xfrm>
+            <a:off x="3586195" y="2660904"/>
+            <a:ext cx="7747190" cy="658368"/>
           </a:xfrm>
           <a:prstGeom prst="rect">
             <a:avLst/>
@@ -11825,59 +11919,28 @@
           <a:p>
             <a:pPr indent="0" marL="0">
               <a:lnSpc>
-                <a:spcPct val="118000"/>
+                <a:spcPct val="108000"/>
               </a:lnSpc>
               <a:buNone/>
             </a:pPr>
             <a:r>
-              <a:rPr lang="en-US" sz="1300" dirty="0">
-                <a:solidFill>
-                  <a:srgbClr val="C7CAEC"/>
-                </a:solidFill>
-                <a:latin typeface="Microsoft JhengHei" pitchFamily="34" charset="0"/>
-                <a:ea typeface="Microsoft JhengHei" pitchFamily="34" charset="-122"/>
-                <a:cs typeface="Microsoft JhengHei" pitchFamily="34" charset="-120"/>
-              </a:rPr>
-              <a:t>中高風險動作會顯示 RISK-LEVEL；寄信、發 Teams、建立會議等動作先攤開可編輯預覽，核准後才送出。</a:t>
-            </a:r>
-            <a:endParaRPr lang="en-US" sz="1300" dirty="0"/>
-          </a:p>
-        </p:txBody>
-      </p:sp>
-      <p:sp>
-        <p:nvSpPr>
-          <p:cNvPr id="9" name="Shape 6"/>
-          <p:cNvSpPr/>
-          <p:nvPr/>
-        </p:nvSpPr>
-        <p:spPr>
-          <a:xfrm>
-            <a:off x="640080" y="3044952"/>
-            <a:ext cx="777240" cy="777240"/>
-          </a:xfrm>
-          <a:prstGeom prst="roundRect">
-            <a:avLst>
-              <a:gd name="adj" fmla="val 18824"/>
-            </a:avLst>
-          </a:prstGeom>
-          <a:solidFill>
-            <a:srgbClr val="FFFFFF">
-              <a:alpha val="14000"/>
-            </a:srgbClr>
-          </a:solidFill>
-          <a:ln w="12700">
-            <a:solidFill>
-              <a:srgbClr val="22D3EE">
-                <a:alpha val="60000"/>
-              </a:srgbClr>
-            </a:solidFill>
-            <a:prstDash val="solid"/>
-          </a:ln>
-        </p:spPr>
+              <a:rPr lang="en-US" sz="1350" dirty="0">
+                <a:solidFill>
+                  <a:srgbClr val="1E2235"/>
+                </a:solidFill>
+                <a:latin typeface="Microsoft JhengHei" pitchFamily="34" charset="0"/>
+                <a:ea typeface="Microsoft JhengHei" pitchFamily="34" charset="-122"/>
+                <a:cs typeface="Microsoft JhengHei" pitchFamily="34" charset="-120"/>
+              </a:rPr>
+              <a:t>💡 把門檻與比率改成你們自己的 SLA 條款，只改規則文件、不動提示詞。</a:t>
+            </a:r>
+            <a:endParaRPr lang="en-US" sz="1350" dirty="0"/>
+          </a:p>
+        </p:txBody>
       </p:sp>
       <p:pic>
         <p:nvPicPr>
-          <p:cNvPr id="10" name="Image 1" descr="preencoded.png">    </p:cNvPr>
+          <p:cNvPr id="21" name="Image 2" descr="preencoded.png">    </p:cNvPr>
           <p:cNvPicPr>
             <a:picLocks noChangeAspect="1"/>
           </p:cNvPicPr>
@@ -11891,8 +11954,8 @@
         </p:blipFill>
         <p:spPr>
           <a:xfrm>
-            <a:off x="804672" y="3209544"/>
-            <a:ext cx="448056" cy="448056"/>
+            <a:off x="950976" y="3721608"/>
+            <a:ext cx="219456" cy="219456"/>
           </a:xfrm>
           <a:prstGeom prst="rect">
             <a:avLst/>
@@ -11901,14 +11964,14 @@
       </p:pic>
       <p:sp>
         <p:nvSpPr>
-          <p:cNvPr id="11" name="Text 7"/>
-          <p:cNvSpPr/>
-          <p:nvPr/>
-        </p:nvSpPr>
-        <p:spPr>
-          <a:xfrm>
-            <a:off x="1691640" y="3026664"/>
-            <a:ext cx="6858000" cy="347472"/>
+          <p:cNvPr id="22" name="Text 17"/>
+          <p:cNvSpPr/>
+          <p:nvPr/>
+        </p:nvSpPr>
+        <p:spPr>
+          <a:xfrm>
+            <a:off x="1417320" y="3502152"/>
+            <a:ext cx="2182307" cy="658368"/>
           </a:xfrm>
           <a:prstGeom prst="rect">
             <a:avLst/>
@@ -11924,30 +11987,30 @@
               <a:buNone/>
             </a:pPr>
             <a:r>
-              <a:rPr lang="en-US" sz="1700" b="1" dirty="0">
-                <a:solidFill>
-                  <a:srgbClr val="FFFFFF"/>
-                </a:solidFill>
-                <a:latin typeface="Microsoft JhengHei" pitchFamily="34" charset="0"/>
-                <a:ea typeface="Microsoft JhengHei" pitchFamily="34" charset="-122"/>
-                <a:cs typeface="Microsoft JhengHei" pitchFamily="34" charset="-120"/>
-              </a:rPr>
-              <a:t>控制範圍清楚</a:t>
-            </a:r>
-            <a:endParaRPr lang="en-US" sz="1700" dirty="0"/>
-          </a:p>
-        </p:txBody>
-      </p:sp>
-      <p:sp>
-        <p:nvSpPr>
-          <p:cNvPr id="12" name="Text 8"/>
-          <p:cNvSpPr/>
-          <p:nvPr/>
-        </p:nvSpPr>
-        <p:spPr>
-          <a:xfrm>
-            <a:off x="1691640" y="3374136"/>
-            <a:ext cx="9966960" cy="658368"/>
+              <a:rPr lang="en-US" sz="1400" b="1" dirty="0">
+                <a:solidFill>
+                  <a:srgbClr val="C50F1F"/>
+                </a:solidFill>
+                <a:latin typeface="Microsoft JhengHei" pitchFamily="34" charset="0"/>
+                <a:ea typeface="Microsoft JhengHei" pitchFamily="34" charset="-122"/>
+                <a:cs typeface="Microsoft JhengHei" pitchFamily="34" charset="-120"/>
+              </a:rPr>
+              <a:t>電信業 · 資安通報</a:t>
+            </a:r>
+            <a:endParaRPr lang="en-US" sz="1400" dirty="0"/>
+          </a:p>
+        </p:txBody>
+      </p:sp>
+      <p:sp>
+        <p:nvSpPr>
+          <p:cNvPr id="23" name="Text 18"/>
+          <p:cNvSpPr/>
+          <p:nvPr/>
+        </p:nvSpPr>
+        <p:spPr>
+          <a:xfrm>
+            <a:off x="3586195" y="3502152"/>
+            <a:ext cx="7747190" cy="658368"/>
           </a:xfrm>
           <a:prstGeom prst="rect">
             <a:avLst/>
@@ -11961,59 +12024,28 @@
           <a:p>
             <a:pPr indent="0" marL="0">
               <a:lnSpc>
-                <a:spcPct val="118000"/>
+                <a:spcPct val="108000"/>
               </a:lnSpc>
               <a:buNone/>
             </a:pPr>
             <a:r>
-              <a:rPr lang="en-US" sz="1300" dirty="0">
-                <a:solidFill>
-                  <a:srgbClr val="C7CAEC"/>
-                </a:solidFill>
-                <a:latin typeface="Microsoft JhengHei" pitchFamily="34" charset="0"/>
-                <a:ea typeface="Microsoft JhengHei" pitchFamily="34" charset="-122"/>
-                <a:cs typeface="Microsoft JhengHei" pitchFamily="34" charset="-120"/>
-              </a:rPr>
-              <a:t>don’t ask again 可限定 per-recipient、per-domain 或 always；任務可軟／硬暫停、恢復或取消。</a:t>
-            </a:r>
-            <a:endParaRPr lang="en-US" sz="1300" dirty="0"/>
-          </a:p>
-        </p:txBody>
-      </p:sp>
-      <p:sp>
-        <p:nvSpPr>
-          <p:cNvPr id="13" name="Shape 9"/>
-          <p:cNvSpPr/>
-          <p:nvPr/>
-        </p:nvSpPr>
-        <p:spPr>
-          <a:xfrm>
-            <a:off x="640080" y="4215384"/>
-            <a:ext cx="777240" cy="777240"/>
-          </a:xfrm>
-          <a:prstGeom prst="roundRect">
-            <a:avLst>
-              <a:gd name="adj" fmla="val 18824"/>
-            </a:avLst>
-          </a:prstGeom>
-          <a:solidFill>
-            <a:srgbClr val="FFFFFF">
-              <a:alpha val="14000"/>
-            </a:srgbClr>
-          </a:solidFill>
-          <a:ln w="12700">
-            <a:solidFill>
-              <a:srgbClr val="22D3EE">
-                <a:alpha val="60000"/>
-              </a:srgbClr>
-            </a:solidFill>
-            <a:prstDash val="solid"/>
-          </a:ln>
-        </p:spPr>
+              <a:rPr lang="en-US" sz="1350" dirty="0">
+                <a:solidFill>
+                  <a:srgbClr val="1E2235"/>
+                </a:solidFill>
+                <a:latin typeface="Microsoft JhengHei" pitchFamily="34" charset="0"/>
+                <a:ea typeface="Microsoft JhengHei" pitchFamily="34" charset="-122"/>
+                <a:cs typeface="Microsoft JhengHei" pitchFamily="34" charset="-120"/>
+              </a:rPr>
+              <a:t>💡 把觸發關鍵字換成你們實際的資安通報主旨前綴。</a:t>
+            </a:r>
+            <a:endParaRPr lang="en-US" sz="1350" dirty="0"/>
+          </a:p>
+        </p:txBody>
       </p:sp>
       <p:pic>
         <p:nvPicPr>
-          <p:cNvPr id="14" name="Image 2" descr="preencoded.png">    </p:cNvPr>
+          <p:cNvPr id="24" name="Image 3" descr="preencoded.png">    </p:cNvPr>
           <p:cNvPicPr>
             <a:picLocks noChangeAspect="1"/>
           </p:cNvPicPr>
@@ -12027,8 +12059,8 @@
         </p:blipFill>
         <p:spPr>
           <a:xfrm>
-            <a:off x="804672" y="4379976"/>
-            <a:ext cx="448056" cy="448056"/>
+            <a:off x="950976" y="4562856"/>
+            <a:ext cx="219456" cy="219456"/>
           </a:xfrm>
           <a:prstGeom prst="rect">
             <a:avLst/>
@@ -12037,14 +12069,14 @@
       </p:pic>
       <p:sp>
         <p:nvSpPr>
-          <p:cNvPr id="15" name="Text 10"/>
-          <p:cNvSpPr/>
-          <p:nvPr/>
-        </p:nvSpPr>
-        <p:spPr>
-          <a:xfrm>
-            <a:off x="1691640" y="4197096"/>
-            <a:ext cx="6858000" cy="347472"/>
+          <p:cNvPr id="25" name="Text 19"/>
+          <p:cNvSpPr/>
+          <p:nvPr/>
+        </p:nvSpPr>
+        <p:spPr>
+          <a:xfrm>
+            <a:off x="1417320" y="4343400"/>
+            <a:ext cx="2182307" cy="658368"/>
           </a:xfrm>
           <a:prstGeom prst="rect">
             <a:avLst/>
@@ -12060,30 +12092,30 @@
               <a:buNone/>
             </a:pPr>
             <a:r>
-              <a:rPr lang="en-US" sz="1700" b="1" dirty="0">
-                <a:solidFill>
-                  <a:srgbClr val="FFFFFF"/>
-                </a:solidFill>
-                <a:latin typeface="Microsoft JhengHei" pitchFamily="34" charset="0"/>
-                <a:ea typeface="Microsoft JhengHei" pitchFamily="34" charset="-122"/>
-                <a:cs typeface="Microsoft JhengHei" pitchFamily="34" charset="-120"/>
-              </a:rPr>
-              <a:t>自動化任務也有把關</a:t>
-            </a:r>
-            <a:endParaRPr lang="en-US" sz="1700" dirty="0"/>
-          </a:p>
-        </p:txBody>
-      </p:sp>
-      <p:sp>
-        <p:nvSpPr>
-          <p:cNvPr id="16" name="Text 11"/>
-          <p:cNvSpPr/>
-          <p:nvPr/>
-        </p:nvSpPr>
-        <p:spPr>
-          <a:xfrm>
-            <a:off x="1691640" y="4544568"/>
-            <a:ext cx="9966960" cy="658368"/>
+              <a:rPr lang="en-US" sz="1400" b="1" dirty="0">
+                <a:solidFill>
+                  <a:srgbClr val="8764B8"/>
+                </a:solidFill>
+                <a:latin typeface="Microsoft JhengHei" pitchFamily="34" charset="0"/>
+                <a:ea typeface="Microsoft JhengHei" pitchFamily="34" charset="-122"/>
+                <a:cs typeface="Microsoft JhengHei" pitchFamily="34" charset="-120"/>
+              </a:rPr>
+              <a:t>電信業 · 客訴分析</a:t>
+            </a:r>
+            <a:endParaRPr lang="en-US" sz="1400" dirty="0"/>
+          </a:p>
+        </p:txBody>
+      </p:sp>
+      <p:sp>
+        <p:nvSpPr>
+          <p:cNvPr id="26" name="Text 20"/>
+          <p:cNvSpPr/>
+          <p:nvPr/>
+        </p:nvSpPr>
+        <p:spPr>
+          <a:xfrm>
+            <a:off x="3586195" y="4343400"/>
+            <a:ext cx="7747190" cy="658368"/>
           </a:xfrm>
           <a:prstGeom prst="rect">
             <a:avLst/>
@@ -12097,59 +12129,28 @@
           <a:p>
             <a:pPr indent="0" marL="0">
               <a:lnSpc>
-                <a:spcPct val="118000"/>
+                <a:spcPct val="108000"/>
               </a:lnSpc>
               <a:buNone/>
             </a:pPr>
             <a:r>
-              <a:rPr lang="en-US" sz="1300" dirty="0">
-                <a:solidFill>
-                  <a:srgbClr val="C7CAEC"/>
-                </a:solidFill>
-                <a:latin typeface="Microsoft JhengHei" pitchFamily="34" charset="0"/>
-                <a:ea typeface="Microsoft JhengHei" pitchFamily="34" charset="-122"/>
-                <a:cs typeface="Microsoft JhengHei" pitchFamily="34" charset="-120"/>
-              </a:rPr>
-              <a:t>排程提示與事件驅動任務有執行頻率限制與防迴圈保護；一律以建立者權限執行，且與其他 Cowork 活動一同記錄在統一稽核日誌，套用 Microsoft Purview 政策。</a:t>
-            </a:r>
-            <a:endParaRPr lang="en-US" sz="1300" dirty="0"/>
-          </a:p>
-        </p:txBody>
-      </p:sp>
-      <p:sp>
-        <p:nvSpPr>
-          <p:cNvPr id="17" name="Shape 12"/>
-          <p:cNvSpPr/>
-          <p:nvPr/>
-        </p:nvSpPr>
-        <p:spPr>
-          <a:xfrm>
-            <a:off x="640080" y="5385816"/>
-            <a:ext cx="777240" cy="777240"/>
-          </a:xfrm>
-          <a:prstGeom prst="roundRect">
-            <a:avLst>
-              <a:gd name="adj" fmla="val 18824"/>
-            </a:avLst>
-          </a:prstGeom>
-          <a:solidFill>
-            <a:srgbClr val="FFFFFF">
-              <a:alpha val="14000"/>
-            </a:srgbClr>
-          </a:solidFill>
-          <a:ln w="12700">
-            <a:solidFill>
-              <a:srgbClr val="22D3EE">
-                <a:alpha val="60000"/>
-              </a:srgbClr>
-            </a:solidFill>
-            <a:prstDash val="solid"/>
-          </a:ln>
-        </p:spPr>
+              <a:rPr lang="en-US" sz="1350" dirty="0">
+                <a:solidFill>
+                  <a:srgbClr val="1E2235"/>
+                </a:solidFill>
+                <a:latin typeface="Microsoft JhengHei" pitchFamily="34" charset="0"/>
+                <a:ea typeface="Microsoft JhengHei" pitchFamily="34" charset="-122"/>
+                <a:cs typeface="Microsoft JhengHei" pitchFamily="34" charset="-120"/>
+              </a:rPr>
+              <a:t>💡 把上個月的客訴一起丟進去，讓它比較兩個月的類別消長。</a:t>
+            </a:r>
+            <a:endParaRPr lang="en-US" sz="1350" dirty="0"/>
+          </a:p>
+        </p:txBody>
       </p:sp>
       <p:pic>
         <p:nvPicPr>
-          <p:cNvPr id="18" name="Image 3" descr="preencoded.png">    </p:cNvPr>
+          <p:cNvPr id="27" name="Image 4" descr="preencoded.png">    </p:cNvPr>
           <p:cNvPicPr>
             <a:picLocks noChangeAspect="1"/>
           </p:cNvPicPr>
@@ -12163,8 +12164,8 @@
         </p:blipFill>
         <p:spPr>
           <a:xfrm>
-            <a:off x="804672" y="5550408"/>
-            <a:ext cx="448056" cy="448056"/>
+            <a:off x="950976" y="5404104"/>
+            <a:ext cx="219456" cy="219456"/>
           </a:xfrm>
           <a:prstGeom prst="rect">
             <a:avLst/>
@@ -12173,14 +12174,14 @@
       </p:pic>
       <p:sp>
         <p:nvSpPr>
-          <p:cNvPr id="19" name="Text 13"/>
-          <p:cNvSpPr/>
-          <p:nvPr/>
-        </p:nvSpPr>
-        <p:spPr>
-          <a:xfrm>
-            <a:off x="1691640" y="5367528"/>
-            <a:ext cx="6858000" cy="347472"/>
+          <p:cNvPr id="28" name="Text 21"/>
+          <p:cNvSpPr/>
+          <p:nvPr/>
+        </p:nvSpPr>
+        <p:spPr>
+          <a:xfrm>
+            <a:off x="1417320" y="5184648"/>
+            <a:ext cx="2182307" cy="658368"/>
           </a:xfrm>
           <a:prstGeom prst="rect">
             <a:avLst/>
@@ -12196,30 +12197,30 @@
               <a:buNone/>
             </a:pPr>
             <a:r>
-              <a:rPr lang="en-US" sz="1700" b="1" dirty="0">
-                <a:solidFill>
-                  <a:srgbClr val="FFFFFF"/>
-                </a:solidFill>
-                <a:latin typeface="Microsoft JhengHei" pitchFamily="34" charset="0"/>
-                <a:ea typeface="Microsoft JhengHei" pitchFamily="34" charset="-122"/>
-                <a:cs typeface="Microsoft JhengHei" pitchFamily="34" charset="-120"/>
-              </a:rPr>
-              <a:t>限制也要知道</a:t>
-            </a:r>
-            <a:endParaRPr lang="en-US" sz="1700" dirty="0"/>
-          </a:p>
-        </p:txBody>
-      </p:sp>
-      <p:sp>
-        <p:nvSpPr>
-          <p:cNvPr id="20" name="Text 14"/>
-          <p:cNvSpPr/>
-          <p:nvPr/>
-        </p:nvSpPr>
-        <p:spPr>
-          <a:xfrm>
-            <a:off x="1691640" y="5715000"/>
-            <a:ext cx="9966960" cy="658368"/>
+              <a:rPr lang="en-US" sz="1400" b="1" dirty="0">
+                <a:solidFill>
+                  <a:srgbClr val="038387"/>
+                </a:solidFill>
+                <a:latin typeface="Microsoft JhengHei" pitchFamily="34" charset="0"/>
+                <a:ea typeface="Microsoft JhengHei" pitchFamily="34" charset="-122"/>
+                <a:cs typeface="Microsoft JhengHei" pitchFamily="34" charset="-120"/>
+              </a:rPr>
+              <a:t>電信業 · 自訂技能</a:t>
+            </a:r>
+            <a:endParaRPr lang="en-US" sz="1400" dirty="0"/>
+          </a:p>
+        </p:txBody>
+      </p:sp>
+      <p:sp>
+        <p:nvSpPr>
+          <p:cNvPr id="29" name="Text 22"/>
+          <p:cNvSpPr/>
+          <p:nvPr/>
+        </p:nvSpPr>
+        <p:spPr>
+          <a:xfrm>
+            <a:off x="3586195" y="5184648"/>
+            <a:ext cx="7747190" cy="658368"/>
           </a:xfrm>
           <a:prstGeom prst="rect">
             <a:avLst/>
@@ -12233,28 +12234,28 @@
           <a:p>
             <a:pPr indent="0" marL="0">
               <a:lnSpc>
-                <a:spcPct val="118000"/>
+                <a:spcPct val="108000"/>
               </a:lnSpc>
               <a:buNone/>
             </a:pPr>
             <a:r>
-              <a:rPr lang="en-US" sz="1300" dirty="0">
-                <a:solidFill>
-                  <a:srgbClr val="C7CAEC"/>
-                </a:solidFill>
-                <a:latin typeface="Microsoft JhengHei" pitchFamily="34" charset="0"/>
-                <a:ea typeface="Microsoft JhengHei" pitchFamily="34" charset="-122"/>
-                <a:cs typeface="Microsoft JhengHei" pitchFamily="34" charset="-120"/>
-              </a:rPr>
-              <a:t>不能存取本機檔案、刪除 OneDrive/SharePoint 檔案或讀取加密檔；附件 &lt;200MB；自訂技能與第三方 plugin 未經 Microsoft 驗證，需自行審閱。官方明列不適用於「免人工審查即需保證正確」的用途。</a:t>
-            </a:r>
-            <a:endParaRPr lang="en-US" sz="1300" dirty="0"/>
-          </a:p>
-        </p:txBody>
-      </p:sp>
-      <p:sp>
-        <p:nvSpPr>
-          <p:cNvPr id="21" name="Text 15"/>
+              <a:rPr lang="en-US" sz="1350" dirty="0">
+                <a:solidFill>
+                  <a:srgbClr val="1E2235"/>
+                </a:solidFill>
+                <a:latin typeface="Microsoft JhengHei" pitchFamily="34" charset="0"/>
+                <a:ea typeface="Microsoft JhengHei" pitchFamily="34" charset="-122"/>
+                <a:cs typeface="Microsoft JhengHei" pitchFamily="34" charset="-120"/>
+              </a:rPr>
+              <a:t>💡 把 TEL1 的申訴時序還原也做成技能，讓兩個技能各司其職。</a:t>
+            </a:r>
+            <a:endParaRPr lang="en-US" sz="1350" dirty="0"/>
+          </a:p>
+        </p:txBody>
+      </p:sp>
+      <p:sp>
+        <p:nvSpPr>
+          <p:cNvPr id="30" name="Text 23"/>
           <p:cNvSpPr/>
           <p:nvPr/>
         </p:nvSpPr>
@@ -12279,7 +12280,7 @@
             <a:r>
               <a:rPr lang="en-US" sz="900" dirty="0">
                 <a:solidFill>
-                  <a:srgbClr val="8A8FB5"/>
+                  <a:srgbClr val="5B6079"/>
                 </a:solidFill>
                 <a:latin typeface="Microsoft JhengHei" pitchFamily="34" charset="0"/>
                 <a:ea typeface="Microsoft JhengHei" pitchFamily="34" charset="-122"/>
@@ -12293,7 +12294,7 @@
       </p:sp>
       <p:sp>
         <p:nvSpPr>
-          <p:cNvPr id="22" name="Text 16"/>
+          <p:cNvPr id="31" name="Text 24"/>
           <p:cNvSpPr/>
           <p:nvPr/>
         </p:nvSpPr>
@@ -12318,7 +12319,7 @@
             <a:r>
               <a:rPr lang="en-US" sz="900" dirty="0">
                 <a:solidFill>
-                  <a:srgbClr val="8A8FB5"/>
+                  <a:srgbClr val="5B6079"/>
                 </a:solidFill>
                 <a:latin typeface="Microsoft JhengHei" pitchFamily="34" charset="0"/>
                 <a:ea typeface="Microsoft JhengHei" pitchFamily="34" charset="-122"/>
@@ -12468,7 +12469,7 @@
         </p:nvSpPr>
         <p:spPr>
           <a:xfrm>
-            <a:off x="640080" y="1737360"/>
+            <a:off x="640080" y="1664208"/>
             <a:ext cx="1005840" cy="822960"/>
           </a:xfrm>
           <a:prstGeom prst="rect">
@@ -12485,7 +12486,7 @@
               <a:buNone/>
             </a:pPr>
             <a:r>
-              <a:rPr lang="en-US" sz="3800" b="1" dirty="0">
+              <a:rPr lang="en-US" sz="3400" b="1" dirty="0">
                 <a:solidFill>
                   <a:srgbClr val="6366F1"/>
                 </a:solidFill>
@@ -12495,7 +12496,7 @@
               </a:rPr>
               <a:t>01</a:t>
             </a:r>
-            <a:endParaRPr lang="en-US" sz="3800" dirty="0"/>
+            <a:endParaRPr lang="en-US" sz="3400" dirty="0"/>
           </a:p>
         </p:txBody>
       </p:sp>
@@ -12507,7 +12508,7 @@
         </p:nvSpPr>
         <p:spPr>
           <a:xfrm>
-            <a:off x="1737360" y="1773936"/>
+            <a:off x="1737360" y="1700784"/>
             <a:ext cx="3657600" cy="457200"/>
           </a:xfrm>
           <a:prstGeom prst="rect">
@@ -12524,7 +12525,7 @@
               <a:buNone/>
             </a:pPr>
             <a:r>
-              <a:rPr lang="en-US" sz="2000" b="1" dirty="0">
+              <a:rPr lang="en-US" sz="1900" b="1" dirty="0">
                 <a:solidFill>
                   <a:srgbClr val="1E2235"/>
                 </a:solidFill>
@@ -12534,7 +12535,7 @@
               </a:rPr>
               <a:t>認識 Cowork</a:t>
             </a:r>
-            <a:endParaRPr lang="en-US" sz="2000" dirty="0"/>
+            <a:endParaRPr lang="en-US" sz="1900" dirty="0"/>
           </a:p>
         </p:txBody>
       </p:sp>
@@ -12546,7 +12547,7 @@
         </p:nvSpPr>
         <p:spPr>
           <a:xfrm>
-            <a:off x="1737360" y="2212848"/>
+            <a:off x="1737360" y="2121408"/>
             <a:ext cx="9601200" cy="365760"/>
           </a:xfrm>
           <a:prstGeom prst="rect">
@@ -12563,7 +12564,7 @@
               <a:buNone/>
             </a:pPr>
             <a:r>
-              <a:rPr lang="en-US" sz="1400" dirty="0">
+              <a:rPr lang="en-US" sz="1350" dirty="0">
                 <a:solidFill>
                   <a:srgbClr val="5B6079"/>
                 </a:solidFill>
@@ -12573,7 +12574,7 @@
               </a:rPr>
               <a:t>什麼是代理式 AI，和一般 Copilot Chat 有何不同</a:t>
             </a:r>
-            <a:endParaRPr lang="en-US" sz="1400" dirty="0"/>
+            <a:endParaRPr lang="en-US" sz="1350" dirty="0"/>
           </a:p>
         </p:txBody>
       </p:sp>
@@ -12585,7 +12586,7 @@
         </p:nvSpPr>
         <p:spPr>
           <a:xfrm>
-            <a:off x="640080" y="2816352"/>
+            <a:off x="640080" y="2578608"/>
             <a:ext cx="1005840" cy="822960"/>
           </a:xfrm>
           <a:prstGeom prst="rect">
@@ -12602,7 +12603,7 @@
               <a:buNone/>
             </a:pPr>
             <a:r>
-              <a:rPr lang="en-US" sz="3800" b="1" dirty="0">
+              <a:rPr lang="en-US" sz="3400" b="1" dirty="0">
                 <a:solidFill>
                   <a:srgbClr val="6366F1"/>
                 </a:solidFill>
@@ -12612,7 +12613,7 @@
               </a:rPr>
               <a:t>02</a:t>
             </a:r>
-            <a:endParaRPr lang="en-US" sz="3800" dirty="0"/>
+            <a:endParaRPr lang="en-US" sz="3400" dirty="0"/>
           </a:p>
         </p:txBody>
       </p:sp>
@@ -12624,7 +12625,7 @@
         </p:nvSpPr>
         <p:spPr>
           <a:xfrm>
-            <a:off x="1737360" y="2852928"/>
+            <a:off x="1737360" y="2615184"/>
             <a:ext cx="3657600" cy="457200"/>
           </a:xfrm>
           <a:prstGeom prst="rect">
@@ -12641,7 +12642,7 @@
               <a:buNone/>
             </a:pPr>
             <a:r>
-              <a:rPr lang="en-US" sz="2000" b="1" dirty="0">
+              <a:rPr lang="en-US" sz="1900" b="1" dirty="0">
                 <a:solidFill>
                   <a:srgbClr val="1E2235"/>
                 </a:solidFill>
@@ -12651,7 +12652,7 @@
               </a:rPr>
               <a:t>核心能力與運作</a:t>
             </a:r>
-            <a:endParaRPr lang="en-US" sz="2000" dirty="0"/>
+            <a:endParaRPr lang="en-US" sz="1900" dirty="0"/>
           </a:p>
         </p:txBody>
       </p:sp>
@@ -12663,7 +12664,7 @@
         </p:nvSpPr>
         <p:spPr>
           <a:xfrm>
-            <a:off x="1737360" y="3291840"/>
+            <a:off x="1737360" y="3035808"/>
             <a:ext cx="9601200" cy="365760"/>
           </a:xfrm>
           <a:prstGeom prst="rect">
@@ -12680,7 +12681,7 @@
               <a:buNone/>
             </a:pPr>
             <a:r>
-              <a:rPr lang="en-US" sz="1400" dirty="0">
+              <a:rPr lang="en-US" sz="1350" dirty="0">
                 <a:solidFill>
                   <a:srgbClr val="5B6079"/>
                 </a:solidFill>
@@ -12690,7 +12691,7 @@
               </a:rPr>
               <a:t>技能、工作區、行動前審核、自我驗證</a:t>
             </a:r>
-            <a:endParaRPr lang="en-US" sz="1400" dirty="0"/>
+            <a:endParaRPr lang="en-US" sz="1350" dirty="0"/>
           </a:p>
         </p:txBody>
       </p:sp>
@@ -12702,7 +12703,7 @@
         </p:nvSpPr>
         <p:spPr>
           <a:xfrm>
-            <a:off x="640080" y="3895344"/>
+            <a:off x="640080" y="3493008"/>
             <a:ext cx="1005840" cy="822960"/>
           </a:xfrm>
           <a:prstGeom prst="rect">
@@ -12719,7 +12720,7 @@
               <a:buNone/>
             </a:pPr>
             <a:r>
-              <a:rPr lang="en-US" sz="3800" b="1" dirty="0">
+              <a:rPr lang="en-US" sz="3400" b="1" dirty="0">
                 <a:solidFill>
                   <a:srgbClr val="6366F1"/>
                 </a:solidFill>
@@ -12729,7 +12730,7 @@
               </a:rPr>
               <a:t>03</a:t>
             </a:r>
-            <a:endParaRPr lang="en-US" sz="3800" dirty="0"/>
+            <a:endParaRPr lang="en-US" sz="3400" dirty="0"/>
           </a:p>
         </p:txBody>
       </p:sp>
@@ -12741,7 +12742,7 @@
         </p:nvSpPr>
         <p:spPr>
           <a:xfrm>
-            <a:off x="1737360" y="3931920"/>
+            <a:off x="1737360" y="3529584"/>
             <a:ext cx="3657600" cy="457200"/>
           </a:xfrm>
           <a:prstGeom prst="rect">
@@ -12758,7 +12759,7 @@
               <a:buNone/>
             </a:pPr>
             <a:r>
-              <a:rPr lang="en-US" sz="2000" b="1" dirty="0">
+              <a:rPr lang="en-US" sz="1900" b="1" dirty="0">
                 <a:solidFill>
                   <a:srgbClr val="1E2235"/>
                 </a:solidFill>
@@ -12766,21 +12767,138 @@
                 <a:ea typeface="Microsoft JhengHei" pitchFamily="34" charset="-122"/>
                 <a:cs typeface="Microsoft JhengHei" pitchFamily="34" charset="-120"/>
               </a:rPr>
+              <a:t>練習環境準備</a:t>
+            </a:r>
+            <a:endParaRPr lang="en-US" sz="1900" dirty="0"/>
+          </a:p>
+        </p:txBody>
+      </p:sp>
+      <p:sp>
+        <p:nvSpPr>
+          <p:cNvPr id="13" name="Text 11"/>
+          <p:cNvSpPr/>
+          <p:nvPr/>
+        </p:nvSpPr>
+        <p:spPr>
+          <a:xfrm>
+            <a:off x="1737360" y="3950208"/>
+            <a:ext cx="9601200" cy="365760"/>
+          </a:xfrm>
+          <a:prstGeom prst="rect">
+            <a:avLst/>
+          </a:prstGeom>
+          <a:noFill/>
+          <a:ln/>
+        </p:spPr>
+        <p:txBody>
+          <a:bodyPr wrap="square" rtlCol="0" anchor="ctr"/>
+          <a:lstStyle/>
+          <a:p>
+            <a:pPr indent="0" marL="0">
+              <a:buNone/>
+            </a:pPr>
+            <a:r>
+              <a:rPr lang="en-US" sz="1350" dirty="0">
+                <a:solidFill>
+                  <a:srgbClr val="5B6079"/>
+                </a:solidFill>
+                <a:latin typeface="Microsoft JhengHei" pitchFamily="34" charset="0"/>
+                <a:ea typeface="Microsoft JhengHei" pitchFamily="34" charset="-122"/>
+                <a:cs typeface="Microsoft JhengHei" pitchFamily="34" charset="-120"/>
+              </a:rPr>
+              <a:t>素材課前放進 OneDrive 與信箱，讓 Cowork 自己去找</a:t>
+            </a:r>
+            <a:endParaRPr lang="en-US" sz="1350" dirty="0"/>
+          </a:p>
+        </p:txBody>
+      </p:sp>
+      <p:sp>
+        <p:nvSpPr>
+          <p:cNvPr id="14" name="Text 12"/>
+          <p:cNvSpPr/>
+          <p:nvPr/>
+        </p:nvSpPr>
+        <p:spPr>
+          <a:xfrm>
+            <a:off x="640080" y="4407408"/>
+            <a:ext cx="1005840" cy="822960"/>
+          </a:xfrm>
+          <a:prstGeom prst="rect">
+            <a:avLst/>
+          </a:prstGeom>
+          <a:noFill/>
+          <a:ln/>
+        </p:spPr>
+        <p:txBody>
+          <a:bodyPr wrap="square" rtlCol="0" anchor="ctr"/>
+          <a:lstStyle/>
+          <a:p>
+            <a:pPr algn="l" indent="0" marL="0">
+              <a:buNone/>
+            </a:pPr>
+            <a:r>
+              <a:rPr lang="en-US" sz="3400" b="1" dirty="0">
+                <a:solidFill>
+                  <a:srgbClr val="6366F1"/>
+                </a:solidFill>
+                <a:latin typeface="Microsoft JhengHei" pitchFamily="34" charset="0"/>
+                <a:ea typeface="Microsoft JhengHei" pitchFamily="34" charset="-122"/>
+                <a:cs typeface="Microsoft JhengHei" pitchFamily="34" charset="-120"/>
+              </a:rPr>
+              <a:t>04</a:t>
+            </a:r>
+            <a:endParaRPr lang="en-US" sz="3400" dirty="0"/>
+          </a:p>
+        </p:txBody>
+      </p:sp>
+      <p:sp>
+        <p:nvSpPr>
+          <p:cNvPr id="15" name="Text 13"/>
+          <p:cNvSpPr/>
+          <p:nvPr/>
+        </p:nvSpPr>
+        <p:spPr>
+          <a:xfrm>
+            <a:off x="1737360" y="4443984"/>
+            <a:ext cx="3657600" cy="457200"/>
+          </a:xfrm>
+          <a:prstGeom prst="rect">
+            <a:avLst/>
+          </a:prstGeom>
+          <a:noFill/>
+          <a:ln/>
+        </p:spPr>
+        <p:txBody>
+          <a:bodyPr wrap="square" rtlCol="0" anchor="ctr"/>
+          <a:lstStyle/>
+          <a:p>
+            <a:pPr indent="0" marL="0">
+              <a:buNone/>
+            </a:pPr>
+            <a:r>
+              <a:rPr lang="en-US" sz="1900" b="1" dirty="0">
+                <a:solidFill>
+                  <a:srgbClr val="1E2235"/>
+                </a:solidFill>
+                <a:latin typeface="Microsoft JhengHei" pitchFamily="34" charset="0"/>
+                <a:ea typeface="Microsoft JhengHei" pitchFamily="34" charset="-122"/>
+                <a:cs typeface="Microsoft JhengHei" pitchFamily="34" charset="-120"/>
+              </a:rPr>
               <a:t>5 個實戰情境</a:t>
             </a:r>
-            <a:endParaRPr lang="en-US" sz="2000" dirty="0"/>
-          </a:p>
-        </p:txBody>
-      </p:sp>
-      <p:sp>
-        <p:nvSpPr>
-          <p:cNvPr id="13" name="Text 11"/>
-          <p:cNvSpPr/>
-          <p:nvPr/>
-        </p:nvSpPr>
-        <p:spPr>
-          <a:xfrm>
-            <a:off x="1737360" y="4370832"/>
+            <a:endParaRPr lang="en-US" sz="1900" dirty="0"/>
+          </a:p>
+        </p:txBody>
+      </p:sp>
+      <p:sp>
+        <p:nvSpPr>
+          <p:cNvPr id="16" name="Text 14"/>
+          <p:cNvSpPr/>
+          <p:nvPr/>
+        </p:nvSpPr>
+        <p:spPr>
+          <a:xfrm>
+            <a:off x="1737360" y="4864608"/>
             <a:ext cx="9601200" cy="365760"/>
           </a:xfrm>
           <a:prstGeom prst="rect">
@@ -12797,7 +12915,7 @@
               <a:buNone/>
             </a:pPr>
             <a:r>
-              <a:rPr lang="en-US" sz="1400" dirty="0">
+              <a:rPr lang="en-US" sz="1350" dirty="0">
                 <a:solidFill>
                   <a:srgbClr val="5B6079"/>
                 </a:solidFill>
@@ -12807,19 +12925,19 @@
               </a:rPr>
               <a:t>申訴案三來源時序還原、SLA 月結逐封核准、個資外洩 72 小時待命、客訴根因分析、SLA 判定技能，五個「只有 Cowork 做得到」的工作流</a:t>
             </a:r>
-            <a:endParaRPr lang="en-US" sz="1400" dirty="0"/>
-          </a:p>
-        </p:txBody>
-      </p:sp>
-      <p:sp>
-        <p:nvSpPr>
-          <p:cNvPr id="14" name="Text 12"/>
-          <p:cNvSpPr/>
-          <p:nvPr/>
-        </p:nvSpPr>
-        <p:spPr>
-          <a:xfrm>
-            <a:off x="640080" y="4974336"/>
+            <a:endParaRPr lang="en-US" sz="1350" dirty="0"/>
+          </a:p>
+        </p:txBody>
+      </p:sp>
+      <p:sp>
+        <p:nvSpPr>
+          <p:cNvPr id="17" name="Text 15"/>
+          <p:cNvSpPr/>
+          <p:nvPr/>
+        </p:nvSpPr>
+        <p:spPr>
+          <a:xfrm>
+            <a:off x="640080" y="5321808"/>
             <a:ext cx="1005840" cy="822960"/>
           </a:xfrm>
           <a:prstGeom prst="rect">
@@ -12836,7 +12954,7 @@
               <a:buNone/>
             </a:pPr>
             <a:r>
-              <a:rPr lang="en-US" sz="3800" b="1" dirty="0">
+              <a:rPr lang="en-US" sz="3400" b="1" dirty="0">
                 <a:solidFill>
                   <a:srgbClr val="6366F1"/>
                 </a:solidFill>
@@ -12844,21 +12962,21 @@
                 <a:ea typeface="Microsoft JhengHei" pitchFamily="34" charset="-122"/>
                 <a:cs typeface="Microsoft JhengHei" pitchFamily="34" charset="-120"/>
               </a:rPr>
-              <a:t>04</a:t>
-            </a:r>
-            <a:endParaRPr lang="en-US" sz="3800" dirty="0"/>
-          </a:p>
-        </p:txBody>
-      </p:sp>
-      <p:sp>
-        <p:nvSpPr>
-          <p:cNvPr id="15" name="Text 13"/>
-          <p:cNvSpPr/>
-          <p:nvPr/>
-        </p:nvSpPr>
-        <p:spPr>
-          <a:xfrm>
-            <a:off x="1737360" y="5010912"/>
+              <a:t>05</a:t>
+            </a:r>
+            <a:endParaRPr lang="en-US" sz="3400" dirty="0"/>
+          </a:p>
+        </p:txBody>
+      </p:sp>
+      <p:sp>
+        <p:nvSpPr>
+          <p:cNvPr id="18" name="Text 16"/>
+          <p:cNvSpPr/>
+          <p:nvPr/>
+        </p:nvSpPr>
+        <p:spPr>
+          <a:xfrm>
+            <a:off x="1737360" y="5358384"/>
             <a:ext cx="3657600" cy="457200"/>
           </a:xfrm>
           <a:prstGeom prst="rect">
@@ -12875,7 +12993,7 @@
               <a:buNone/>
             </a:pPr>
             <a:r>
-              <a:rPr lang="en-US" sz="2000" b="1" dirty="0">
+              <a:rPr lang="en-US" sz="1900" b="1" dirty="0">
                 <a:solidFill>
                   <a:srgbClr val="1E2235"/>
                 </a:solidFill>
@@ -12885,19 +13003,19 @@
               </a:rPr>
               <a:t>套用到你的日常</a:t>
             </a:r>
-            <a:endParaRPr lang="en-US" sz="2000" dirty="0"/>
-          </a:p>
-        </p:txBody>
-      </p:sp>
-      <p:sp>
-        <p:nvSpPr>
-          <p:cNvPr id="16" name="Text 14"/>
-          <p:cNvSpPr/>
-          <p:nvPr/>
-        </p:nvSpPr>
-        <p:spPr>
-          <a:xfrm>
-            <a:off x="1737360" y="5449824"/>
+            <a:endParaRPr lang="en-US" sz="1900" dirty="0"/>
+          </a:p>
+        </p:txBody>
+      </p:sp>
+      <p:sp>
+        <p:nvSpPr>
+          <p:cNvPr id="19" name="Text 17"/>
+          <p:cNvSpPr/>
+          <p:nvPr/>
+        </p:nvSpPr>
+        <p:spPr>
+          <a:xfrm>
+            <a:off x="1737360" y="5779008"/>
             <a:ext cx="9601200" cy="365760"/>
           </a:xfrm>
           <a:prstGeom prst="rect">
@@ -12914,7 +13032,7 @@
               <a:buNone/>
             </a:pPr>
             <a:r>
-              <a:rPr lang="en-US" sz="1400" dirty="0">
+              <a:rPr lang="en-US" sz="1350" dirty="0">
                 <a:solidFill>
                   <a:srgbClr val="5B6079"/>
                 </a:solidFill>
@@ -12924,13 +13042,13 @@
               </a:rPr>
               <a:t>如何把這些情境延伸到自己的工作</a:t>
             </a:r>
-            <a:endParaRPr lang="en-US" sz="1400" dirty="0"/>
-          </a:p>
-        </p:txBody>
-      </p:sp>
-      <p:sp>
-        <p:nvSpPr>
-          <p:cNvPr id="17" name="Text 15"/>
+            <a:endParaRPr lang="en-US" sz="1350" dirty="0"/>
+          </a:p>
+        </p:txBody>
+      </p:sp>
+      <p:sp>
+        <p:nvSpPr>
+          <p:cNvPr id="20" name="Text 18"/>
           <p:cNvSpPr/>
           <p:nvPr/>
         </p:nvSpPr>
@@ -12969,7 +13087,7 @@
       </p:sp>
       <p:sp>
         <p:nvSpPr>
-          <p:cNvPr id="18" name="Text 16"/>
+          <p:cNvPr id="21" name="Text 19"/>
           <p:cNvSpPr/>
           <p:nvPr/>
         </p:nvSpPr>
@@ -13047,14 +13165,34 @@
       </p:grpSpPr>
       <p:sp>
         <p:nvSpPr>
-          <p:cNvPr id="2" name="Text 0"/>
-          <p:cNvSpPr/>
-          <p:nvPr/>
-        </p:nvSpPr>
-        <p:spPr>
-          <a:xfrm>
-            <a:off x="640080" y="1371600"/>
-            <a:ext cx="10058400" cy="822960"/>
+          <p:cNvPr id="2" name="Shape 0"/>
+          <p:cNvSpPr/>
+          <p:nvPr/>
+        </p:nvSpPr>
+        <p:spPr>
+          <a:xfrm>
+            <a:off x="640080" y="566928"/>
+            <a:ext cx="384048" cy="128016"/>
+          </a:xfrm>
+          <a:prstGeom prst="rect">
+            <a:avLst/>
+          </a:prstGeom>
+          <a:solidFill>
+            <a:srgbClr val="22D3EE"/>
+          </a:solidFill>
+          <a:ln/>
+        </p:spPr>
+      </p:sp>
+      <p:sp>
+        <p:nvSpPr>
+          <p:cNvPr id="3" name="Text 1"/>
+          <p:cNvSpPr/>
+          <p:nvPr/>
+        </p:nvSpPr>
+        <p:spPr>
+          <a:xfrm>
+            <a:off x="1143000" y="457200"/>
+            <a:ext cx="8229600" cy="310896"/>
           </a:xfrm>
           <a:prstGeom prst="rect">
             <a:avLst/>
@@ -13070,7 +13208,46 @@
               <a:buNone/>
             </a:pPr>
             <a:r>
-              <a:rPr lang="en-US" sz="4000" b="1" dirty="0">
+              <a:rPr lang="en-US" sz="1200" b="1" spc="200" kern="0" dirty="0">
+                <a:solidFill>
+                  <a:srgbClr val="22D3EE"/>
+                </a:solidFill>
+                <a:latin typeface="Microsoft JhengHei" pitchFamily="34" charset="0"/>
+                <a:ea typeface="Microsoft JhengHei" pitchFamily="34" charset="-122"/>
+                <a:cs typeface="Microsoft JhengHei" pitchFamily="34" charset="-120"/>
+              </a:rPr>
+              <a:t>TRUST &amp; CONTROL</a:t>
+            </a:r>
+            <a:endParaRPr lang="en-US" sz="1200" dirty="0"/>
+          </a:p>
+        </p:txBody>
+      </p:sp>
+      <p:sp>
+        <p:nvSpPr>
+          <p:cNvPr id="4" name="Text 2"/>
+          <p:cNvSpPr/>
+          <p:nvPr/>
+        </p:nvSpPr>
+        <p:spPr>
+          <a:xfrm>
+            <a:off x="640080" y="786384"/>
+            <a:ext cx="10972800" cy="640080"/>
+          </a:xfrm>
+          <a:prstGeom prst="rect">
+            <a:avLst/>
+          </a:prstGeom>
+          <a:noFill/>
+          <a:ln/>
+        </p:spPr>
+        <p:txBody>
+          <a:bodyPr wrap="square" rtlCol="0" anchor="ctr"/>
+          <a:lstStyle/>
+          <a:p>
+            <a:pPr indent="0" marL="0">
+              <a:buNone/>
+            </a:pPr>
+            <a:r>
+              <a:rPr lang="en-US" sz="3000" b="1" dirty="0">
                 <a:solidFill>
                   <a:srgbClr val="FFFFFF"/>
                 </a:solidFill>
@@ -13078,76 +13255,37 @@
                 <a:ea typeface="Microsoft JhengHei" pitchFamily="34" charset="-122"/>
                 <a:cs typeface="Microsoft JhengHei" pitchFamily="34" charset="-120"/>
               </a:rPr>
-              <a:t>現在就開始練習</a:t>
-            </a:r>
-            <a:endParaRPr lang="en-US" sz="4000" dirty="0"/>
-          </a:p>
-        </p:txBody>
-      </p:sp>
-      <p:sp>
-        <p:nvSpPr>
-          <p:cNvPr id="3" name="Text 1"/>
-          <p:cNvSpPr/>
-          <p:nvPr/>
-        </p:nvSpPr>
-        <p:spPr>
-          <a:xfrm>
-            <a:off x="640080" y="2377440"/>
-            <a:ext cx="10058400" cy="548640"/>
-          </a:xfrm>
-          <a:prstGeom prst="rect">
-            <a:avLst/>
-          </a:prstGeom>
-          <a:noFill/>
-          <a:ln/>
-        </p:spPr>
-        <p:txBody>
-          <a:bodyPr wrap="square" rtlCol="0" anchor="ctr"/>
-          <a:lstStyle/>
-          <a:p>
-            <a:pPr indent="0" marL="0">
-              <a:buNone/>
-            </a:pPr>
-            <a:r>
-              <a:rPr lang="en-US" sz="1500" dirty="0">
-                <a:solidFill>
-                  <a:srgbClr val="C7CAEC"/>
-                </a:solidFill>
-                <a:latin typeface="Microsoft JhengHei" pitchFamily="34" charset="0"/>
-                <a:ea typeface="Microsoft JhengHei" pitchFamily="34" charset="-122"/>
-                <a:cs typeface="Microsoft JhengHei" pitchFamily="34" charset="-120"/>
-              </a:rPr>
-              <a:t>開始前請確認：每位使用者一張 M365 Copilot 授權、管理員已啟用用量計費（Copilot Credits，未啟用則無法存取）、租戶位於 Anthropic 支援地區；可在 Web/桌面/行動/Outlook/Teams 使用（本機瀏覽器工作僅限網頁版＋Edge 150 以上，且預設停用需管理員開啟）。</a:t>
-            </a:r>
-            <a:endParaRPr lang="en-US" sz="1500" dirty="0"/>
-          </a:p>
-        </p:txBody>
-      </p:sp>
-      <p:sp>
-        <p:nvSpPr>
-          <p:cNvPr id="4" name="Shape 2"/>
-          <p:cNvSpPr/>
-          <p:nvPr/>
-        </p:nvSpPr>
-        <p:spPr>
-          <a:xfrm>
-            <a:off x="640080" y="3017520"/>
-            <a:ext cx="8686800" cy="868680"/>
+              <a:t>自動化，但你始終是決策者</a:t>
+            </a:r>
+            <a:endParaRPr lang="en-US" sz="3000" dirty="0"/>
+          </a:p>
+        </p:txBody>
+      </p:sp>
+      <p:sp>
+        <p:nvSpPr>
+          <p:cNvPr id="5" name="Shape 3"/>
+          <p:cNvSpPr/>
+          <p:nvPr/>
+        </p:nvSpPr>
+        <p:spPr>
+          <a:xfrm>
+            <a:off x="640080" y="1874520"/>
+            <a:ext cx="777240" cy="777240"/>
           </a:xfrm>
           <a:prstGeom prst="roundRect">
             <a:avLst>
-              <a:gd name="adj" fmla="val 12632"/>
+              <a:gd name="adj" fmla="val 18824"/>
             </a:avLst>
           </a:prstGeom>
           <a:solidFill>
             <a:srgbClr val="FFFFFF">
-              <a:alpha val="10000"/>
+              <a:alpha val="14000"/>
             </a:srgbClr>
           </a:solidFill>
           <a:ln w="12700">
             <a:solidFill>
-              <a:srgbClr val="FFFFFF">
-                <a:alpha val="35000"/>
+              <a:srgbClr val="22D3EE">
+                <a:alpha val="60000"/>
               </a:srgbClr>
             </a:solidFill>
             <a:prstDash val="solid"/>
@@ -13156,7 +13294,7 @@
       </p:sp>
       <p:pic>
         <p:nvPicPr>
-          <p:cNvPr id="5" name="Image 0" descr="preencoded.png">    </p:cNvPr>
+          <p:cNvPr id="6" name="Image 0" descr="preencoded.png">    </p:cNvPr>
           <p:cNvPicPr>
             <a:picLocks noChangeAspect="1"/>
           </p:cNvPicPr>
@@ -13170,8 +13308,8 @@
         </p:blipFill>
         <p:spPr>
           <a:xfrm>
-            <a:off x="914400" y="3291840"/>
-            <a:ext cx="329184" cy="329184"/>
+            <a:off x="804672" y="2039112"/>
+            <a:ext cx="448056" cy="448056"/>
           </a:xfrm>
           <a:prstGeom prst="rect">
             <a:avLst/>
@@ -13180,14 +13318,14 @@
       </p:pic>
       <p:sp>
         <p:nvSpPr>
-          <p:cNvPr id="6" name="Text 3"/>
-          <p:cNvSpPr/>
-          <p:nvPr/>
-        </p:nvSpPr>
-        <p:spPr>
-          <a:xfrm>
-            <a:off x="1417320" y="3127248"/>
-            <a:ext cx="7315200" cy="320040"/>
+          <p:cNvPr id="7" name="Text 4"/>
+          <p:cNvSpPr/>
+          <p:nvPr/>
+        </p:nvSpPr>
+        <p:spPr>
+          <a:xfrm>
+            <a:off x="1691640" y="1856232"/>
+            <a:ext cx="6858000" cy="347472"/>
           </a:xfrm>
           <a:prstGeom prst="rect">
             <a:avLst/>
@@ -13203,7 +13341,7 @@
               <a:buNone/>
             </a:pPr>
             <a:r>
-              <a:rPr lang="en-US" sz="1400" b="1" dirty="0">
+              <a:rPr lang="en-US" sz="1700" b="1" dirty="0">
                 <a:solidFill>
                   <a:srgbClr val="FFFFFF"/>
                 </a:solidFill>
@@ -13211,24 +13349,22 @@
                 <a:ea typeface="Microsoft JhengHei" pitchFamily="34" charset="-122"/>
                 <a:cs typeface="Microsoft JhengHei" pitchFamily="34" charset="-120"/>
               </a:rPr>
-              <a:t>Cowork 練習手冊</a:t>
-            </a:r>
-            <a:endParaRPr lang="en-US" sz="1400" dirty="0"/>
-          </a:p>
-        </p:txBody>
-      </p:sp>
-      <p:sp>
-        <p:nvSpPr>
-          <p:cNvPr id="7" name="Text 4">
-            <a:hlinkClick r:id="rId3" tooltip=""/>
-          </p:cNvPr>
-          <p:cNvSpPr/>
-          <p:nvPr/>
-        </p:nvSpPr>
-        <p:spPr>
-          <a:xfrm>
-            <a:off x="1417320" y="3419856"/>
-            <a:ext cx="7772400" cy="320040"/>
+              <a:t>行動前審核</a:t>
+            </a:r>
+            <a:endParaRPr lang="en-US" sz="1700" dirty="0"/>
+          </a:p>
+        </p:txBody>
+      </p:sp>
+      <p:sp>
+        <p:nvSpPr>
+          <p:cNvPr id="8" name="Text 5"/>
+          <p:cNvSpPr/>
+          <p:nvPr/>
+        </p:nvSpPr>
+        <p:spPr>
+          <a:xfrm>
+            <a:off x="1691640" y="2203704"/>
+            <a:ext cx="9966960" cy="658368"/>
           </a:xfrm>
           <a:prstGeom prst="rect">
             <a:avLst/>
@@ -13241,33 +13377,196 @@
           <a:lstStyle/>
           <a:p>
             <a:pPr indent="0" marL="0">
-              <a:buNone/>
-            </a:pPr>
-            <a:r>
-              <a:rPr lang="en-US" sz="1300" u="sng" dirty="0">
-                <a:solidFill>
-                  <a:srgbClr val="9FE9FF"/>
-                </a:solidFill>
-                <a:latin typeface="Microsoft JhengHei" pitchFamily="34" charset="0"/>
-                <a:ea typeface="Microsoft JhengHei" pitchFamily="34" charset="-122"/>
-                <a:cs typeface="Microsoft JhengHei" pitchFamily="34" charset="-120"/>
-                <a:hlinkClick r:id="rId3" invalidUrl="" action="" tgtFrame="" tooltip="" history="1" highlightClick="0" endSnd="0">
-                  <a:extLst>
-                    <a:ext uri="{A12FA001-AC4F-418D-AE19-62706E023703}">
-                      <ahyp:hlinkClr xmlns:ahyp="http://schemas.microsoft.com/office/drawing/2018/hyperlinkcolor" val="tx"/>
-                    </a:ext>
-                  </a:extLst>
-                </a:hlinkClick>
-              </a:rPr>
-              <a:t>andyhung11.github.io/Copilot-in-1mins/CoworkPlaybook/</a:t>
+              <a:lnSpc>
+                <a:spcPct val="118000"/>
+              </a:lnSpc>
+              <a:buNone/>
+            </a:pPr>
+            <a:r>
+              <a:rPr lang="en-US" sz="1300" dirty="0">
+                <a:solidFill>
+                  <a:srgbClr val="C7CAEC"/>
+                </a:solidFill>
+                <a:latin typeface="Microsoft JhengHei" pitchFamily="34" charset="0"/>
+                <a:ea typeface="Microsoft JhengHei" pitchFamily="34" charset="-122"/>
+                <a:cs typeface="Microsoft JhengHei" pitchFamily="34" charset="-120"/>
+              </a:rPr>
+              <a:t>中高風險動作會顯示 RISK-LEVEL；寄信、發 Teams、建立會議等動作先攤開可編輯預覽，核准後才送出。</a:t>
             </a:r>
             <a:endParaRPr lang="en-US" sz="1300" dirty="0"/>
           </a:p>
         </p:txBody>
+      </p:sp>
+      <p:sp>
+        <p:nvSpPr>
+          <p:cNvPr id="9" name="Shape 6"/>
+          <p:cNvSpPr/>
+          <p:nvPr/>
+        </p:nvSpPr>
+        <p:spPr>
+          <a:xfrm>
+            <a:off x="640080" y="3044952"/>
+            <a:ext cx="777240" cy="777240"/>
+          </a:xfrm>
+          <a:prstGeom prst="roundRect">
+            <a:avLst>
+              <a:gd name="adj" fmla="val 18824"/>
+            </a:avLst>
+          </a:prstGeom>
+          <a:solidFill>
+            <a:srgbClr val="FFFFFF">
+              <a:alpha val="14000"/>
+            </a:srgbClr>
+          </a:solidFill>
+          <a:ln w="12700">
+            <a:solidFill>
+              <a:srgbClr val="22D3EE">
+                <a:alpha val="60000"/>
+              </a:srgbClr>
+            </a:solidFill>
+            <a:prstDash val="solid"/>
+          </a:ln>
+        </p:spPr>
       </p:sp>
       <p:pic>
         <p:nvPicPr>
-          <p:cNvPr id="8" name="Image 1" descr="preencoded.png">    </p:cNvPr>
+          <p:cNvPr id="10" name="Image 1" descr="preencoded.png">    </p:cNvPr>
+          <p:cNvPicPr>
+            <a:picLocks noChangeAspect="1"/>
+          </p:cNvPicPr>
+          <p:nvPr/>
+        </p:nvPicPr>
+        <p:blipFill>
+          <a:blip r:embed="rId3"/>
+          <a:stretch>
+            <a:fillRect/>
+          </a:stretch>
+        </p:blipFill>
+        <p:spPr>
+          <a:xfrm>
+            <a:off x="804672" y="3209544"/>
+            <a:ext cx="448056" cy="448056"/>
+          </a:xfrm>
+          <a:prstGeom prst="rect">
+            <a:avLst/>
+          </a:prstGeom>
+        </p:spPr>
+      </p:pic>
+      <p:sp>
+        <p:nvSpPr>
+          <p:cNvPr id="11" name="Text 7"/>
+          <p:cNvSpPr/>
+          <p:nvPr/>
+        </p:nvSpPr>
+        <p:spPr>
+          <a:xfrm>
+            <a:off x="1691640" y="3026664"/>
+            <a:ext cx="6858000" cy="347472"/>
+          </a:xfrm>
+          <a:prstGeom prst="rect">
+            <a:avLst/>
+          </a:prstGeom>
+          <a:noFill/>
+          <a:ln/>
+        </p:spPr>
+        <p:txBody>
+          <a:bodyPr wrap="square" rtlCol="0" anchor="ctr"/>
+          <a:lstStyle/>
+          <a:p>
+            <a:pPr indent="0" marL="0">
+              <a:buNone/>
+            </a:pPr>
+            <a:r>
+              <a:rPr lang="en-US" sz="1700" b="1" dirty="0">
+                <a:solidFill>
+                  <a:srgbClr val="FFFFFF"/>
+                </a:solidFill>
+                <a:latin typeface="Microsoft JhengHei" pitchFamily="34" charset="0"/>
+                <a:ea typeface="Microsoft JhengHei" pitchFamily="34" charset="-122"/>
+                <a:cs typeface="Microsoft JhengHei" pitchFamily="34" charset="-120"/>
+              </a:rPr>
+              <a:t>控制範圍清楚</a:t>
+            </a:r>
+            <a:endParaRPr lang="en-US" sz="1700" dirty="0"/>
+          </a:p>
+        </p:txBody>
+      </p:sp>
+      <p:sp>
+        <p:nvSpPr>
+          <p:cNvPr id="12" name="Text 8"/>
+          <p:cNvSpPr/>
+          <p:nvPr/>
+        </p:nvSpPr>
+        <p:spPr>
+          <a:xfrm>
+            <a:off x="1691640" y="3374136"/>
+            <a:ext cx="9966960" cy="658368"/>
+          </a:xfrm>
+          <a:prstGeom prst="rect">
+            <a:avLst/>
+          </a:prstGeom>
+          <a:noFill/>
+          <a:ln/>
+        </p:spPr>
+        <p:txBody>
+          <a:bodyPr wrap="square" rtlCol="0" anchor="ctr"/>
+          <a:lstStyle/>
+          <a:p>
+            <a:pPr indent="0" marL="0">
+              <a:lnSpc>
+                <a:spcPct val="118000"/>
+              </a:lnSpc>
+              <a:buNone/>
+            </a:pPr>
+            <a:r>
+              <a:rPr lang="en-US" sz="1300" dirty="0">
+                <a:solidFill>
+                  <a:srgbClr val="C7CAEC"/>
+                </a:solidFill>
+                <a:latin typeface="Microsoft JhengHei" pitchFamily="34" charset="0"/>
+                <a:ea typeface="Microsoft JhengHei" pitchFamily="34" charset="-122"/>
+                <a:cs typeface="Microsoft JhengHei" pitchFamily="34" charset="-120"/>
+              </a:rPr>
+              <a:t>don’t ask again 可限定 per-recipient、per-domain 或 always；任務可軟／硬暫停、恢復或取消。</a:t>
+            </a:r>
+            <a:endParaRPr lang="en-US" sz="1300" dirty="0"/>
+          </a:p>
+        </p:txBody>
+      </p:sp>
+      <p:sp>
+        <p:nvSpPr>
+          <p:cNvPr id="13" name="Shape 9"/>
+          <p:cNvSpPr/>
+          <p:nvPr/>
+        </p:nvSpPr>
+        <p:spPr>
+          <a:xfrm>
+            <a:off x="640080" y="4215384"/>
+            <a:ext cx="777240" cy="777240"/>
+          </a:xfrm>
+          <a:prstGeom prst="roundRect">
+            <a:avLst>
+              <a:gd name="adj" fmla="val 18824"/>
+            </a:avLst>
+          </a:prstGeom>
+          <a:solidFill>
+            <a:srgbClr val="FFFFFF">
+              <a:alpha val="14000"/>
+            </a:srgbClr>
+          </a:solidFill>
+          <a:ln w="12700">
+            <a:solidFill>
+              <a:srgbClr val="22D3EE">
+                <a:alpha val="60000"/>
+              </a:srgbClr>
+            </a:solidFill>
+            <a:prstDash val="solid"/>
+          </a:ln>
+        </p:spPr>
+      </p:sp>
+      <p:pic>
+        <p:nvPicPr>
+          <p:cNvPr id="14" name="Image 2" descr="preencoded.png">    </p:cNvPr>
           <p:cNvPicPr>
             <a:picLocks noChangeAspect="1"/>
           </p:cNvPicPr>
@@ -13281,8 +13580,8 @@
         </p:blipFill>
         <p:spPr>
           <a:xfrm>
-            <a:off x="640080" y="4315968"/>
-            <a:ext cx="237744" cy="237744"/>
+            <a:off x="804672" y="4379976"/>
+            <a:ext cx="448056" cy="448056"/>
           </a:xfrm>
           <a:prstGeom prst="rect">
             <a:avLst/>
@@ -13291,14 +13590,14 @@
       </p:pic>
       <p:sp>
         <p:nvSpPr>
-          <p:cNvPr id="9" name="Text 5"/>
-          <p:cNvSpPr/>
-          <p:nvPr/>
-        </p:nvSpPr>
-        <p:spPr>
-          <a:xfrm>
-            <a:off x="1005840" y="4261104"/>
-            <a:ext cx="9144000" cy="365760"/>
+          <p:cNvPr id="15" name="Text 10"/>
+          <p:cNvSpPr/>
+          <p:nvPr/>
+        </p:nvSpPr>
+        <p:spPr>
+          <a:xfrm>
+            <a:off x="1691640" y="4197096"/>
+            <a:ext cx="6858000" cy="347472"/>
           </a:xfrm>
           <a:prstGeom prst="rect">
             <a:avLst/>
@@ -13314,23 +13613,96 @@
               <a:buNone/>
             </a:pPr>
             <a:r>
-              <a:rPr lang="en-US" sz="1400" dirty="0">
-                <a:solidFill>
-                  <a:srgbClr val="E3E5F7"/>
-                </a:solidFill>
-                <a:latin typeface="Microsoft JhengHei" pitchFamily="34" charset="0"/>
-                <a:ea typeface="Microsoft JhengHei" pitchFamily="34" charset="-122"/>
-                <a:cs typeface="Microsoft JhengHei" pitchFamily="34" charset="-120"/>
-              </a:rPr>
-              <a:t>挑一個最貼近你工作的情境開始</a:t>
-            </a:r>
-            <a:endParaRPr lang="en-US" sz="1400" dirty="0"/>
-          </a:p>
-        </p:txBody>
+              <a:rPr lang="en-US" sz="1700" b="1" dirty="0">
+                <a:solidFill>
+                  <a:srgbClr val="FFFFFF"/>
+                </a:solidFill>
+                <a:latin typeface="Microsoft JhengHei" pitchFamily="34" charset="0"/>
+                <a:ea typeface="Microsoft JhengHei" pitchFamily="34" charset="-122"/>
+                <a:cs typeface="Microsoft JhengHei" pitchFamily="34" charset="-120"/>
+              </a:rPr>
+              <a:t>自動化任務也有把關</a:t>
+            </a:r>
+            <a:endParaRPr lang="en-US" sz="1700" dirty="0"/>
+          </a:p>
+        </p:txBody>
+      </p:sp>
+      <p:sp>
+        <p:nvSpPr>
+          <p:cNvPr id="16" name="Text 11"/>
+          <p:cNvSpPr/>
+          <p:nvPr/>
+        </p:nvSpPr>
+        <p:spPr>
+          <a:xfrm>
+            <a:off x="1691640" y="4544568"/>
+            <a:ext cx="9966960" cy="658368"/>
+          </a:xfrm>
+          <a:prstGeom prst="rect">
+            <a:avLst/>
+          </a:prstGeom>
+          <a:noFill/>
+          <a:ln/>
+        </p:spPr>
+        <p:txBody>
+          <a:bodyPr wrap="square" rtlCol="0" anchor="ctr"/>
+          <a:lstStyle/>
+          <a:p>
+            <a:pPr indent="0" marL="0">
+              <a:lnSpc>
+                <a:spcPct val="118000"/>
+              </a:lnSpc>
+              <a:buNone/>
+            </a:pPr>
+            <a:r>
+              <a:rPr lang="en-US" sz="1300" dirty="0">
+                <a:solidFill>
+                  <a:srgbClr val="C7CAEC"/>
+                </a:solidFill>
+                <a:latin typeface="Microsoft JhengHei" pitchFamily="34" charset="0"/>
+                <a:ea typeface="Microsoft JhengHei" pitchFamily="34" charset="-122"/>
+                <a:cs typeface="Microsoft JhengHei" pitchFamily="34" charset="-120"/>
+              </a:rPr>
+              <a:t>排程提示與事件驅動任務有執行頻率限制與防迴圈保護；一律以建立者權限執行，且與其他 Cowork 活動一同記錄在統一稽核日誌，套用 Microsoft Purview 政策。</a:t>
+            </a:r>
+            <a:endParaRPr lang="en-US" sz="1300" dirty="0"/>
+          </a:p>
+        </p:txBody>
+      </p:sp>
+      <p:sp>
+        <p:nvSpPr>
+          <p:cNvPr id="17" name="Shape 12"/>
+          <p:cNvSpPr/>
+          <p:nvPr/>
+        </p:nvSpPr>
+        <p:spPr>
+          <a:xfrm>
+            <a:off x="640080" y="5385816"/>
+            <a:ext cx="777240" cy="777240"/>
+          </a:xfrm>
+          <a:prstGeom prst="roundRect">
+            <a:avLst>
+              <a:gd name="adj" fmla="val 18824"/>
+            </a:avLst>
+          </a:prstGeom>
+          <a:solidFill>
+            <a:srgbClr val="FFFFFF">
+              <a:alpha val="14000"/>
+            </a:srgbClr>
+          </a:solidFill>
+          <a:ln w="12700">
+            <a:solidFill>
+              <a:srgbClr val="22D3EE">
+                <a:alpha val="60000"/>
+              </a:srgbClr>
+            </a:solidFill>
+            <a:prstDash val="solid"/>
+          </a:ln>
+        </p:spPr>
       </p:sp>
       <p:pic>
         <p:nvPicPr>
-          <p:cNvPr id="10" name="Image 2" descr="preencoded.png">    </p:cNvPr>
+          <p:cNvPr id="18" name="Image 3" descr="preencoded.png">    </p:cNvPr>
           <p:cNvPicPr>
             <a:picLocks noChangeAspect="1"/>
           </p:cNvPicPr>
@@ -13344,8 +13716,8 @@
         </p:blipFill>
         <p:spPr>
           <a:xfrm>
-            <a:off x="640080" y="4791456"/>
-            <a:ext cx="237744" cy="237744"/>
+            <a:off x="804672" y="5550408"/>
+            <a:ext cx="448056" cy="448056"/>
           </a:xfrm>
           <a:prstGeom prst="rect">
             <a:avLst/>
@@ -13354,14 +13726,14 @@
       </p:pic>
       <p:sp>
         <p:nvSpPr>
-          <p:cNvPr id="11" name="Text 6"/>
-          <p:cNvSpPr/>
-          <p:nvPr/>
-        </p:nvSpPr>
-        <p:spPr>
-          <a:xfrm>
-            <a:off x="1005840" y="4736592"/>
-            <a:ext cx="9144000" cy="365760"/>
+          <p:cNvPr id="19" name="Text 13"/>
+          <p:cNvSpPr/>
+          <p:nvPr/>
+        </p:nvSpPr>
+        <p:spPr>
+          <a:xfrm>
+            <a:off x="1691640" y="5367528"/>
+            <a:ext cx="6858000" cy="347472"/>
           </a:xfrm>
           <a:prstGeom prst="rect">
             <a:avLst/>
@@ -13377,54 +13749,30 @@
               <a:buNone/>
             </a:pPr>
             <a:r>
-              <a:rPr lang="en-US" sz="1400" dirty="0">
-                <a:solidFill>
-                  <a:srgbClr val="E3E5F7"/>
-                </a:solidFill>
-                <a:latin typeface="Microsoft JhengHei" pitchFamily="34" charset="0"/>
-                <a:ea typeface="Microsoft JhengHei" pitchFamily="34" charset="-122"/>
-                <a:cs typeface="Microsoft JhengHei" pitchFamily="34" charset="-120"/>
-              </a:rPr>
-              <a:t>自訂技能放 OneDrive /Documents/Cowork/skills/ 的 SKILL.md（最多 50 個、每個 1MB）</a:t>
-            </a:r>
-            <a:endParaRPr lang="en-US" sz="1400" dirty="0"/>
-          </a:p>
-        </p:txBody>
-      </p:sp>
-      <p:pic>
-        <p:nvPicPr>
-          <p:cNvPr id="12" name="Image 3" descr="preencoded.png">    </p:cNvPr>
-          <p:cNvPicPr>
-            <a:picLocks noChangeAspect="1"/>
-          </p:cNvPicPr>
-          <p:nvPr/>
-        </p:nvPicPr>
-        <p:blipFill>
-          <a:blip r:embed="rId6"/>
-          <a:stretch>
-            <a:fillRect/>
-          </a:stretch>
-        </p:blipFill>
-        <p:spPr>
-          <a:xfrm>
-            <a:off x="640080" y="5266944"/>
-            <a:ext cx="237744" cy="237744"/>
-          </a:xfrm>
-          <a:prstGeom prst="rect">
-            <a:avLst/>
-          </a:prstGeom>
-        </p:spPr>
-      </p:pic>
-      <p:sp>
-        <p:nvSpPr>
-          <p:cNvPr id="13" name="Text 7"/>
-          <p:cNvSpPr/>
-          <p:nvPr/>
-        </p:nvSpPr>
-        <p:spPr>
-          <a:xfrm>
-            <a:off x="1005840" y="5212080"/>
-            <a:ext cx="9144000" cy="365760"/>
+              <a:rPr lang="en-US" sz="1700" b="1" dirty="0">
+                <a:solidFill>
+                  <a:srgbClr val="FFFFFF"/>
+                </a:solidFill>
+                <a:latin typeface="Microsoft JhengHei" pitchFamily="34" charset="0"/>
+                <a:ea typeface="Microsoft JhengHei" pitchFamily="34" charset="-122"/>
+                <a:cs typeface="Microsoft JhengHei" pitchFamily="34" charset="-120"/>
+              </a:rPr>
+              <a:t>限制也要知道</a:t>
+            </a:r>
+            <a:endParaRPr lang="en-US" sz="1700" dirty="0"/>
+          </a:p>
+        </p:txBody>
+      </p:sp>
+      <p:sp>
+        <p:nvSpPr>
+          <p:cNvPr id="20" name="Text 14"/>
+          <p:cNvSpPr/>
+          <p:nvPr/>
+        </p:nvSpPr>
+        <p:spPr>
+          <a:xfrm>
+            <a:off x="1691640" y="5715000"/>
+            <a:ext cx="9966960" cy="658368"/>
           </a:xfrm>
           <a:prstGeom prst="rect">
             <a:avLst/>
@@ -13437,83 +13785,101 @@
           <a:lstStyle/>
           <a:p>
             <a:pPr indent="0" marL="0">
-              <a:buNone/>
-            </a:pPr>
-            <a:r>
-              <a:rPr lang="en-US" sz="1400" dirty="0">
-                <a:solidFill>
-                  <a:srgbClr val="E3E5F7"/>
-                </a:solidFill>
-                <a:latin typeface="Microsoft JhengHei" pitchFamily="34" charset="0"/>
-                <a:ea typeface="Microsoft JhengHei" pitchFamily="34" charset="-122"/>
-                <a:cs typeface="Microsoft JhengHei" pitchFamily="34" charset="-120"/>
-              </a:rPr>
-              <a:t>模型選擇器：Auto（預設）、GPT 5.5 Frontier、GPT 5.6 Sol／Terra、Opus 5、Sonnet 5、Fable 5（預覽・預設關閉）</a:t>
-            </a:r>
-            <a:endParaRPr lang="en-US" sz="1400" dirty="0"/>
-          </a:p>
-        </p:txBody>
-      </p:sp>
-      <p:pic>
-        <p:nvPicPr>
-          <p:cNvPr id="14" name="Image 4" descr="preencoded.png">    </p:cNvPr>
-          <p:cNvPicPr>
-            <a:picLocks noChangeAspect="1"/>
-          </p:cNvPicPr>
-          <p:nvPr/>
-        </p:nvPicPr>
-        <p:blipFill>
-          <a:blip r:embed="rId7"/>
-          <a:stretch>
-            <a:fillRect/>
-          </a:stretch>
-        </p:blipFill>
-        <p:spPr>
-          <a:xfrm>
-            <a:off x="640080" y="5742432"/>
-            <a:ext cx="237744" cy="237744"/>
-          </a:xfrm>
-          <a:prstGeom prst="rect">
-            <a:avLst/>
-          </a:prstGeom>
-        </p:spPr>
-      </p:pic>
-      <p:sp>
-        <p:nvSpPr>
-          <p:cNvPr id="15" name="Text 8"/>
-          <p:cNvSpPr/>
-          <p:nvPr/>
-        </p:nvSpPr>
-        <p:spPr>
-          <a:xfrm>
-            <a:off x="1005840" y="5687568"/>
-            <a:ext cx="9144000" cy="365760"/>
-          </a:xfrm>
-          <a:prstGeom prst="rect">
-            <a:avLst/>
-          </a:prstGeom>
-          <a:noFill/>
-          <a:ln/>
-        </p:spPr>
-        <p:txBody>
-          <a:bodyPr wrap="square" rtlCol="0" anchor="ctr"/>
-          <a:lstStyle/>
-          <a:p>
-            <a:pPr indent="0" marL="0">
-              <a:buNone/>
-            </a:pPr>
-            <a:r>
-              <a:rPr lang="en-US" sz="1400" dirty="0">
-                <a:solidFill>
-                  <a:srgbClr val="E3E5F7"/>
-                </a:solidFill>
-                <a:latin typeface="Microsoft JhengHei" pitchFamily="34" charset="0"/>
-                <a:ea typeface="Microsoft JhengHei" pitchFamily="34" charset="-122"/>
-                <a:cs typeface="Microsoft JhengHei" pitchFamily="34" charset="-120"/>
-              </a:rPr>
-              <a:t>想要自動觸發？到「Automations」頁設定排程提示（上限 5 個）或事件觸發任務（收信／被 @提及）</a:t>
-            </a:r>
-            <a:endParaRPr lang="en-US" sz="1400" dirty="0"/>
+              <a:lnSpc>
+                <a:spcPct val="118000"/>
+              </a:lnSpc>
+              <a:buNone/>
+            </a:pPr>
+            <a:r>
+              <a:rPr lang="en-US" sz="1300" dirty="0">
+                <a:solidFill>
+                  <a:srgbClr val="C7CAEC"/>
+                </a:solidFill>
+                <a:latin typeface="Microsoft JhengHei" pitchFamily="34" charset="0"/>
+                <a:ea typeface="Microsoft JhengHei" pitchFamily="34" charset="-122"/>
+                <a:cs typeface="Microsoft JhengHei" pitchFamily="34" charset="-120"/>
+              </a:rPr>
+              <a:t>不能存取本機檔案、刪除 OneDrive/SharePoint 檔案或讀取加密檔；附件 &lt;200MB；自訂技能與第三方 plugin 未經 Microsoft 驗證，需自行審閱。官方明列不適用於「免人工審查即需保證正確」的用途。</a:t>
+            </a:r>
+            <a:endParaRPr lang="en-US" sz="1300" dirty="0"/>
+          </a:p>
+        </p:txBody>
+      </p:sp>
+      <p:sp>
+        <p:nvSpPr>
+          <p:cNvPr id="21" name="Text 15"/>
+          <p:cNvSpPr/>
+          <p:nvPr/>
+        </p:nvSpPr>
+        <p:spPr>
+          <a:xfrm>
+            <a:off x="640080" y="6473952"/>
+            <a:ext cx="5486400" cy="274320"/>
+          </a:xfrm>
+          <a:prstGeom prst="rect">
+            <a:avLst/>
+          </a:prstGeom>
+          <a:noFill/>
+          <a:ln/>
+        </p:spPr>
+        <p:txBody>
+          <a:bodyPr wrap="square" rtlCol="0" anchor="ctr"/>
+          <a:lstStyle/>
+          <a:p>
+            <a:pPr algn="l" indent="0" marL="0">
+              <a:buNone/>
+            </a:pPr>
+            <a:r>
+              <a:rPr lang="en-US" sz="900" dirty="0">
+                <a:solidFill>
+                  <a:srgbClr val="8A8FB5"/>
+                </a:solidFill>
+                <a:latin typeface="Microsoft JhengHei" pitchFamily="34" charset="0"/>
+                <a:ea typeface="Microsoft JhengHei" pitchFamily="34" charset="-122"/>
+                <a:cs typeface="Microsoft JhengHei" pitchFamily="34" charset="-120"/>
+              </a:rPr>
+              <a:t>Microsoft 365 Copilot Cowork</a:t>
+            </a:r>
+            <a:endParaRPr lang="en-US" sz="900" dirty="0"/>
+          </a:p>
+        </p:txBody>
+      </p:sp>
+      <p:sp>
+        <p:nvSpPr>
+          <p:cNvPr id="22" name="Text 16"/>
+          <p:cNvSpPr/>
+          <p:nvPr/>
+        </p:nvSpPr>
+        <p:spPr>
+          <a:xfrm>
+            <a:off x="11002975" y="6473952"/>
+            <a:ext cx="548640" cy="274320"/>
+          </a:xfrm>
+          <a:prstGeom prst="rect">
+            <a:avLst/>
+          </a:prstGeom>
+          <a:noFill/>
+          <a:ln/>
+        </p:spPr>
+        <p:txBody>
+          <a:bodyPr wrap="square" rtlCol="0" anchor="ctr"/>
+          <a:lstStyle/>
+          <a:p>
+            <a:pPr algn="r" indent="0" marL="0">
+              <a:buNone/>
+            </a:pPr>
+            <a:r>
+              <a:rPr lang="en-US" sz="900" dirty="0">
+                <a:solidFill>
+                  <a:srgbClr val="8A8FB5"/>
+                </a:solidFill>
+                <a:latin typeface="Microsoft JhengHei" pitchFamily="34" charset="0"/>
+                <a:ea typeface="Microsoft JhengHei" pitchFamily="34" charset="-122"/>
+                <a:cs typeface="Microsoft JhengHei" pitchFamily="34" charset="-120"/>
+              </a:rPr>
+              <a:t>19</a:t>
+            </a:r>
+            <a:endParaRPr lang="en-US" sz="900" dirty="0"/>
           </a:p>
         </p:txBody>
       </p:sp>
@@ -13564,6 +13930,517 @@
         </p:nvSpPr>
         <p:spPr>
           <a:xfrm>
+            <a:off x="640080" y="1371600"/>
+            <a:ext cx="10058400" cy="822960"/>
+          </a:xfrm>
+          <a:prstGeom prst="rect">
+            <a:avLst/>
+          </a:prstGeom>
+          <a:noFill/>
+          <a:ln/>
+        </p:spPr>
+        <p:txBody>
+          <a:bodyPr wrap="square" rtlCol="0" anchor="ctr"/>
+          <a:lstStyle/>
+          <a:p>
+            <a:pPr indent="0" marL="0">
+              <a:buNone/>
+            </a:pPr>
+            <a:r>
+              <a:rPr lang="en-US" sz="4000" b="1" dirty="0">
+                <a:solidFill>
+                  <a:srgbClr val="FFFFFF"/>
+                </a:solidFill>
+                <a:latin typeface="Microsoft JhengHei" pitchFamily="34" charset="0"/>
+                <a:ea typeface="Microsoft JhengHei" pitchFamily="34" charset="-122"/>
+                <a:cs typeface="Microsoft JhengHei" pitchFamily="34" charset="-120"/>
+              </a:rPr>
+              <a:t>現在就開始練習</a:t>
+            </a:r>
+            <a:endParaRPr lang="en-US" sz="4000" dirty="0"/>
+          </a:p>
+        </p:txBody>
+      </p:sp>
+      <p:sp>
+        <p:nvSpPr>
+          <p:cNvPr id="3" name="Text 1"/>
+          <p:cNvSpPr/>
+          <p:nvPr/>
+        </p:nvSpPr>
+        <p:spPr>
+          <a:xfrm>
+            <a:off x="640080" y="2377440"/>
+            <a:ext cx="10058400" cy="548640"/>
+          </a:xfrm>
+          <a:prstGeom prst="rect">
+            <a:avLst/>
+          </a:prstGeom>
+          <a:noFill/>
+          <a:ln/>
+        </p:spPr>
+        <p:txBody>
+          <a:bodyPr wrap="square" rtlCol="0" anchor="ctr"/>
+          <a:lstStyle/>
+          <a:p>
+            <a:pPr indent="0" marL="0">
+              <a:buNone/>
+            </a:pPr>
+            <a:r>
+              <a:rPr lang="en-US" sz="1500" dirty="0">
+                <a:solidFill>
+                  <a:srgbClr val="C7CAEC"/>
+                </a:solidFill>
+                <a:latin typeface="Microsoft JhengHei" pitchFamily="34" charset="0"/>
+                <a:ea typeface="Microsoft JhengHei" pitchFamily="34" charset="-122"/>
+                <a:cs typeface="Microsoft JhengHei" pitchFamily="34" charset="-120"/>
+              </a:rPr>
+              <a:t>開始前請確認：每位使用者一張 M365 Copilot 授權、管理員已啟用用量計費（Copilot Credits，未啟用則無法存取）、租戶位於 Anthropic 支援地區；可在 Web/桌面/行動/Outlook/Teams 使用（本機瀏覽器工作僅限網頁版＋Edge 150 以上，且預設停用需管理員開啟）。</a:t>
+            </a:r>
+            <a:endParaRPr lang="en-US" sz="1500" dirty="0"/>
+          </a:p>
+        </p:txBody>
+      </p:sp>
+      <p:sp>
+        <p:nvSpPr>
+          <p:cNvPr id="4" name="Shape 2"/>
+          <p:cNvSpPr/>
+          <p:nvPr/>
+        </p:nvSpPr>
+        <p:spPr>
+          <a:xfrm>
+            <a:off x="640080" y="3017520"/>
+            <a:ext cx="8686800" cy="868680"/>
+          </a:xfrm>
+          <a:prstGeom prst="roundRect">
+            <a:avLst>
+              <a:gd name="adj" fmla="val 12632"/>
+            </a:avLst>
+          </a:prstGeom>
+          <a:solidFill>
+            <a:srgbClr val="FFFFFF">
+              <a:alpha val="10000"/>
+            </a:srgbClr>
+          </a:solidFill>
+          <a:ln w="12700">
+            <a:solidFill>
+              <a:srgbClr val="FFFFFF">
+                <a:alpha val="35000"/>
+              </a:srgbClr>
+            </a:solidFill>
+            <a:prstDash val="solid"/>
+          </a:ln>
+        </p:spPr>
+      </p:sp>
+      <p:pic>
+        <p:nvPicPr>
+          <p:cNvPr id="5" name="Image 0" descr="preencoded.png">    </p:cNvPr>
+          <p:cNvPicPr>
+            <a:picLocks noChangeAspect="1"/>
+          </p:cNvPicPr>
+          <p:nvPr/>
+        </p:nvPicPr>
+        <p:blipFill>
+          <a:blip r:embed="rId2"/>
+          <a:stretch>
+            <a:fillRect/>
+          </a:stretch>
+        </p:blipFill>
+        <p:spPr>
+          <a:xfrm>
+            <a:off x="914400" y="3291840"/>
+            <a:ext cx="329184" cy="329184"/>
+          </a:xfrm>
+          <a:prstGeom prst="rect">
+            <a:avLst/>
+          </a:prstGeom>
+        </p:spPr>
+      </p:pic>
+      <p:sp>
+        <p:nvSpPr>
+          <p:cNvPr id="6" name="Text 3"/>
+          <p:cNvSpPr/>
+          <p:nvPr/>
+        </p:nvSpPr>
+        <p:spPr>
+          <a:xfrm>
+            <a:off x="1417320" y="3127248"/>
+            <a:ext cx="7315200" cy="320040"/>
+          </a:xfrm>
+          <a:prstGeom prst="rect">
+            <a:avLst/>
+          </a:prstGeom>
+          <a:noFill/>
+          <a:ln/>
+        </p:spPr>
+        <p:txBody>
+          <a:bodyPr wrap="square" rtlCol="0" anchor="ctr"/>
+          <a:lstStyle/>
+          <a:p>
+            <a:pPr indent="0" marL="0">
+              <a:buNone/>
+            </a:pPr>
+            <a:r>
+              <a:rPr lang="en-US" sz="1400" b="1" dirty="0">
+                <a:solidFill>
+                  <a:srgbClr val="FFFFFF"/>
+                </a:solidFill>
+                <a:latin typeface="Microsoft JhengHei" pitchFamily="34" charset="0"/>
+                <a:ea typeface="Microsoft JhengHei" pitchFamily="34" charset="-122"/>
+                <a:cs typeface="Microsoft JhengHei" pitchFamily="34" charset="-120"/>
+              </a:rPr>
+              <a:t>Cowork 練習手冊</a:t>
+            </a:r>
+            <a:endParaRPr lang="en-US" sz="1400" dirty="0"/>
+          </a:p>
+        </p:txBody>
+      </p:sp>
+      <p:sp>
+        <p:nvSpPr>
+          <p:cNvPr id="7" name="Text 4">
+            <a:hlinkClick r:id="rId3" tooltip=""/>
+          </p:cNvPr>
+          <p:cNvSpPr/>
+          <p:nvPr/>
+        </p:nvSpPr>
+        <p:spPr>
+          <a:xfrm>
+            <a:off x="1417320" y="3419856"/>
+            <a:ext cx="7772400" cy="320040"/>
+          </a:xfrm>
+          <a:prstGeom prst="rect">
+            <a:avLst/>
+          </a:prstGeom>
+          <a:noFill/>
+          <a:ln/>
+        </p:spPr>
+        <p:txBody>
+          <a:bodyPr wrap="square" rtlCol="0" anchor="ctr"/>
+          <a:lstStyle/>
+          <a:p>
+            <a:pPr indent="0" marL="0">
+              <a:buNone/>
+            </a:pPr>
+            <a:r>
+              <a:rPr lang="en-US" sz="1300" u="sng" dirty="0">
+                <a:solidFill>
+                  <a:srgbClr val="9FE9FF"/>
+                </a:solidFill>
+                <a:latin typeface="Microsoft JhengHei" pitchFamily="34" charset="0"/>
+                <a:ea typeface="Microsoft JhengHei" pitchFamily="34" charset="-122"/>
+                <a:cs typeface="Microsoft JhengHei" pitchFamily="34" charset="-120"/>
+                <a:hlinkClick r:id="rId3" invalidUrl="" action="" tgtFrame="" tooltip="" history="1" highlightClick="0" endSnd="0">
+                  <a:extLst>
+                    <a:ext uri="{A12FA001-AC4F-418D-AE19-62706E023703}">
+                      <ahyp:hlinkClr xmlns:ahyp="http://schemas.microsoft.com/office/drawing/2018/hyperlinkcolor" val="tx"/>
+                    </a:ext>
+                  </a:extLst>
+                </a:hlinkClick>
+              </a:rPr>
+              <a:t>andyhung11.github.io/Copilot-in-1mins/CoworkPlaybook/</a:t>
+            </a:r>
+            <a:endParaRPr lang="en-US" sz="1300" dirty="0"/>
+          </a:p>
+        </p:txBody>
+      </p:sp>
+      <p:pic>
+        <p:nvPicPr>
+          <p:cNvPr id="8" name="Image 1" descr="preencoded.png">    </p:cNvPr>
+          <p:cNvPicPr>
+            <a:picLocks noChangeAspect="1"/>
+          </p:cNvPicPr>
+          <p:nvPr/>
+        </p:nvPicPr>
+        <p:blipFill>
+          <a:blip r:embed="rId4"/>
+          <a:stretch>
+            <a:fillRect/>
+          </a:stretch>
+        </p:blipFill>
+        <p:spPr>
+          <a:xfrm>
+            <a:off x="640080" y="4315968"/>
+            <a:ext cx="237744" cy="237744"/>
+          </a:xfrm>
+          <a:prstGeom prst="rect">
+            <a:avLst/>
+          </a:prstGeom>
+        </p:spPr>
+      </p:pic>
+      <p:sp>
+        <p:nvSpPr>
+          <p:cNvPr id="9" name="Text 5"/>
+          <p:cNvSpPr/>
+          <p:nvPr/>
+        </p:nvSpPr>
+        <p:spPr>
+          <a:xfrm>
+            <a:off x="1005840" y="4261104"/>
+            <a:ext cx="9144000" cy="365760"/>
+          </a:xfrm>
+          <a:prstGeom prst="rect">
+            <a:avLst/>
+          </a:prstGeom>
+          <a:noFill/>
+          <a:ln/>
+        </p:spPr>
+        <p:txBody>
+          <a:bodyPr wrap="square" rtlCol="0" anchor="ctr"/>
+          <a:lstStyle/>
+          <a:p>
+            <a:pPr indent="0" marL="0">
+              <a:buNone/>
+            </a:pPr>
+            <a:r>
+              <a:rPr lang="en-US" sz="1400" dirty="0">
+                <a:solidFill>
+                  <a:srgbClr val="E3E5F7"/>
+                </a:solidFill>
+                <a:latin typeface="Microsoft JhengHei" pitchFamily="34" charset="0"/>
+                <a:ea typeface="Microsoft JhengHei" pitchFamily="34" charset="-122"/>
+                <a:cs typeface="Microsoft JhengHei" pitchFamily="34" charset="-120"/>
+              </a:rPr>
+              <a:t>挑一個最貼近你工作的情境開始</a:t>
+            </a:r>
+            <a:endParaRPr lang="en-US" sz="1400" dirty="0"/>
+          </a:p>
+        </p:txBody>
+      </p:sp>
+      <p:pic>
+        <p:nvPicPr>
+          <p:cNvPr id="10" name="Image 2" descr="preencoded.png">    </p:cNvPr>
+          <p:cNvPicPr>
+            <a:picLocks noChangeAspect="1"/>
+          </p:cNvPicPr>
+          <p:nvPr/>
+        </p:nvPicPr>
+        <p:blipFill>
+          <a:blip r:embed="rId5"/>
+          <a:stretch>
+            <a:fillRect/>
+          </a:stretch>
+        </p:blipFill>
+        <p:spPr>
+          <a:xfrm>
+            <a:off x="640080" y="4791456"/>
+            <a:ext cx="237744" cy="237744"/>
+          </a:xfrm>
+          <a:prstGeom prst="rect">
+            <a:avLst/>
+          </a:prstGeom>
+        </p:spPr>
+      </p:pic>
+      <p:sp>
+        <p:nvSpPr>
+          <p:cNvPr id="11" name="Text 6"/>
+          <p:cNvSpPr/>
+          <p:nvPr/>
+        </p:nvSpPr>
+        <p:spPr>
+          <a:xfrm>
+            <a:off x="1005840" y="4736592"/>
+            <a:ext cx="9144000" cy="365760"/>
+          </a:xfrm>
+          <a:prstGeom prst="rect">
+            <a:avLst/>
+          </a:prstGeom>
+          <a:noFill/>
+          <a:ln/>
+        </p:spPr>
+        <p:txBody>
+          <a:bodyPr wrap="square" rtlCol="0" anchor="ctr"/>
+          <a:lstStyle/>
+          <a:p>
+            <a:pPr indent="0" marL="0">
+              <a:buNone/>
+            </a:pPr>
+            <a:r>
+              <a:rPr lang="en-US" sz="1400" dirty="0">
+                <a:solidFill>
+                  <a:srgbClr val="E3E5F7"/>
+                </a:solidFill>
+                <a:latin typeface="Microsoft JhengHei" pitchFamily="34" charset="0"/>
+                <a:ea typeface="Microsoft JhengHei" pitchFamily="34" charset="-122"/>
+                <a:cs typeface="Microsoft JhengHei" pitchFamily="34" charset="-120"/>
+              </a:rPr>
+              <a:t>自訂技能放 OneDrive /Documents/Cowork/skills/ 的 SKILL.md（最多 50 個、每個 1MB）</a:t>
+            </a:r>
+            <a:endParaRPr lang="en-US" sz="1400" dirty="0"/>
+          </a:p>
+        </p:txBody>
+      </p:sp>
+      <p:pic>
+        <p:nvPicPr>
+          <p:cNvPr id="12" name="Image 3" descr="preencoded.png">    </p:cNvPr>
+          <p:cNvPicPr>
+            <a:picLocks noChangeAspect="1"/>
+          </p:cNvPicPr>
+          <p:nvPr/>
+        </p:nvPicPr>
+        <p:blipFill>
+          <a:blip r:embed="rId6"/>
+          <a:stretch>
+            <a:fillRect/>
+          </a:stretch>
+        </p:blipFill>
+        <p:spPr>
+          <a:xfrm>
+            <a:off x="640080" y="5266944"/>
+            <a:ext cx="237744" cy="237744"/>
+          </a:xfrm>
+          <a:prstGeom prst="rect">
+            <a:avLst/>
+          </a:prstGeom>
+        </p:spPr>
+      </p:pic>
+      <p:sp>
+        <p:nvSpPr>
+          <p:cNvPr id="13" name="Text 7"/>
+          <p:cNvSpPr/>
+          <p:nvPr/>
+        </p:nvSpPr>
+        <p:spPr>
+          <a:xfrm>
+            <a:off x="1005840" y="5212080"/>
+            <a:ext cx="9144000" cy="365760"/>
+          </a:xfrm>
+          <a:prstGeom prst="rect">
+            <a:avLst/>
+          </a:prstGeom>
+          <a:noFill/>
+          <a:ln/>
+        </p:spPr>
+        <p:txBody>
+          <a:bodyPr wrap="square" rtlCol="0" anchor="ctr"/>
+          <a:lstStyle/>
+          <a:p>
+            <a:pPr indent="0" marL="0">
+              <a:buNone/>
+            </a:pPr>
+            <a:r>
+              <a:rPr lang="en-US" sz="1400" dirty="0">
+                <a:solidFill>
+                  <a:srgbClr val="E3E5F7"/>
+                </a:solidFill>
+                <a:latin typeface="Microsoft JhengHei" pitchFamily="34" charset="0"/>
+                <a:ea typeface="Microsoft JhengHei" pitchFamily="34" charset="-122"/>
+                <a:cs typeface="Microsoft JhengHei" pitchFamily="34" charset="-120"/>
+              </a:rPr>
+              <a:t>模型選擇器：Auto（預設）、GPT 5.5 Frontier、GPT 5.6 Sol／Terra、Opus 5、Sonnet 5、Fable 5（預覽・預設關閉）</a:t>
+            </a:r>
+            <a:endParaRPr lang="en-US" sz="1400" dirty="0"/>
+          </a:p>
+        </p:txBody>
+      </p:sp>
+      <p:pic>
+        <p:nvPicPr>
+          <p:cNvPr id="14" name="Image 4" descr="preencoded.png">    </p:cNvPr>
+          <p:cNvPicPr>
+            <a:picLocks noChangeAspect="1"/>
+          </p:cNvPicPr>
+          <p:nvPr/>
+        </p:nvPicPr>
+        <p:blipFill>
+          <a:blip r:embed="rId7"/>
+          <a:stretch>
+            <a:fillRect/>
+          </a:stretch>
+        </p:blipFill>
+        <p:spPr>
+          <a:xfrm>
+            <a:off x="640080" y="5742432"/>
+            <a:ext cx="237744" cy="237744"/>
+          </a:xfrm>
+          <a:prstGeom prst="rect">
+            <a:avLst/>
+          </a:prstGeom>
+        </p:spPr>
+      </p:pic>
+      <p:sp>
+        <p:nvSpPr>
+          <p:cNvPr id="15" name="Text 8"/>
+          <p:cNvSpPr/>
+          <p:nvPr/>
+        </p:nvSpPr>
+        <p:spPr>
+          <a:xfrm>
+            <a:off x="1005840" y="5687568"/>
+            <a:ext cx="9144000" cy="365760"/>
+          </a:xfrm>
+          <a:prstGeom prst="rect">
+            <a:avLst/>
+          </a:prstGeom>
+          <a:noFill/>
+          <a:ln/>
+        </p:spPr>
+        <p:txBody>
+          <a:bodyPr wrap="square" rtlCol="0" anchor="ctr"/>
+          <a:lstStyle/>
+          <a:p>
+            <a:pPr indent="0" marL="0">
+              <a:buNone/>
+            </a:pPr>
+            <a:r>
+              <a:rPr lang="en-US" sz="1400" dirty="0">
+                <a:solidFill>
+                  <a:srgbClr val="E3E5F7"/>
+                </a:solidFill>
+                <a:latin typeface="Microsoft JhengHei" pitchFamily="34" charset="0"/>
+                <a:ea typeface="Microsoft JhengHei" pitchFamily="34" charset="-122"/>
+                <a:cs typeface="Microsoft JhengHei" pitchFamily="34" charset="-120"/>
+              </a:rPr>
+              <a:t>想要自動觸發？到「Automations」頁設定排程提示（上限 5 個）或事件觸發任務（收信／被 @提及）</a:t>
+            </a:r>
+            <a:endParaRPr lang="en-US" sz="1400" dirty="0"/>
+          </a:p>
+        </p:txBody>
+      </p:sp>
+    </p:spTree>
+  </p:cSld>
+  <p:clrMapOvr>
+    <a:masterClrMapping/>
+  </p:clrMapOvr>
+</p:sld>
+</file>
+
+<file path=ppt/slides/slide22.xml><?xml version="1.0" encoding="utf-8"?>
+<p:sld xmlns:a="http://schemas.openxmlformats.org/drawingml/2006/main" xmlns:r="http://schemas.openxmlformats.org/officeDocument/2006/relationships" xmlns:p="http://schemas.openxmlformats.org/presentationml/2006/main">
+  <p:cSld name="Slide 22">
+    <p:bg>
+      <p:bgPr>
+        <a:blipFill dpi="0" rotWithShape="1">
+          <a:blip r:embed="rId1">
+            <a:lum/>
+          </a:blip>
+          <a:srcRect/>
+          <a:stretch>
+            <a:fillRect/>
+          </a:stretch>
+        </a:blipFill>
+        <a:effectLst/>
+      </p:bgPr>
+    </p:bg>
+    <p:spTree>
+      <p:nvGrpSpPr>
+        <p:cNvPr id="1" name=""/>
+        <p:cNvGrpSpPr/>
+        <p:nvPr/>
+      </p:nvGrpSpPr>
+      <p:grpSpPr>
+        <a:xfrm>
+          <a:off x="0" y="0"/>
+          <a:ext cx="0" cy="0"/>
+          <a:chOff x="0" y="0"/>
+          <a:chExt cx="0" cy="0"/>
+        </a:xfrm>
+      </p:grpSpPr>
+      <p:sp>
+        <p:nvSpPr>
+          <p:cNvPr id="2" name="Text 0"/>
+          <p:cNvSpPr/>
+          <p:nvPr/>
+        </p:nvSpPr>
+        <p:spPr>
+          <a:xfrm>
             <a:off x="640080" y="2377440"/>
             <a:ext cx="10058400" cy="1097280"/>
           </a:xfrm>
@@ -18490,6 +19367,1516 @@
                 <a:ea typeface="Microsoft JhengHei" pitchFamily="34" charset="-122"/>
                 <a:cs typeface="Microsoft JhengHei" pitchFamily="34" charset="-120"/>
               </a:rPr>
+              <a:t>BEFORE YOU START</a:t>
+            </a:r>
+            <a:endParaRPr lang="en-US" sz="1200" dirty="0"/>
+          </a:p>
+        </p:txBody>
+      </p:sp>
+      <p:sp>
+        <p:nvSpPr>
+          <p:cNvPr id="4" name="Text 2"/>
+          <p:cNvSpPr/>
+          <p:nvPr/>
+        </p:nvSpPr>
+        <p:spPr>
+          <a:xfrm>
+            <a:off x="640080" y="786384"/>
+            <a:ext cx="10972800" cy="640080"/>
+          </a:xfrm>
+          <a:prstGeom prst="rect">
+            <a:avLst/>
+          </a:prstGeom>
+          <a:noFill/>
+          <a:ln/>
+        </p:spPr>
+        <p:txBody>
+          <a:bodyPr wrap="square" rtlCol="0" anchor="ctr"/>
+          <a:lstStyle/>
+          <a:p>
+            <a:pPr indent="0" marL="0">
+              <a:buNone/>
+            </a:pPr>
+            <a:r>
+              <a:rPr lang="en-US" sz="3000" b="1" dirty="0">
+                <a:solidFill>
+                  <a:srgbClr val="1E2235"/>
+                </a:solidFill>
+                <a:latin typeface="Microsoft JhengHei" pitchFamily="34" charset="0"/>
+                <a:ea typeface="Microsoft JhengHei" pitchFamily="34" charset="-122"/>
+                <a:cs typeface="Microsoft JhengHei" pitchFamily="34" charset="-120"/>
+              </a:rPr>
+              <a:t>練習環境準備</a:t>
+            </a:r>
+            <a:endParaRPr lang="en-US" sz="3000" dirty="0"/>
+          </a:p>
+        </p:txBody>
+      </p:sp>
+      <p:sp>
+        <p:nvSpPr>
+          <p:cNvPr id="5" name="Text 3"/>
+          <p:cNvSpPr/>
+          <p:nvPr/>
+        </p:nvSpPr>
+        <p:spPr>
+          <a:xfrm>
+            <a:off x="640080" y="1481328"/>
+            <a:ext cx="10972800" cy="329184"/>
+          </a:xfrm>
+          <a:prstGeom prst="rect">
+            <a:avLst/>
+          </a:prstGeom>
+          <a:noFill/>
+          <a:ln/>
+        </p:spPr>
+        <p:txBody>
+          <a:bodyPr wrap="square" rtlCol="0" anchor="ctr"/>
+          <a:lstStyle/>
+          <a:p>
+            <a:pPr indent="0" marL="0">
+              <a:buNone/>
+            </a:pPr>
+            <a:r>
+              <a:rPr lang="en-US" sz="1300" dirty="0">
+                <a:solidFill>
+                  <a:srgbClr val="5B6079"/>
+                </a:solidFill>
+                <a:latin typeface="Microsoft JhengHei" pitchFamily="34" charset="0"/>
+                <a:ea typeface="Microsoft JhengHei" pitchFamily="34" charset="-122"/>
+                <a:cs typeface="Microsoft JhengHei" pitchFamily="34" charset="-120"/>
+              </a:rPr>
+              <a:t>素材課前先放進 OneDrive 的 文件/Cowork_Lab/電信業/，練習時 Cowork 自己去找 · 準備時間 約 10 分鐘</a:t>
+            </a:r>
+            <a:endParaRPr lang="en-US" sz="1300" dirty="0"/>
+          </a:p>
+        </p:txBody>
+      </p:sp>
+      <p:sp>
+        <p:nvSpPr>
+          <p:cNvPr id="6" name="Shape 4"/>
+          <p:cNvSpPr/>
+          <p:nvPr/>
+        </p:nvSpPr>
+        <p:spPr>
+          <a:xfrm>
+            <a:off x="640080" y="1874520"/>
+            <a:ext cx="5272888" cy="914400"/>
+          </a:xfrm>
+          <a:prstGeom prst="rect">
+            <a:avLst/>
+          </a:prstGeom>
+          <a:solidFill>
+            <a:srgbClr val="FFFFFF"/>
+          </a:solidFill>
+          <a:ln w="12700">
+            <a:solidFill>
+              <a:srgbClr val="E4E7F2"/>
+            </a:solidFill>
+            <a:prstDash val="solid"/>
+          </a:ln>
+        </p:spPr>
+      </p:sp>
+      <p:sp>
+        <p:nvSpPr>
+          <p:cNvPr id="7" name="Shape 5"/>
+          <p:cNvSpPr/>
+          <p:nvPr/>
+        </p:nvSpPr>
+        <p:spPr>
+          <a:xfrm>
+            <a:off x="640080" y="1874520"/>
+            <a:ext cx="68580" cy="914400"/>
+          </a:xfrm>
+          <a:prstGeom prst="rect">
+            <a:avLst/>
+          </a:prstGeom>
+          <a:solidFill>
+            <a:srgbClr val="6366F1"/>
+          </a:solidFill>
+          <a:ln/>
+        </p:spPr>
+      </p:sp>
+      <p:sp>
+        <p:nvSpPr>
+          <p:cNvPr id="8" name="Text 6"/>
+          <p:cNvSpPr/>
+          <p:nvPr/>
+        </p:nvSpPr>
+        <p:spPr>
+          <a:xfrm>
+            <a:off x="804672" y="1929384"/>
+            <a:ext cx="411480" cy="329184"/>
+          </a:xfrm>
+          <a:prstGeom prst="rect">
+            <a:avLst/>
+          </a:prstGeom>
+          <a:noFill/>
+          <a:ln/>
+        </p:spPr>
+        <p:txBody>
+          <a:bodyPr wrap="square" rtlCol="0" anchor="ctr"/>
+          <a:lstStyle/>
+          <a:p>
+            <a:pPr algn="ctr" indent="0" marL="0">
+              <a:buNone/>
+            </a:pPr>
+            <a:r>
+              <a:rPr lang="en-US" sz="1500" dirty="0">
+                <a:solidFill>
+                  <a:srgbClr val="000000"/>
+                </a:solidFill>
+                <a:latin typeface="Microsoft JhengHei" pitchFamily="34" charset="0"/>
+                <a:ea typeface="Microsoft JhengHei" pitchFamily="34" charset="-122"/>
+                <a:cs typeface="Microsoft JhengHei" pitchFamily="34" charset="-120"/>
+              </a:rPr>
+              <a:t>📁</a:t>
+            </a:r>
+            <a:endParaRPr lang="en-US" sz="1500" dirty="0"/>
+          </a:p>
+        </p:txBody>
+      </p:sp>
+      <p:sp>
+        <p:nvSpPr>
+          <p:cNvPr id="9" name="Text 7"/>
+          <p:cNvSpPr/>
+          <p:nvPr/>
+        </p:nvSpPr>
+        <p:spPr>
+          <a:xfrm>
+            <a:off x="1243584" y="1920240"/>
+            <a:ext cx="4495648" cy="292608"/>
+          </a:xfrm>
+          <a:prstGeom prst="rect">
+            <a:avLst/>
+          </a:prstGeom>
+          <a:noFill/>
+          <a:ln/>
+        </p:spPr>
+        <p:txBody>
+          <a:bodyPr wrap="square" rtlCol="0" anchor="ctr"/>
+          <a:lstStyle/>
+          <a:p>
+            <a:pPr indent="0" marL="0">
+              <a:buNone/>
+            </a:pPr>
+            <a:r>
+              <a:rPr lang="en-US" sz="1250" b="1" dirty="0">
+                <a:solidFill>
+                  <a:srgbClr val="1E2235"/>
+                </a:solidFill>
+                <a:latin typeface="Microsoft JhengHei" pitchFamily="34" charset="0"/>
+                <a:ea typeface="Microsoft JhengHei" pitchFamily="34" charset="-122"/>
+                <a:cs typeface="Microsoft JhengHei" pitchFamily="34" charset="-120"/>
+              </a:rPr>
+              <a:t>建立 OneDrive 資料夾，把四個情境的素材放進去</a:t>
+            </a:r>
+            <a:endParaRPr lang="en-US" sz="1250" dirty="0"/>
+          </a:p>
+        </p:txBody>
+      </p:sp>
+      <p:sp>
+        <p:nvSpPr>
+          <p:cNvPr id="10" name="Text 8"/>
+          <p:cNvSpPr/>
+          <p:nvPr/>
+        </p:nvSpPr>
+        <p:spPr>
+          <a:xfrm>
+            <a:off x="1243584" y="2194560"/>
+            <a:ext cx="4495648" cy="548640"/>
+          </a:xfrm>
+          <a:prstGeom prst="rect">
+            <a:avLst/>
+          </a:prstGeom>
+          <a:noFill/>
+          <a:ln/>
+        </p:spPr>
+        <p:txBody>
+          <a:bodyPr wrap="square" rtlCol="0" anchor="ctr"/>
+          <a:lstStyle/>
+          <a:p>
+            <a:pPr indent="0" marL="0">
+              <a:lnSpc>
+                <a:spcPct val="112000"/>
+              </a:lnSpc>
+              <a:buNone/>
+            </a:pPr>
+            <a:r>
+              <a:rPr lang="en-US" sz="1050" dirty="0">
+                <a:solidFill>
+                  <a:srgbClr val="5B6079"/>
+                </a:solidFill>
+                <a:latin typeface="Microsoft JhengHei" pitchFamily="34" charset="0"/>
+                <a:ea typeface="Microsoft JhengHei" pitchFamily="34" charset="-122"/>
+                <a:cs typeface="Microsoft JhengHei" pitchFamily="34" charset="-120"/>
+              </a:rPr>
+              <a:t>在 OneDrive 建立 文件/Cowork_Lab/電信業/，底下再開四個子資料夾：TEL1_申訴案…</a:t>
+            </a:r>
+            <a:endParaRPr lang="en-US" sz="1050" dirty="0"/>
+          </a:p>
+        </p:txBody>
+      </p:sp>
+      <p:sp>
+        <p:nvSpPr>
+          <p:cNvPr id="11" name="Shape 9"/>
+          <p:cNvSpPr/>
+          <p:nvPr/>
+        </p:nvSpPr>
+        <p:spPr>
+          <a:xfrm>
+            <a:off x="6278728" y="1874520"/>
+            <a:ext cx="5272888" cy="914400"/>
+          </a:xfrm>
+          <a:prstGeom prst="rect">
+            <a:avLst/>
+          </a:prstGeom>
+          <a:solidFill>
+            <a:srgbClr val="FFFFFF"/>
+          </a:solidFill>
+          <a:ln w="12700">
+            <a:solidFill>
+              <a:srgbClr val="E4E7F2"/>
+            </a:solidFill>
+            <a:prstDash val="solid"/>
+          </a:ln>
+        </p:spPr>
+      </p:sp>
+      <p:sp>
+        <p:nvSpPr>
+          <p:cNvPr id="12" name="Shape 10"/>
+          <p:cNvSpPr/>
+          <p:nvPr/>
+        </p:nvSpPr>
+        <p:spPr>
+          <a:xfrm>
+            <a:off x="6278728" y="1874520"/>
+            <a:ext cx="68580" cy="914400"/>
+          </a:xfrm>
+          <a:prstGeom prst="rect">
+            <a:avLst/>
+          </a:prstGeom>
+          <a:solidFill>
+            <a:srgbClr val="6366F1"/>
+          </a:solidFill>
+          <a:ln/>
+        </p:spPr>
+      </p:sp>
+      <p:sp>
+        <p:nvSpPr>
+          <p:cNvPr id="13" name="Text 11"/>
+          <p:cNvSpPr/>
+          <p:nvPr/>
+        </p:nvSpPr>
+        <p:spPr>
+          <a:xfrm>
+            <a:off x="6443320" y="1929384"/>
+            <a:ext cx="411480" cy="329184"/>
+          </a:xfrm>
+          <a:prstGeom prst="rect">
+            <a:avLst/>
+          </a:prstGeom>
+          <a:noFill/>
+          <a:ln/>
+        </p:spPr>
+        <p:txBody>
+          <a:bodyPr wrap="square" rtlCol="0" anchor="ctr"/>
+          <a:lstStyle/>
+          <a:p>
+            <a:pPr algn="ctr" indent="0" marL="0">
+              <a:buNone/>
+            </a:pPr>
+            <a:r>
+              <a:rPr lang="en-US" sz="1500" dirty="0">
+                <a:solidFill>
+                  <a:srgbClr val="000000"/>
+                </a:solidFill>
+                <a:latin typeface="Microsoft JhengHei" pitchFamily="34" charset="0"/>
+                <a:ea typeface="Microsoft JhengHei" pitchFamily="34" charset="-122"/>
+                <a:cs typeface="Microsoft JhengHei" pitchFamily="34" charset="-120"/>
+              </a:rPr>
+              <a:t>📇</a:t>
+            </a:r>
+            <a:endParaRPr lang="en-US" sz="1500" dirty="0"/>
+          </a:p>
+        </p:txBody>
+      </p:sp>
+      <p:sp>
+        <p:nvSpPr>
+          <p:cNvPr id="14" name="Text 12"/>
+          <p:cNvSpPr/>
+          <p:nvPr/>
+        </p:nvSpPr>
+        <p:spPr>
+          <a:xfrm>
+            <a:off x="6882232" y="1920240"/>
+            <a:ext cx="4495648" cy="292608"/>
+          </a:xfrm>
+          <a:prstGeom prst="rect">
+            <a:avLst/>
+          </a:prstGeom>
+          <a:noFill/>
+          <a:ln/>
+        </p:spPr>
+        <p:txBody>
+          <a:bodyPr wrap="square" rtlCol="0" anchor="ctr"/>
+          <a:lstStyle/>
+          <a:p>
+            <a:pPr indent="0" marL="0">
+              <a:buNone/>
+            </a:pPr>
+            <a:r>
+              <a:rPr lang="en-US" sz="1250" b="1" dirty="0">
+                <a:solidFill>
+                  <a:srgbClr val="1E2235"/>
+                </a:solidFill>
+                <a:latin typeface="Microsoft JhengHei" pitchFamily="34" charset="0"/>
+                <a:ea typeface="Microsoft JhengHei" pitchFamily="34" charset="-122"/>
+                <a:cs typeface="Microsoft JhengHei" pitchFamily="34" charset="-120"/>
+              </a:rPr>
+              <a:t>把聯絡窗口清單放在母層，信件才寄得出去</a:t>
+            </a:r>
+            <a:endParaRPr lang="en-US" sz="1250" dirty="0"/>
+          </a:p>
+        </p:txBody>
+      </p:sp>
+      <p:sp>
+        <p:nvSpPr>
+          <p:cNvPr id="15" name="Text 13"/>
+          <p:cNvSpPr/>
+          <p:nvPr/>
+        </p:nvSpPr>
+        <p:spPr>
+          <a:xfrm>
+            <a:off x="6882232" y="2194560"/>
+            <a:ext cx="4495648" cy="548640"/>
+          </a:xfrm>
+          <a:prstGeom prst="rect">
+            <a:avLst/>
+          </a:prstGeom>
+          <a:noFill/>
+          <a:ln/>
+        </p:spPr>
+        <p:txBody>
+          <a:bodyPr wrap="square" rtlCol="0" anchor="ctr"/>
+          <a:lstStyle/>
+          <a:p>
+            <a:pPr indent="0" marL="0">
+              <a:lnSpc>
+                <a:spcPct val="112000"/>
+              </a:lnSpc>
+              <a:buNone/>
+            </a:pPr>
+            <a:r>
+              <a:rPr lang="en-US" sz="1050" dirty="0">
+                <a:solidFill>
+                  <a:srgbClr val="5B6079"/>
+                </a:solidFill>
+                <a:latin typeface="Microsoft JhengHei" pitchFamily="34" charset="0"/>
+                <a:ea typeface="Microsoft JhengHei" pitchFamily="34" charset="-122"/>
+                <a:cs typeface="Microsoft JhengHei" pitchFamily="34" charset="-120"/>
+              </a:rPr>
+              <a:t>聯絡窗口清單.md 要放在 電信業 母資料夾，不要放進任何子資料夾 —— 放母層 Cowork 比較容易撈到。</a:t>
+            </a:r>
+            <a:endParaRPr lang="en-US" sz="1050" dirty="0"/>
+          </a:p>
+        </p:txBody>
+      </p:sp>
+      <p:sp>
+        <p:nvSpPr>
+          <p:cNvPr id="16" name="Shape 14"/>
+          <p:cNvSpPr/>
+          <p:nvPr/>
+        </p:nvSpPr>
+        <p:spPr>
+          <a:xfrm>
+            <a:off x="640080" y="2916936"/>
+            <a:ext cx="5272888" cy="914400"/>
+          </a:xfrm>
+          <a:prstGeom prst="rect">
+            <a:avLst/>
+          </a:prstGeom>
+          <a:solidFill>
+            <a:srgbClr val="FFFFFF"/>
+          </a:solidFill>
+          <a:ln w="12700">
+            <a:solidFill>
+              <a:srgbClr val="E4E7F2"/>
+            </a:solidFill>
+            <a:prstDash val="solid"/>
+          </a:ln>
+        </p:spPr>
+      </p:sp>
+      <p:sp>
+        <p:nvSpPr>
+          <p:cNvPr id="17" name="Shape 15"/>
+          <p:cNvSpPr/>
+          <p:nvPr/>
+        </p:nvSpPr>
+        <p:spPr>
+          <a:xfrm>
+            <a:off x="640080" y="2916936"/>
+            <a:ext cx="68580" cy="914400"/>
+          </a:xfrm>
+          <a:prstGeom prst="rect">
+            <a:avLst/>
+          </a:prstGeom>
+          <a:solidFill>
+            <a:srgbClr val="6366F1"/>
+          </a:solidFill>
+          <a:ln/>
+        </p:spPr>
+      </p:sp>
+      <p:sp>
+        <p:nvSpPr>
+          <p:cNvPr id="18" name="Text 16"/>
+          <p:cNvSpPr/>
+          <p:nvPr/>
+        </p:nvSpPr>
+        <p:spPr>
+          <a:xfrm>
+            <a:off x="804672" y="2971800"/>
+            <a:ext cx="411480" cy="329184"/>
+          </a:xfrm>
+          <a:prstGeom prst="rect">
+            <a:avLst/>
+          </a:prstGeom>
+          <a:noFill/>
+          <a:ln/>
+        </p:spPr>
+        <p:txBody>
+          <a:bodyPr wrap="square" rtlCol="0" anchor="ctr"/>
+          <a:lstStyle/>
+          <a:p>
+            <a:pPr algn="ctr" indent="0" marL="0">
+              <a:buNone/>
+            </a:pPr>
+            <a:r>
+              <a:rPr lang="en-US" sz="1500" dirty="0">
+                <a:solidFill>
+                  <a:srgbClr val="000000"/>
+                </a:solidFill>
+                <a:latin typeface="Microsoft JhengHei" pitchFamily="34" charset="0"/>
+                <a:ea typeface="Microsoft JhengHei" pitchFamily="34" charset="-122"/>
+                <a:cs typeface="Microsoft JhengHei" pitchFamily="34" charset="-120"/>
+              </a:rPr>
+              <a:t>📧</a:t>
+            </a:r>
+            <a:endParaRPr lang="en-US" sz="1500" dirty="0"/>
+          </a:p>
+        </p:txBody>
+      </p:sp>
+      <p:sp>
+        <p:nvSpPr>
+          <p:cNvPr id="19" name="Text 17"/>
+          <p:cNvSpPr/>
+          <p:nvPr/>
+        </p:nvSpPr>
+        <p:spPr>
+          <a:xfrm>
+            <a:off x="1243584" y="2962656"/>
+            <a:ext cx="4495648" cy="292608"/>
+          </a:xfrm>
+          <a:prstGeom prst="rect">
+            <a:avLst/>
+          </a:prstGeom>
+          <a:noFill/>
+          <a:ln/>
+        </p:spPr>
+        <p:txBody>
+          <a:bodyPr wrap="square" rtlCol="0" anchor="ctr"/>
+          <a:lstStyle/>
+          <a:p>
+            <a:pPr indent="0" marL="0">
+              <a:buNone/>
+            </a:pPr>
+            <a:r>
+              <a:rPr lang="en-US" sz="1250" b="1" dirty="0">
+                <a:solidFill>
+                  <a:srgbClr val="1E2235"/>
+                </a:solidFill>
+                <a:latin typeface="Microsoft JhengHei" pitchFamily="34" charset="0"/>
+                <a:ea typeface="Microsoft JhengHei" pitchFamily="34" charset="-122"/>
+                <a:cs typeface="Microsoft JhengHei" pitchFamily="34" charset="-120"/>
+              </a:rPr>
+              <a:t>寄一封 TEL1 的來函給自己（另一封先不要寄）</a:t>
+            </a:r>
+            <a:endParaRPr lang="en-US" sz="1250" dirty="0"/>
+          </a:p>
+        </p:txBody>
+      </p:sp>
+      <p:sp>
+        <p:nvSpPr>
+          <p:cNvPr id="20" name="Text 18"/>
+          <p:cNvSpPr/>
+          <p:nvPr/>
+        </p:nvSpPr>
+        <p:spPr>
+          <a:xfrm>
+            <a:off x="1243584" y="3236976"/>
+            <a:ext cx="4495648" cy="548640"/>
+          </a:xfrm>
+          <a:prstGeom prst="rect">
+            <a:avLst/>
+          </a:prstGeom>
+          <a:noFill/>
+          <a:ln/>
+        </p:spPr>
+        <p:txBody>
+          <a:bodyPr wrap="square" rtlCol="0" anchor="ctr"/>
+          <a:lstStyle/>
+          <a:p>
+            <a:pPr indent="0" marL="0">
+              <a:lnSpc>
+                <a:spcPct val="112000"/>
+              </a:lnSpc>
+              <a:buNone/>
+            </a:pPr>
+            <a:r>
+              <a:rPr lang="en-US" sz="1050" dirty="0">
+                <a:solidFill>
+                  <a:srgbClr val="5B6079"/>
+                </a:solidFill>
+                <a:latin typeface="Microsoft JhengHei" pitchFamily="34" charset="0"/>
+                <a:ea typeface="Microsoft JhengHei" pitchFamily="34" charset="-122"/>
+                <a:cs typeface="Microsoft JhengHei" pitchFamily="34" charset="-120"/>
+              </a:rPr>
+              <a:t>照 TEL1_NCC轉來函.md 的主旨與內文，用你自己的帳號寄一封給自己。</a:t>
+            </a:r>
+            <a:endParaRPr lang="en-US" sz="1050" dirty="0"/>
+          </a:p>
+        </p:txBody>
+      </p:sp>
+      <p:sp>
+        <p:nvSpPr>
+          <p:cNvPr id="21" name="Shape 19"/>
+          <p:cNvSpPr/>
+          <p:nvPr/>
+        </p:nvSpPr>
+        <p:spPr>
+          <a:xfrm>
+            <a:off x="6278728" y="2916936"/>
+            <a:ext cx="5272888" cy="914400"/>
+          </a:xfrm>
+          <a:prstGeom prst="rect">
+            <a:avLst/>
+          </a:prstGeom>
+          <a:solidFill>
+            <a:srgbClr val="FFFFFF"/>
+          </a:solidFill>
+          <a:ln w="12700">
+            <a:solidFill>
+              <a:srgbClr val="E4E7F2"/>
+            </a:solidFill>
+            <a:prstDash val="solid"/>
+          </a:ln>
+        </p:spPr>
+      </p:sp>
+      <p:sp>
+        <p:nvSpPr>
+          <p:cNvPr id="22" name="Shape 20"/>
+          <p:cNvSpPr/>
+          <p:nvPr/>
+        </p:nvSpPr>
+        <p:spPr>
+          <a:xfrm>
+            <a:off x="6278728" y="2916936"/>
+            <a:ext cx="68580" cy="914400"/>
+          </a:xfrm>
+          <a:prstGeom prst="rect">
+            <a:avLst/>
+          </a:prstGeom>
+          <a:solidFill>
+            <a:srgbClr val="6366F1"/>
+          </a:solidFill>
+          <a:ln/>
+        </p:spPr>
+      </p:sp>
+      <p:sp>
+        <p:nvSpPr>
+          <p:cNvPr id="23" name="Text 21"/>
+          <p:cNvSpPr/>
+          <p:nvPr/>
+        </p:nvSpPr>
+        <p:spPr>
+          <a:xfrm>
+            <a:off x="6443320" y="2971800"/>
+            <a:ext cx="411480" cy="329184"/>
+          </a:xfrm>
+          <a:prstGeom prst="rect">
+            <a:avLst/>
+          </a:prstGeom>
+          <a:noFill/>
+          <a:ln/>
+        </p:spPr>
+        <p:txBody>
+          <a:bodyPr wrap="square" rtlCol="0" anchor="ctr"/>
+          <a:lstStyle/>
+          <a:p>
+            <a:pPr algn="ctr" indent="0" marL="0">
+              <a:buNone/>
+            </a:pPr>
+            <a:r>
+              <a:rPr lang="en-US" sz="1500" dirty="0">
+                <a:solidFill>
+                  <a:srgbClr val="000000"/>
+                </a:solidFill>
+                <a:latin typeface="Microsoft JhengHei" pitchFamily="34" charset="0"/>
+                <a:ea typeface="Microsoft JhengHei" pitchFamily="34" charset="-122"/>
+                <a:cs typeface="Microsoft JhengHei" pitchFamily="34" charset="-120"/>
+              </a:rPr>
+              <a:t>📅</a:t>
+            </a:r>
+            <a:endParaRPr lang="en-US" sz="1500" dirty="0"/>
+          </a:p>
+        </p:txBody>
+      </p:sp>
+      <p:sp>
+        <p:nvSpPr>
+          <p:cNvPr id="24" name="Text 22"/>
+          <p:cNvSpPr/>
+          <p:nvPr/>
+        </p:nvSpPr>
+        <p:spPr>
+          <a:xfrm>
+            <a:off x="6882232" y="2962656"/>
+            <a:ext cx="4495648" cy="292608"/>
+          </a:xfrm>
+          <a:prstGeom prst="rect">
+            <a:avLst/>
+          </a:prstGeom>
+          <a:noFill/>
+          <a:ln/>
+        </p:spPr>
+        <p:txBody>
+          <a:bodyPr wrap="square" rtlCol="0" anchor="ctr"/>
+          <a:lstStyle/>
+          <a:p>
+            <a:pPr indent="0" marL="0">
+              <a:buNone/>
+            </a:pPr>
+            <a:r>
+              <a:rPr lang="en-US" sz="1250" b="1" dirty="0">
+                <a:solidFill>
+                  <a:srgbClr val="1E2235"/>
+                </a:solidFill>
+                <a:latin typeface="Microsoft JhengHei" pitchFamily="34" charset="0"/>
+                <a:ea typeface="Microsoft JhengHei" pitchFamily="34" charset="-122"/>
+                <a:cs typeface="Microsoft JhengHei" pitchFamily="34" charset="-120"/>
+              </a:rPr>
+              <a:t>行事曆留些空檔</a:t>
+            </a:r>
+            <a:endParaRPr lang="en-US" sz="1250" dirty="0"/>
+          </a:p>
+        </p:txBody>
+      </p:sp>
+      <p:sp>
+        <p:nvSpPr>
+          <p:cNvPr id="25" name="Text 23"/>
+          <p:cNvSpPr/>
+          <p:nvPr/>
+        </p:nvSpPr>
+        <p:spPr>
+          <a:xfrm>
+            <a:off x="6882232" y="3236976"/>
+            <a:ext cx="4495648" cy="548640"/>
+          </a:xfrm>
+          <a:prstGeom prst="rect">
+            <a:avLst/>
+          </a:prstGeom>
+          <a:noFill/>
+          <a:ln/>
+        </p:spPr>
+        <p:txBody>
+          <a:bodyPr wrap="square" rtlCol="0" anchor="ctr"/>
+          <a:lstStyle/>
+          <a:p>
+            <a:pPr indent="0" marL="0">
+              <a:lnSpc>
+                <a:spcPct val="112000"/>
+              </a:lnSpc>
+              <a:buNone/>
+            </a:pPr>
+            <a:r>
+              <a:rPr lang="en-US" sz="1050" dirty="0">
+                <a:solidFill>
+                  <a:srgbClr val="5B6079"/>
+                </a:solidFill>
+                <a:latin typeface="Microsoft JhengHei" pitchFamily="34" charset="0"/>
+                <a:ea typeface="Microsoft JhengHei" pitchFamily="34" charset="-122"/>
+                <a:cs typeface="Microsoft JhengHei" pitchFamily="34" charset="-120"/>
+              </a:rPr>
+              <a:t>TEL3 會在你的行事曆排入 T+24h／T+48h／T+72h 三個里程碑，本週保留一些空檔即可。</a:t>
+            </a:r>
+            <a:endParaRPr lang="en-US" sz="1050" dirty="0"/>
+          </a:p>
+        </p:txBody>
+      </p:sp>
+      <p:sp>
+        <p:nvSpPr>
+          <p:cNvPr id="26" name="Shape 24"/>
+          <p:cNvSpPr/>
+          <p:nvPr/>
+        </p:nvSpPr>
+        <p:spPr>
+          <a:xfrm>
+            <a:off x="640080" y="3959352"/>
+            <a:ext cx="5272888" cy="914400"/>
+          </a:xfrm>
+          <a:prstGeom prst="rect">
+            <a:avLst/>
+          </a:prstGeom>
+          <a:solidFill>
+            <a:srgbClr val="FFFFFF"/>
+          </a:solidFill>
+          <a:ln w="12700">
+            <a:solidFill>
+              <a:srgbClr val="E4E7F2"/>
+            </a:solidFill>
+            <a:prstDash val="solid"/>
+          </a:ln>
+        </p:spPr>
+      </p:sp>
+      <p:sp>
+        <p:nvSpPr>
+          <p:cNvPr id="27" name="Shape 25"/>
+          <p:cNvSpPr/>
+          <p:nvPr/>
+        </p:nvSpPr>
+        <p:spPr>
+          <a:xfrm>
+            <a:off x="640080" y="3959352"/>
+            <a:ext cx="68580" cy="914400"/>
+          </a:xfrm>
+          <a:prstGeom prst="rect">
+            <a:avLst/>
+          </a:prstGeom>
+          <a:solidFill>
+            <a:srgbClr val="6366F1"/>
+          </a:solidFill>
+          <a:ln/>
+        </p:spPr>
+      </p:sp>
+      <p:sp>
+        <p:nvSpPr>
+          <p:cNvPr id="28" name="Text 26"/>
+          <p:cNvSpPr/>
+          <p:nvPr/>
+        </p:nvSpPr>
+        <p:spPr>
+          <a:xfrm>
+            <a:off x="804672" y="4014216"/>
+            <a:ext cx="411480" cy="329184"/>
+          </a:xfrm>
+          <a:prstGeom prst="rect">
+            <a:avLst/>
+          </a:prstGeom>
+          <a:noFill/>
+          <a:ln/>
+        </p:spPr>
+        <p:txBody>
+          <a:bodyPr wrap="square" rtlCol="0" anchor="ctr"/>
+          <a:lstStyle/>
+          <a:p>
+            <a:pPr algn="ctr" indent="0" marL="0">
+              <a:buNone/>
+            </a:pPr>
+            <a:r>
+              <a:rPr lang="en-US" sz="1500" dirty="0">
+                <a:solidFill>
+                  <a:srgbClr val="000000"/>
+                </a:solidFill>
+                <a:latin typeface="Microsoft JhengHei" pitchFamily="34" charset="0"/>
+                <a:ea typeface="Microsoft JhengHei" pitchFamily="34" charset="-122"/>
+                <a:cs typeface="Microsoft JhengHei" pitchFamily="34" charset="-120"/>
+              </a:rPr>
+              <a:t>💬</a:t>
+            </a:r>
+            <a:endParaRPr lang="en-US" sz="1500" dirty="0"/>
+          </a:p>
+        </p:txBody>
+      </p:sp>
+      <p:sp>
+        <p:nvSpPr>
+          <p:cNvPr id="29" name="Text 27"/>
+          <p:cNvSpPr/>
+          <p:nvPr/>
+        </p:nvSpPr>
+        <p:spPr>
+          <a:xfrm>
+            <a:off x="1243584" y="4005072"/>
+            <a:ext cx="4495648" cy="292608"/>
+          </a:xfrm>
+          <a:prstGeom prst="rect">
+            <a:avLst/>
+          </a:prstGeom>
+          <a:noFill/>
+          <a:ln/>
+        </p:spPr>
+        <p:txBody>
+          <a:bodyPr wrap="square" rtlCol="0" anchor="ctr"/>
+          <a:lstStyle/>
+          <a:p>
+            <a:pPr indent="0" marL="0">
+              <a:buNone/>
+            </a:pPr>
+            <a:r>
+              <a:rPr lang="en-US" sz="1250" b="1" dirty="0">
+                <a:solidFill>
+                  <a:srgbClr val="1E2235"/>
+                </a:solidFill>
+                <a:latin typeface="Microsoft JhengHei" pitchFamily="34" charset="0"/>
+                <a:ea typeface="Microsoft JhengHei" pitchFamily="34" charset="-122"/>
+                <a:cs typeface="Microsoft JhengHei" pitchFamily="34" charset="-120"/>
+              </a:rPr>
+              <a:t>不需要準備 Teams</a:t>
+            </a:r>
+            <a:endParaRPr lang="en-US" sz="1250" dirty="0"/>
+          </a:p>
+        </p:txBody>
+      </p:sp>
+      <p:sp>
+        <p:nvSpPr>
+          <p:cNvPr id="30" name="Text 28"/>
+          <p:cNvSpPr/>
+          <p:nvPr/>
+        </p:nvSpPr>
+        <p:spPr>
+          <a:xfrm>
+            <a:off x="1243584" y="4279392"/>
+            <a:ext cx="4495648" cy="548640"/>
+          </a:xfrm>
+          <a:prstGeom prst="rect">
+            <a:avLst/>
+          </a:prstGeom>
+          <a:noFill/>
+          <a:ln/>
+        </p:spPr>
+        <p:txBody>
+          <a:bodyPr wrap="square" rtlCol="0" anchor="ctr"/>
+          <a:lstStyle/>
+          <a:p>
+            <a:pPr indent="0" marL="0">
+              <a:lnSpc>
+                <a:spcPct val="112000"/>
+              </a:lnSpc>
+              <a:buNone/>
+            </a:pPr>
+            <a:r>
+              <a:rPr lang="en-US" sz="1050" dirty="0">
+                <a:solidFill>
+                  <a:srgbClr val="5B6079"/>
+                </a:solidFill>
+                <a:latin typeface="Microsoft JhengHei" pitchFamily="34" charset="0"/>
+                <a:ea typeface="Microsoft JhengHei" pitchFamily="34" charset="-122"/>
+                <a:cs typeface="Microsoft JhengHei" pitchFamily="34" charset="-120"/>
+              </a:rPr>
+              <a:t>電信業五個情境都用不到 Teams。</a:t>
+            </a:r>
+            <a:endParaRPr lang="en-US" sz="1050" dirty="0"/>
+          </a:p>
+        </p:txBody>
+      </p:sp>
+      <p:sp>
+        <p:nvSpPr>
+          <p:cNvPr id="31" name="Shape 29"/>
+          <p:cNvSpPr/>
+          <p:nvPr/>
+        </p:nvSpPr>
+        <p:spPr>
+          <a:xfrm>
+            <a:off x="6278728" y="3959352"/>
+            <a:ext cx="5272888" cy="914400"/>
+          </a:xfrm>
+          <a:prstGeom prst="rect">
+            <a:avLst/>
+          </a:prstGeom>
+          <a:solidFill>
+            <a:srgbClr val="FFFFFF"/>
+          </a:solidFill>
+          <a:ln w="12700">
+            <a:solidFill>
+              <a:srgbClr val="E4E7F2"/>
+            </a:solidFill>
+            <a:prstDash val="solid"/>
+          </a:ln>
+        </p:spPr>
+      </p:sp>
+      <p:sp>
+        <p:nvSpPr>
+          <p:cNvPr id="32" name="Shape 30"/>
+          <p:cNvSpPr/>
+          <p:nvPr/>
+        </p:nvSpPr>
+        <p:spPr>
+          <a:xfrm>
+            <a:off x="6278728" y="3959352"/>
+            <a:ext cx="68580" cy="914400"/>
+          </a:xfrm>
+          <a:prstGeom prst="rect">
+            <a:avLst/>
+          </a:prstGeom>
+          <a:solidFill>
+            <a:srgbClr val="6366F1"/>
+          </a:solidFill>
+          <a:ln/>
+        </p:spPr>
+      </p:sp>
+      <p:sp>
+        <p:nvSpPr>
+          <p:cNvPr id="33" name="Text 31"/>
+          <p:cNvSpPr/>
+          <p:nvPr/>
+        </p:nvSpPr>
+        <p:spPr>
+          <a:xfrm>
+            <a:off x="6443320" y="4014216"/>
+            <a:ext cx="411480" cy="329184"/>
+          </a:xfrm>
+          <a:prstGeom prst="rect">
+            <a:avLst/>
+          </a:prstGeom>
+          <a:noFill/>
+          <a:ln/>
+        </p:spPr>
+        <p:txBody>
+          <a:bodyPr wrap="square" rtlCol="0" anchor="ctr"/>
+          <a:lstStyle/>
+          <a:p>
+            <a:pPr algn="ctr" indent="0" marL="0">
+              <a:buNone/>
+            </a:pPr>
+            <a:r>
+              <a:rPr lang="en-US" sz="1500" dirty="0">
+                <a:solidFill>
+                  <a:srgbClr val="000000"/>
+                </a:solidFill>
+                <a:latin typeface="Microsoft JhengHei" pitchFamily="34" charset="0"/>
+                <a:ea typeface="Microsoft JhengHei" pitchFamily="34" charset="-122"/>
+                <a:cs typeface="Microsoft JhengHei" pitchFamily="34" charset="-120"/>
+              </a:rPr>
+              <a:t>🧩</a:t>
+            </a:r>
+            <a:endParaRPr lang="en-US" sz="1500" dirty="0"/>
+          </a:p>
+        </p:txBody>
+      </p:sp>
+      <p:sp>
+        <p:nvSpPr>
+          <p:cNvPr id="34" name="Text 32"/>
+          <p:cNvSpPr/>
+          <p:nvPr/>
+        </p:nvSpPr>
+        <p:spPr>
+          <a:xfrm>
+            <a:off x="6882232" y="4005072"/>
+            <a:ext cx="4495648" cy="292608"/>
+          </a:xfrm>
+          <a:prstGeom prst="rect">
+            <a:avLst/>
+          </a:prstGeom>
+          <a:noFill/>
+          <a:ln/>
+        </p:spPr>
+        <p:txBody>
+          <a:bodyPr wrap="square" rtlCol="0" anchor="ctr"/>
+          <a:lstStyle/>
+          <a:p>
+            <a:pPr indent="0" marL="0">
+              <a:buNone/>
+            </a:pPr>
+            <a:r>
+              <a:rPr lang="en-US" sz="1250" b="1" dirty="0">
+                <a:solidFill>
+                  <a:srgbClr val="1E2235"/>
+                </a:solidFill>
+                <a:latin typeface="Microsoft JhengHei" pitchFamily="34" charset="0"/>
+                <a:ea typeface="Microsoft JhengHei" pitchFamily="34" charset="-122"/>
+                <a:cs typeface="Microsoft JhengHei" pitchFamily="34" charset="-120"/>
+              </a:rPr>
+              <a:t>技能資料夾先保持乾淨</a:t>
+            </a:r>
+            <a:endParaRPr lang="en-US" sz="1250" dirty="0"/>
+          </a:p>
+        </p:txBody>
+      </p:sp>
+      <p:sp>
+        <p:nvSpPr>
+          <p:cNvPr id="35" name="Text 33"/>
+          <p:cNvSpPr/>
+          <p:nvPr/>
+        </p:nvSpPr>
+        <p:spPr>
+          <a:xfrm>
+            <a:off x="6882232" y="4279392"/>
+            <a:ext cx="4495648" cy="548640"/>
+          </a:xfrm>
+          <a:prstGeom prst="rect">
+            <a:avLst/>
+          </a:prstGeom>
+          <a:noFill/>
+          <a:ln/>
+        </p:spPr>
+        <p:txBody>
+          <a:bodyPr wrap="square" rtlCol="0" anchor="ctr"/>
+          <a:lstStyle/>
+          <a:p>
+            <a:pPr indent="0" marL="0">
+              <a:lnSpc>
+                <a:spcPct val="112000"/>
+              </a:lnSpc>
+              <a:buNone/>
+            </a:pPr>
+            <a:r>
+              <a:rPr lang="en-US" sz="1050" dirty="0">
+                <a:solidFill>
+                  <a:srgbClr val="5B6079"/>
+                </a:solidFill>
+                <a:latin typeface="Microsoft JhengHei" pitchFamily="34" charset="0"/>
+                <a:ea typeface="Microsoft JhengHei" pitchFamily="34" charset="-122"/>
+                <a:cs typeface="Microsoft JhengHei" pitchFamily="34" charset="-120"/>
+              </a:rPr>
+              <a:t>TEL5 是現場建立技能的示範，所以不要先把 TEL5_SKILL.md 放進 文件/Cowork/skills…</a:t>
+            </a:r>
+            <a:endParaRPr lang="en-US" sz="1050" dirty="0"/>
+          </a:p>
+        </p:txBody>
+      </p:sp>
+      <p:sp>
+        <p:nvSpPr>
+          <p:cNvPr id="36" name="Shape 34"/>
+          <p:cNvSpPr/>
+          <p:nvPr/>
+        </p:nvSpPr>
+        <p:spPr>
+          <a:xfrm>
+            <a:off x="640080" y="5532120"/>
+            <a:ext cx="10911535" cy="749808"/>
+          </a:xfrm>
+          <a:prstGeom prst="rect">
+            <a:avLst/>
+          </a:prstGeom>
+          <a:solidFill>
+            <a:srgbClr val="FFFFFF"/>
+          </a:solidFill>
+          <a:ln w="12700">
+            <a:solidFill>
+              <a:srgbClr val="E4E7F2"/>
+            </a:solidFill>
+            <a:prstDash val="solid"/>
+          </a:ln>
+        </p:spPr>
+      </p:sp>
+      <p:sp>
+        <p:nvSpPr>
+          <p:cNvPr id="37" name="Shape 35"/>
+          <p:cNvSpPr/>
+          <p:nvPr/>
+        </p:nvSpPr>
+        <p:spPr>
+          <a:xfrm>
+            <a:off x="640080" y="5532120"/>
+            <a:ext cx="91440" cy="749808"/>
+          </a:xfrm>
+          <a:prstGeom prst="rect">
+            <a:avLst/>
+          </a:prstGeom>
+          <a:solidFill>
+            <a:srgbClr val="6366F1"/>
+          </a:solidFill>
+          <a:ln/>
+        </p:spPr>
+      </p:sp>
+      <p:sp>
+        <p:nvSpPr>
+          <p:cNvPr id="38" name="Text 36"/>
+          <p:cNvSpPr/>
+          <p:nvPr/>
+        </p:nvSpPr>
+        <p:spPr>
+          <a:xfrm>
+            <a:off x="914400" y="5614416"/>
+            <a:ext cx="1828800" cy="274320"/>
+          </a:xfrm>
+          <a:prstGeom prst="rect">
+            <a:avLst/>
+          </a:prstGeom>
+          <a:noFill/>
+          <a:ln/>
+        </p:spPr>
+        <p:txBody>
+          <a:bodyPr wrap="square" rtlCol="0" anchor="ctr"/>
+          <a:lstStyle/>
+          <a:p>
+            <a:pPr indent="0" marL="0">
+              <a:buNone/>
+            </a:pPr>
+            <a:r>
+              <a:rPr lang="en-US" sz="1200" b="1" dirty="0">
+                <a:solidFill>
+                  <a:srgbClr val="1E2235"/>
+                </a:solidFill>
+                <a:latin typeface="Microsoft JhengHei" pitchFamily="34" charset="0"/>
+                <a:ea typeface="Microsoft JhengHei" pitchFamily="34" charset="-122"/>
+                <a:cs typeface="Microsoft JhengHei" pitchFamily="34" charset="-120"/>
+              </a:rPr>
+              <a:t>開課前最後檢查</a:t>
+            </a:r>
+            <a:endParaRPr lang="en-US" sz="1200" dirty="0"/>
+          </a:p>
+        </p:txBody>
+      </p:sp>
+      <p:pic>
+        <p:nvPicPr>
+          <p:cNvPr id="39" name="Image 0" descr="preencoded.png">    </p:cNvPr>
+          <p:cNvPicPr>
+            <a:picLocks noChangeAspect="1"/>
+          </p:cNvPicPr>
+          <p:nvPr/>
+        </p:nvPicPr>
+        <p:blipFill>
+          <a:blip r:embed="rId1"/>
+          <a:stretch>
+            <a:fillRect/>
+          </a:stretch>
+        </p:blipFill>
+        <p:spPr>
+          <a:xfrm>
+            <a:off x="2743200" y="5641848"/>
+            <a:ext cx="155448" cy="155448"/>
+          </a:xfrm>
+          <a:prstGeom prst="rect">
+            <a:avLst/>
+          </a:prstGeom>
+        </p:spPr>
+      </p:pic>
+      <p:sp>
+        <p:nvSpPr>
+          <p:cNvPr id="40" name="Text 37"/>
+          <p:cNvSpPr/>
+          <p:nvPr/>
+        </p:nvSpPr>
+        <p:spPr>
+          <a:xfrm>
+            <a:off x="2999232" y="5586984"/>
+            <a:ext cx="8259775" cy="237744"/>
+          </a:xfrm>
+          <a:prstGeom prst="rect">
+            <a:avLst/>
+          </a:prstGeom>
+          <a:noFill/>
+          <a:ln/>
+        </p:spPr>
+        <p:txBody>
+          <a:bodyPr wrap="square" rtlCol="0" anchor="ctr"/>
+          <a:lstStyle/>
+          <a:p>
+            <a:pPr indent="0" marL="0">
+              <a:buNone/>
+            </a:pPr>
+            <a:r>
+              <a:rPr lang="en-US" sz="1050" dirty="0">
+                <a:solidFill>
+                  <a:srgbClr val="1E2235"/>
+                </a:solidFill>
+                <a:latin typeface="Microsoft JhengHei" pitchFamily="34" charset="0"/>
+                <a:ea typeface="Microsoft JhengHei" pitchFamily="34" charset="-122"/>
+                <a:cs typeface="Microsoft JhengHei" pitchFamily="34" charset="-120"/>
+              </a:rPr>
+              <a:t>OneDrive 的「電信業」底下四個子資料夾都看得到，檔案打得開</a:t>
+            </a:r>
+            <a:endParaRPr lang="en-US" sz="1050" dirty="0"/>
+          </a:p>
+        </p:txBody>
+      </p:sp>
+      <p:pic>
+        <p:nvPicPr>
+          <p:cNvPr id="41" name="Image 1" descr="preencoded.png">    </p:cNvPr>
+          <p:cNvPicPr>
+            <a:picLocks noChangeAspect="1"/>
+          </p:cNvPicPr>
+          <p:nvPr/>
+        </p:nvPicPr>
+        <p:blipFill>
+          <a:blip r:embed="rId2"/>
+          <a:stretch>
+            <a:fillRect/>
+          </a:stretch>
+        </p:blipFill>
+        <p:spPr>
+          <a:xfrm>
+            <a:off x="2743200" y="5852160"/>
+            <a:ext cx="155448" cy="155448"/>
+          </a:xfrm>
+          <a:prstGeom prst="rect">
+            <a:avLst/>
+          </a:prstGeom>
+        </p:spPr>
+      </p:pic>
+      <p:sp>
+        <p:nvSpPr>
+          <p:cNvPr id="42" name="Text 38"/>
+          <p:cNvSpPr/>
+          <p:nvPr/>
+        </p:nvSpPr>
+        <p:spPr>
+          <a:xfrm>
+            <a:off x="2999232" y="5797296"/>
+            <a:ext cx="8259775" cy="237744"/>
+          </a:xfrm>
+          <a:prstGeom prst="rect">
+            <a:avLst/>
+          </a:prstGeom>
+          <a:noFill/>
+          <a:ln/>
+        </p:spPr>
+        <p:txBody>
+          <a:bodyPr wrap="square" rtlCol="0" anchor="ctr"/>
+          <a:lstStyle/>
+          <a:p>
+            <a:pPr indent="0" marL="0">
+              <a:buNone/>
+            </a:pPr>
+            <a:r>
+              <a:rPr lang="en-US" sz="1050" dirty="0">
+                <a:solidFill>
+                  <a:srgbClr val="1E2235"/>
+                </a:solidFill>
+                <a:latin typeface="Microsoft JhengHei" pitchFamily="34" charset="0"/>
+                <a:ea typeface="Microsoft JhengHei" pitchFamily="34" charset="-122"/>
+                <a:cs typeface="Microsoft JhengHei" pitchFamily="34" charset="-120"/>
+              </a:rPr>
+              <a:t>聯絡窗口清單.md 在「電信業」母層，不是在子資料夾裡</a:t>
+            </a:r>
+            <a:endParaRPr lang="en-US" sz="1050" dirty="0"/>
+          </a:p>
+        </p:txBody>
+      </p:sp>
+      <p:pic>
+        <p:nvPicPr>
+          <p:cNvPr id="43" name="Image 2" descr="preencoded.png">    </p:cNvPr>
+          <p:cNvPicPr>
+            <a:picLocks noChangeAspect="1"/>
+          </p:cNvPicPr>
+          <p:nvPr/>
+        </p:nvPicPr>
+        <p:blipFill>
+          <a:blip r:embed="rId3"/>
+          <a:stretch>
+            <a:fillRect/>
+          </a:stretch>
+        </p:blipFill>
+        <p:spPr>
+          <a:xfrm>
+            <a:off x="2743200" y="6062472"/>
+            <a:ext cx="155448" cy="155448"/>
+          </a:xfrm>
+          <a:prstGeom prst="rect">
+            <a:avLst/>
+          </a:prstGeom>
+        </p:spPr>
+      </p:pic>
+      <p:sp>
+        <p:nvSpPr>
+          <p:cNvPr id="44" name="Text 39"/>
+          <p:cNvSpPr/>
+          <p:nvPr/>
+        </p:nvSpPr>
+        <p:spPr>
+          <a:xfrm>
+            <a:off x="2999232" y="6007608"/>
+            <a:ext cx="8259775" cy="237744"/>
+          </a:xfrm>
+          <a:prstGeom prst="rect">
+            <a:avLst/>
+          </a:prstGeom>
+          <a:noFill/>
+          <a:ln/>
+        </p:spPr>
+        <p:txBody>
+          <a:bodyPr wrap="square" rtlCol="0" anchor="ctr"/>
+          <a:lstStyle/>
+          <a:p>
+            <a:pPr indent="0" marL="0">
+              <a:buNone/>
+            </a:pPr>
+            <a:r>
+              <a:rPr lang="en-US" sz="1050" dirty="0">
+                <a:solidFill>
+                  <a:srgbClr val="1E2235"/>
+                </a:solidFill>
+                <a:latin typeface="Microsoft JhengHei" pitchFamily="34" charset="0"/>
+                <a:ea typeface="Microsoft JhengHei" pitchFamily="34" charset="-122"/>
+                <a:cs typeface="Microsoft JhengHei" pitchFamily="34" charset="-120"/>
+              </a:rPr>
+              <a:t>信箱裡有 TEL1 的 NCC 轉來函</a:t>
+            </a:r>
+            <a:endParaRPr lang="en-US" sz="1050" dirty="0"/>
+          </a:p>
+        </p:txBody>
+      </p:sp>
+      <p:sp>
+        <p:nvSpPr>
+          <p:cNvPr id="45" name="Text 40"/>
+          <p:cNvSpPr/>
+          <p:nvPr/>
+        </p:nvSpPr>
+        <p:spPr>
+          <a:xfrm>
+            <a:off x="640080" y="6473952"/>
+            <a:ext cx="5486400" cy="274320"/>
+          </a:xfrm>
+          <a:prstGeom prst="rect">
+            <a:avLst/>
+          </a:prstGeom>
+          <a:noFill/>
+          <a:ln/>
+        </p:spPr>
+        <p:txBody>
+          <a:bodyPr wrap="square" rtlCol="0" anchor="ctr"/>
+          <a:lstStyle/>
+          <a:p>
+            <a:pPr algn="l" indent="0" marL="0">
+              <a:buNone/>
+            </a:pPr>
+            <a:r>
+              <a:rPr lang="en-US" sz="900" dirty="0">
+                <a:solidFill>
+                  <a:srgbClr val="5B6079"/>
+                </a:solidFill>
+                <a:latin typeface="Microsoft JhengHei" pitchFamily="34" charset="0"/>
+                <a:ea typeface="Microsoft JhengHei" pitchFamily="34" charset="-122"/>
+                <a:cs typeface="Microsoft JhengHei" pitchFamily="34" charset="-120"/>
+              </a:rPr>
+              <a:t>Microsoft 365 Copilot Cowork</a:t>
+            </a:r>
+            <a:endParaRPr lang="en-US" sz="900" dirty="0"/>
+          </a:p>
+        </p:txBody>
+      </p:sp>
+      <p:sp>
+        <p:nvSpPr>
+          <p:cNvPr id="46" name="Text 41"/>
+          <p:cNvSpPr/>
+          <p:nvPr/>
+        </p:nvSpPr>
+        <p:spPr>
+          <a:xfrm>
+            <a:off x="11002975" y="6473952"/>
+            <a:ext cx="548640" cy="274320"/>
+          </a:xfrm>
+          <a:prstGeom prst="rect">
+            <a:avLst/>
+          </a:prstGeom>
+          <a:noFill/>
+          <a:ln/>
+        </p:spPr>
+        <p:txBody>
+          <a:bodyPr wrap="square" rtlCol="0" anchor="ctr"/>
+          <a:lstStyle/>
+          <a:p>
+            <a:pPr algn="r" indent="0" marL="0">
+              <a:buNone/>
+            </a:pPr>
+            <a:r>
+              <a:rPr lang="en-US" sz="900" dirty="0">
+                <a:solidFill>
+                  <a:srgbClr val="5B6079"/>
+                </a:solidFill>
+                <a:latin typeface="Microsoft JhengHei" pitchFamily="34" charset="0"/>
+                <a:ea typeface="Microsoft JhengHei" pitchFamily="34" charset="-122"/>
+                <a:cs typeface="Microsoft JhengHei" pitchFamily="34" charset="-120"/>
+              </a:rPr>
+              <a:t>6</a:t>
+            </a:r>
+            <a:endParaRPr lang="en-US" sz="900" dirty="0"/>
+          </a:p>
+        </p:txBody>
+      </p:sp>
+    </p:spTree>
+  </p:cSld>
+  <p:clrMapOvr>
+    <a:masterClrMapping/>
+  </p:clrMapOvr>
+</p:sld>
+</file>
+
+<file path=ppt/slides/slide8.xml><?xml version="1.0" encoding="utf-8"?>
+<p:sld xmlns:a="http://schemas.openxmlformats.org/drawingml/2006/main" xmlns:r="http://schemas.openxmlformats.org/officeDocument/2006/relationships" xmlns:p="http://schemas.openxmlformats.org/presentationml/2006/main">
+  <p:cSld name="Slide 8">
+    <p:bg>
+      <p:bgPr>
+        <a:solidFill>
+          <a:srgbClr val="F7F8FC"/>
+        </a:solidFill>
+      </p:bgPr>
+    </p:bg>
+    <p:spTree>
+      <p:nvGrpSpPr>
+        <p:cNvPr id="1" name=""/>
+        <p:cNvGrpSpPr/>
+        <p:nvPr/>
+      </p:nvGrpSpPr>
+      <p:grpSpPr>
+        <a:xfrm>
+          <a:off x="0" y="0"/>
+          <a:ext cx="0" cy="0"/>
+          <a:chOff x="0" y="0"/>
+          <a:chExt cx="0" cy="0"/>
+        </a:xfrm>
+      </p:grpSpPr>
+      <p:sp>
+        <p:nvSpPr>
+          <p:cNvPr id="2" name="Shape 0"/>
+          <p:cNvSpPr/>
+          <p:nvPr/>
+        </p:nvSpPr>
+        <p:spPr>
+          <a:xfrm>
+            <a:off x="640080" y="566928"/>
+            <a:ext cx="384048" cy="128016"/>
+          </a:xfrm>
+          <a:prstGeom prst="rect">
+            <a:avLst/>
+          </a:prstGeom>
+          <a:solidFill>
+            <a:srgbClr val="6366F1"/>
+          </a:solidFill>
+          <a:ln/>
+        </p:spPr>
+      </p:sp>
+      <p:sp>
+        <p:nvSpPr>
+          <p:cNvPr id="3" name="Text 1"/>
+          <p:cNvSpPr/>
+          <p:nvPr/>
+        </p:nvSpPr>
+        <p:spPr>
+          <a:xfrm>
+            <a:off x="1143000" y="457200"/>
+            <a:ext cx="8229600" cy="310896"/>
+          </a:xfrm>
+          <a:prstGeom prst="rect">
+            <a:avLst/>
+          </a:prstGeom>
+          <a:noFill/>
+          <a:ln/>
+        </p:spPr>
+        <p:txBody>
+          <a:bodyPr wrap="square" rtlCol="0" anchor="ctr"/>
+          <a:lstStyle/>
+          <a:p>
+            <a:pPr indent="0" marL="0">
+              <a:buNone/>
+            </a:pPr>
+            <a:r>
+              <a:rPr lang="en-US" sz="1200" b="1" spc="200" kern="0" dirty="0">
+                <a:solidFill>
+                  <a:srgbClr val="6366F1"/>
+                </a:solidFill>
+                <a:latin typeface="Microsoft JhengHei" pitchFamily="34" charset="0"/>
+                <a:ea typeface="Microsoft JhengHei" pitchFamily="34" charset="-122"/>
+                <a:cs typeface="Microsoft JhengHei" pitchFamily="34" charset="-120"/>
+              </a:rPr>
               <a:t>5 SCENARIOS</a:t>
             </a:r>
             <a:endParaRPr lang="en-US" sz="1200" dirty="0"/>
@@ -19967,7 +22354,7 @@
                 <a:ea typeface="Microsoft JhengHei" pitchFamily="34" charset="-122"/>
                 <a:cs typeface="Microsoft JhengHei" pitchFamily="34" charset="-120"/>
               </a:rPr>
-              <a:t>6</a:t>
+              <a:t>7</a:t>
             </a:r>
             <a:endParaRPr lang="en-US" sz="900" dirty="0"/>
           </a:p>
@@ -19981,9 +22368,9 @@
 </p:sld>
 </file>
 
-<file path=ppt/slides/slide8.xml><?xml version="1.0" encoding="utf-8"?>
+<file path=ppt/slides/slide9.xml><?xml version="1.0" encoding="utf-8"?>
 <p:sld xmlns:a="http://schemas.openxmlformats.org/drawingml/2006/main" xmlns:r="http://schemas.openxmlformats.org/officeDocument/2006/relationships" xmlns:p="http://schemas.openxmlformats.org/presentationml/2006/main">
-  <p:cSld name="Slide 8">
+  <p:cSld name="Slide 9">
     <p:bg>
       <p:bgPr>
         <a:solidFill>
@@ -20650,7 +23037,7 @@
                 <a:ea typeface="Microsoft JhengHei" pitchFamily="34" charset="-122"/>
                 <a:cs typeface="Microsoft JhengHei" pitchFamily="34" charset="-120"/>
               </a:rPr>
-              <a:t>不要說「附件是客服紀錄」，也不要告訴它哪個檔案在哪。</a:t>
+              <a:t>直接送出下面的提示詞。</a:t>
             </a:r>
             <a:endParaRPr lang="en-US" sz="1300" dirty="0"/>
           </a:p>
@@ -20755,7 +23142,7 @@
                 <a:ea typeface="Microsoft JhengHei" pitchFamily="34" charset="-122"/>
                 <a:cs typeface="Microsoft JhengHei" pitchFamily="34" charset="-120"/>
               </a:rPr>
-              <a:t>看它自己把三個來源湊齊</a:t>
+              <a:t>打開工作區，確認它自己找齊了五份素材</a:t>
             </a:r>
             <a:endParaRPr lang="en-US" sz="1600" dirty="0"/>
           </a:p>
@@ -20797,7 +23184,7 @@
                 <a:ea typeface="Microsoft JhengHei" pitchFamily="34" charset="-122"/>
                 <a:cs typeface="Microsoft JhengHei" pitchFamily="34" charset="-120"/>
               </a:rPr>
-              <a:t>工作區會即時顯示它做了什麼：搜尋信箱找 NCC 來函、取得預設硬碟、瀏覽到指定資料夾…</a:t>
+              <a:t>展開右側工作區，逐項看它做了哪些動作，再用下面的提示詞問它讀取的順序。</a:t>
             </a:r>
             <a:endParaRPr lang="en-US" sz="1300" dirty="0"/>
           </a:p>
@@ -20902,7 +23289,7 @@
                 <a:ea typeface="Microsoft JhengHei" pitchFamily="34" charset="-122"/>
                 <a:cs typeface="Microsoft JhengHei" pitchFamily="34" charset="-120"/>
               </a:rPr>
-              <a:t>關鍵時刻：它抓到客服說的與系統做的對不上</a:t>
+              <a:t>自己先找矛盾點，再看它的判定</a:t>
             </a:r>
             <a:endParaRPr lang="en-US" sz="1600" dirty="0"/>
           </a:p>
@@ -20944,7 +23331,7 @@
                 <a:ea typeface="Microsoft JhengHei" pitchFamily="34" charset="-122"/>
                 <a:cs typeface="Microsoft JhengHei" pitchFamily="34" charset="-120"/>
               </a:rPr>
-              <a:t>它會找出兩處落差並明確標示：**中斷起算** —— 客戶 8/11 10:35 才申告…</a:t>
+              <a:t>先自己翻過那三份 xlsx，找出客服說法與系統紀錄對不上的地方；再用下面的提示詞請它逐條列出，跟你找到的對照。</a:t>
             </a:r>
             <a:endParaRPr lang="en-US" sz="1300" dirty="0"/>
           </a:p>
@@ -21049,7 +23436,7 @@
                 <a:ea typeface="Microsoft JhengHei" pitchFamily="34" charset="-122"/>
                 <a:cs typeface="Microsoft JhengHei" pitchFamily="34" charset="-120"/>
               </a:rPr>
-              <a:t>兩份草稿，以及它明確拒絕填的五個空格</a:t>
+              <a:t>到 Outlook 草稿匣核對兩份回覆，並清出待補空格</a:t>
             </a:r>
             <a:endParaRPr lang="en-US" sz="1600" dirty="0"/>
           </a:p>
@@ -21091,7 +23478,7 @@
                 <a:ea typeface="Microsoft JhengHei" pitchFamily="34" charset="-122"/>
                 <a:cs typeface="Microsoft JhengHei" pitchFamily="34" charset="-120"/>
               </a:rPr>
-              <a:t>兩份回覆都存成 Outlook 草稿、未寄出。</a:t>
+              <a:t>兩份回覆都已存成 Outlook 草稿、未寄出。</a:t>
             </a:r>
             <a:endParaRPr lang="en-US" sz="1300" dirty="0"/>
           </a:p>
@@ -21164,677 +23551,6 @@
               <a:rPr lang="en-US" sz="900" dirty="0">
                 <a:solidFill>
                   <a:srgbClr val="8A8FB5"/>
-                </a:solidFill>
-                <a:latin typeface="Microsoft JhengHei" pitchFamily="34" charset="0"/>
-                <a:ea typeface="Microsoft JhengHei" pitchFamily="34" charset="-122"/>
-                <a:cs typeface="Microsoft JhengHei" pitchFamily="34" charset="-120"/>
-              </a:rPr>
-              <a:t>7</a:t>
-            </a:r>
-            <a:endParaRPr lang="en-US" sz="900" dirty="0"/>
-          </a:p>
-        </p:txBody>
-      </p:sp>
-    </p:spTree>
-  </p:cSld>
-  <p:clrMapOvr>
-    <a:masterClrMapping/>
-  </p:clrMapOvr>
-</p:sld>
-</file>
-
-<file path=ppt/slides/slide9.xml><?xml version="1.0" encoding="utf-8"?>
-<p:sld xmlns:a="http://schemas.openxmlformats.org/drawingml/2006/main" xmlns:r="http://schemas.openxmlformats.org/officeDocument/2006/relationships" xmlns:p="http://schemas.openxmlformats.org/presentationml/2006/main">
-  <p:cSld name="Slide 9">
-    <p:bg>
-      <p:bgPr>
-        <a:solidFill>
-          <a:srgbClr val="F7F8FC"/>
-        </a:solidFill>
-      </p:bgPr>
-    </p:bg>
-    <p:spTree>
-      <p:nvGrpSpPr>
-        <p:cNvPr id="1" name=""/>
-        <p:cNvGrpSpPr/>
-        <p:nvPr/>
-      </p:nvGrpSpPr>
-      <p:grpSpPr>
-        <a:xfrm>
-          <a:off x="0" y="0"/>
-          <a:ext cx="0" cy="0"/>
-          <a:chOff x="0" y="0"/>
-          <a:chExt cx="0" cy="0"/>
-        </a:xfrm>
-      </p:grpSpPr>
-      <p:sp>
-        <p:nvSpPr>
-          <p:cNvPr id="2" name="Shape 0"/>
-          <p:cNvSpPr/>
-          <p:nvPr/>
-        </p:nvSpPr>
-        <p:spPr>
-          <a:xfrm>
-            <a:off x="640080" y="566928"/>
-            <a:ext cx="384048" cy="128016"/>
-          </a:xfrm>
-          <a:prstGeom prst="rect">
-            <a:avLst/>
-          </a:prstGeom>
-          <a:solidFill>
-            <a:srgbClr val="1B4B8F"/>
-          </a:solidFill>
-          <a:ln/>
-        </p:spPr>
-      </p:sp>
-      <p:sp>
-        <p:nvSpPr>
-          <p:cNvPr id="3" name="Text 1"/>
-          <p:cNvSpPr/>
-          <p:nvPr/>
-        </p:nvSpPr>
-        <p:spPr>
-          <a:xfrm>
-            <a:off x="1143000" y="457200"/>
-            <a:ext cx="8229600" cy="310896"/>
-          </a:xfrm>
-          <a:prstGeom prst="rect">
-            <a:avLst/>
-          </a:prstGeom>
-          <a:noFill/>
-          <a:ln/>
-        </p:spPr>
-        <p:txBody>
-          <a:bodyPr wrap="square" rtlCol="0" anchor="ctr"/>
-          <a:lstStyle/>
-          <a:p>
-            <a:pPr indent="0" marL="0">
-              <a:buNone/>
-            </a:pPr>
-            <a:r>
-              <a:rPr lang="en-US" sz="1200" b="1" spc="200" kern="0" dirty="0">
-                <a:solidFill>
-                  <a:srgbClr val="1B4B8F"/>
-                </a:solidFill>
-                <a:latin typeface="Microsoft JhengHei" pitchFamily="34" charset="0"/>
-                <a:ea typeface="Microsoft JhengHei" pitchFamily="34" charset="-122"/>
-                <a:cs typeface="Microsoft JhengHei" pitchFamily="34" charset="-120"/>
-              </a:rPr>
-              <a:t>情境 01 · 實機示範</a:t>
-            </a:r>
-            <a:endParaRPr lang="en-US" sz="1200" dirty="0"/>
-          </a:p>
-        </p:txBody>
-      </p:sp>
-      <p:sp>
-        <p:nvSpPr>
-          <p:cNvPr id="4" name="Text 2"/>
-          <p:cNvSpPr/>
-          <p:nvPr/>
-        </p:nvSpPr>
-        <p:spPr>
-          <a:xfrm>
-            <a:off x="640080" y="786384"/>
-            <a:ext cx="10972800" cy="640080"/>
-          </a:xfrm>
-          <a:prstGeom prst="rect">
-            <a:avLst/>
-          </a:prstGeom>
-          <a:noFill/>
-          <a:ln/>
-        </p:spPr>
-        <p:txBody>
-          <a:bodyPr wrap="square" rtlCol="0" anchor="ctr"/>
-          <a:lstStyle/>
-          <a:p>
-            <a:pPr indent="0" marL="0">
-              <a:buNone/>
-            </a:pPr>
-            <a:r>
-              <a:rPr lang="en-US" sz="3000" b="1" dirty="0">
-                <a:solidFill>
-                  <a:srgbClr val="1E2235"/>
-                </a:solidFill>
-                <a:latin typeface="Microsoft JhengHei" pitchFamily="34" charset="0"/>
-                <a:ea typeface="Microsoft JhengHei" pitchFamily="34" charset="-122"/>
-                <a:cs typeface="Microsoft JhengHei" pitchFamily="34" charset="-120"/>
-              </a:rPr>
-              <a:t>看 Cowork 怎麼做、產出什麼</a:t>
-            </a:r>
-            <a:endParaRPr lang="en-US" sz="3000" dirty="0"/>
-          </a:p>
-        </p:txBody>
-      </p:sp>
-      <p:sp>
-        <p:nvSpPr>
-          <p:cNvPr id="5" name="Shape 3"/>
-          <p:cNvSpPr/>
-          <p:nvPr/>
-        </p:nvSpPr>
-        <p:spPr>
-          <a:xfrm>
-            <a:off x="585216" y="1773936"/>
-            <a:ext cx="5184648" cy="3433186"/>
-          </a:xfrm>
-          <a:prstGeom prst="rect">
-            <a:avLst/>
-          </a:prstGeom>
-          <a:solidFill>
-            <a:srgbClr val="FFFFFF"/>
-          </a:solidFill>
-          <a:ln w="12700">
-            <a:solidFill>
-              <a:srgbClr val="E4E7F2"/>
-            </a:solidFill>
-            <a:prstDash val="solid"/>
-          </a:ln>
-          <a:effectLst>
-            <a:outerShdw sx="100000" sy="100000" kx="0" ky="0" algn="bl" rotWithShape="0" blurRad="114300" dist="38100" dir="5400000">
-              <a:srgbClr val="8A90B5">
-                <a:alpha val="22000"/>
-              </a:srgbClr>
-            </a:outerShdw>
-          </a:effectLst>
-        </p:spPr>
-      </p:sp>
-      <p:pic>
-        <p:nvPicPr>
-          <p:cNvPr id="6" name="Image 0" descr="C:\temp\CoworkLab\v2\_working\screenshots\tel1_01_input.png">    </p:cNvPr>
-          <p:cNvPicPr>
-            <a:picLocks noChangeAspect="1"/>
-          </p:cNvPicPr>
-          <p:nvPr/>
-        </p:nvPicPr>
-        <p:blipFill>
-          <a:blip r:embed="rId1"/>
-          <a:stretch>
-            <a:fillRect/>
-          </a:stretch>
-        </p:blipFill>
-        <p:spPr>
-          <a:xfrm>
-            <a:off x="640080" y="1828800"/>
-            <a:ext cx="5074920" cy="3323458"/>
-          </a:xfrm>
-          <a:prstGeom prst="rect">
-            <a:avLst/>
-          </a:prstGeom>
-        </p:spPr>
-      </p:pic>
-      <p:sp>
-        <p:nvSpPr>
-          <p:cNvPr id="7" name="Text 4"/>
-          <p:cNvSpPr/>
-          <p:nvPr/>
-        </p:nvSpPr>
-        <p:spPr>
-          <a:xfrm>
-            <a:off x="640080" y="5261986"/>
-            <a:ext cx="5074920" cy="320040"/>
-          </a:xfrm>
-          <a:prstGeom prst="rect">
-            <a:avLst/>
-          </a:prstGeom>
-          <a:noFill/>
-          <a:ln/>
-        </p:spPr>
-        <p:txBody>
-          <a:bodyPr wrap="square" rtlCol="0" anchor="ctr"/>
-          <a:lstStyle/>
-          <a:p>
-            <a:pPr algn="ctr" indent="0" marL="0">
-              <a:buNone/>
-            </a:pPr>
-            <a:r>
-              <a:rPr lang="en-US" sz="1350" b="1" dirty="0">
-                <a:solidFill>
-                  <a:srgbClr val="1B4B8F"/>
-                </a:solidFill>
-                <a:latin typeface="Microsoft JhengHei" pitchFamily="34" charset="0"/>
-                <a:ea typeface="Microsoft JhengHei" pitchFamily="34" charset="-122"/>
-                <a:cs typeface="Microsoft JhengHei" pitchFamily="34" charset="-120"/>
-              </a:rPr>
-              <a:t>① 你的輸入與指令</a:t>
-            </a:r>
-            <a:endParaRPr lang="en-US" sz="1350" dirty="0"/>
-          </a:p>
-        </p:txBody>
-      </p:sp>
-      <p:sp>
-        <p:nvSpPr>
-          <p:cNvPr id="8" name="Shape 5"/>
-          <p:cNvSpPr/>
-          <p:nvPr/>
-        </p:nvSpPr>
-        <p:spPr>
-          <a:xfrm>
-            <a:off x="6163056" y="1773936"/>
-            <a:ext cx="5184648" cy="3433186"/>
-          </a:xfrm>
-          <a:prstGeom prst="rect">
-            <a:avLst/>
-          </a:prstGeom>
-          <a:solidFill>
-            <a:srgbClr val="FFFFFF"/>
-          </a:solidFill>
-          <a:ln w="12700">
-            <a:solidFill>
-              <a:srgbClr val="E4E7F2"/>
-            </a:solidFill>
-            <a:prstDash val="solid"/>
-          </a:ln>
-          <a:effectLst>
-            <a:outerShdw sx="100000" sy="100000" kx="0" ky="0" algn="bl" rotWithShape="0" blurRad="114300" dist="38100" dir="5400000">
-              <a:srgbClr val="8A90B5">
-                <a:alpha val="22000"/>
-              </a:srgbClr>
-            </a:outerShdw>
-          </a:effectLst>
-        </p:spPr>
-      </p:sp>
-      <p:pic>
-        <p:nvPicPr>
-          <p:cNvPr id="9" name="Image 1" descr="C:\temp\CoworkLab\v2\_working\screenshots\tel1_04_summary.png">    </p:cNvPr>
-          <p:cNvPicPr>
-            <a:picLocks noChangeAspect="1"/>
-          </p:cNvPicPr>
-          <p:nvPr/>
-        </p:nvPicPr>
-        <p:blipFill>
-          <a:blip r:embed="rId2"/>
-          <a:stretch>
-            <a:fillRect/>
-          </a:stretch>
-        </p:blipFill>
-        <p:spPr>
-          <a:xfrm>
-            <a:off x="6217920" y="1828800"/>
-            <a:ext cx="5074920" cy="3323458"/>
-          </a:xfrm>
-          <a:prstGeom prst="rect">
-            <a:avLst/>
-          </a:prstGeom>
-        </p:spPr>
-      </p:pic>
-      <p:sp>
-        <p:nvSpPr>
-          <p:cNvPr id="10" name="Text 6"/>
-          <p:cNvSpPr/>
-          <p:nvPr/>
-        </p:nvSpPr>
-        <p:spPr>
-          <a:xfrm>
-            <a:off x="6217920" y="5261986"/>
-            <a:ext cx="5074920" cy="320040"/>
-          </a:xfrm>
-          <a:prstGeom prst="rect">
-            <a:avLst/>
-          </a:prstGeom>
-          <a:noFill/>
-          <a:ln/>
-        </p:spPr>
-        <p:txBody>
-          <a:bodyPr wrap="square" rtlCol="0" anchor="ctr"/>
-          <a:lstStyle/>
-          <a:p>
-            <a:pPr algn="ctr" indent="0" marL="0">
-              <a:buNone/>
-            </a:pPr>
-            <a:r>
-              <a:rPr lang="en-US" sz="1350" b="1" dirty="0">
-                <a:solidFill>
-                  <a:srgbClr val="1B4B8F"/>
-                </a:solidFill>
-                <a:latin typeface="Microsoft JhengHei" pitchFamily="34" charset="0"/>
-                <a:ea typeface="Microsoft JhengHei" pitchFamily="34" charset="-122"/>
-                <a:cs typeface="Microsoft JhengHei" pitchFamily="34" charset="-120"/>
-              </a:rPr>
-              <a:t>② 產出成果</a:t>
-            </a:r>
-            <a:endParaRPr lang="en-US" sz="1350" dirty="0"/>
-          </a:p>
-        </p:txBody>
-      </p:sp>
-      <p:sp>
-        <p:nvSpPr>
-          <p:cNvPr id="11" name="Shape 7"/>
-          <p:cNvSpPr/>
-          <p:nvPr/>
-        </p:nvSpPr>
-        <p:spPr>
-          <a:xfrm>
-            <a:off x="640080" y="5074920"/>
-            <a:ext cx="10911535" cy="1143000"/>
-          </a:xfrm>
-          <a:prstGeom prst="rect">
-            <a:avLst/>
-          </a:prstGeom>
-          <a:solidFill>
-            <a:srgbClr val="FFFFFF"/>
-          </a:solidFill>
-          <a:ln w="12700">
-            <a:solidFill>
-              <a:srgbClr val="E4E7F2"/>
-            </a:solidFill>
-            <a:prstDash val="solid"/>
-          </a:ln>
-        </p:spPr>
-      </p:sp>
-      <p:sp>
-        <p:nvSpPr>
-          <p:cNvPr id="12" name="Shape 8"/>
-          <p:cNvSpPr/>
-          <p:nvPr/>
-        </p:nvSpPr>
-        <p:spPr>
-          <a:xfrm>
-            <a:off x="640080" y="5074920"/>
-            <a:ext cx="91440" cy="1143000"/>
-          </a:xfrm>
-          <a:prstGeom prst="rect">
-            <a:avLst/>
-          </a:prstGeom>
-          <a:solidFill>
-            <a:srgbClr val="1B4B8F"/>
-          </a:solidFill>
-          <a:ln/>
-        </p:spPr>
-      </p:sp>
-      <p:sp>
-        <p:nvSpPr>
-          <p:cNvPr id="13" name="Text 9"/>
-          <p:cNvSpPr/>
-          <p:nvPr/>
-        </p:nvSpPr>
-        <p:spPr>
-          <a:xfrm>
-            <a:off x="914400" y="5184648"/>
-            <a:ext cx="1828800" cy="320040"/>
-          </a:xfrm>
-          <a:prstGeom prst="rect">
-            <a:avLst/>
-          </a:prstGeom>
-          <a:noFill/>
-          <a:ln/>
-        </p:spPr>
-        <p:txBody>
-          <a:bodyPr wrap="square" rtlCol="0" anchor="ctr"/>
-          <a:lstStyle/>
-          <a:p>
-            <a:pPr indent="0" marL="0">
-              <a:buNone/>
-            </a:pPr>
-            <a:r>
-              <a:rPr lang="en-US" sz="1400" b="1" dirty="0">
-                <a:solidFill>
-                  <a:srgbClr val="1E2235"/>
-                </a:solidFill>
-                <a:latin typeface="Microsoft JhengHei" pitchFamily="34" charset="0"/>
-                <a:ea typeface="Microsoft JhengHei" pitchFamily="34" charset="-122"/>
-                <a:cs typeface="Microsoft JhengHei" pitchFamily="34" charset="-120"/>
-              </a:rPr>
-              <a:t>產出驗收</a:t>
-            </a:r>
-            <a:endParaRPr lang="en-US" sz="1400" dirty="0"/>
-          </a:p>
-        </p:txBody>
-      </p:sp>
-      <p:pic>
-        <p:nvPicPr>
-          <p:cNvPr id="14" name="Image 2" descr="preencoded.png">    </p:cNvPr>
-          <p:cNvPicPr>
-            <a:picLocks noChangeAspect="1"/>
-          </p:cNvPicPr>
-          <p:nvPr/>
-        </p:nvPicPr>
-        <p:blipFill>
-          <a:blip r:embed="rId3"/>
-          <a:stretch>
-            <a:fillRect/>
-          </a:stretch>
-        </p:blipFill>
-        <p:spPr>
-          <a:xfrm>
-            <a:off x="2834640" y="5221224"/>
-            <a:ext cx="182880" cy="182880"/>
-          </a:xfrm>
-          <a:prstGeom prst="rect">
-            <a:avLst/>
-          </a:prstGeom>
-        </p:spPr>
-      </p:pic>
-      <p:sp>
-        <p:nvSpPr>
-          <p:cNvPr id="15" name="Text 10"/>
-          <p:cNvSpPr/>
-          <p:nvPr/>
-        </p:nvSpPr>
-        <p:spPr>
-          <a:xfrm>
-            <a:off x="3108960" y="5166360"/>
-            <a:ext cx="8168335" cy="310896"/>
-          </a:xfrm>
-          <a:prstGeom prst="rect">
-            <a:avLst/>
-          </a:prstGeom>
-          <a:noFill/>
-          <a:ln/>
-        </p:spPr>
-        <p:txBody>
-          <a:bodyPr wrap="square" rtlCol="0" anchor="ctr"/>
-          <a:lstStyle/>
-          <a:p>
-            <a:pPr indent="0" marL="0">
-              <a:buNone/>
-            </a:pPr>
-            <a:r>
-              <a:rPr lang="en-US" sz="1300" dirty="0">
-                <a:solidFill>
-                  <a:srgbClr val="1E2235"/>
-                </a:solidFill>
-                <a:latin typeface="Microsoft JhengHei" pitchFamily="34" charset="0"/>
-                <a:ea typeface="Microsoft JhengHei" pitchFamily="34" charset="-122"/>
-                <a:cs typeface="Microsoft JhengHei" pitchFamily="34" charset="-120"/>
-              </a:rPr>
-              <a:t>沒有上傳任何附件，Cowork 自己從信箱與 OneDrive 取得全部素材</a:t>
-            </a:r>
-            <a:endParaRPr lang="en-US" sz="1300" dirty="0"/>
-          </a:p>
-        </p:txBody>
-      </p:sp>
-      <p:pic>
-        <p:nvPicPr>
-          <p:cNvPr id="16" name="Image 3" descr="preencoded.png">    </p:cNvPr>
-          <p:cNvPicPr>
-            <a:picLocks noChangeAspect="1"/>
-          </p:cNvPicPr>
-          <p:nvPr/>
-        </p:nvPicPr>
-        <p:blipFill>
-          <a:blip r:embed="rId4"/>
-          <a:stretch>
-            <a:fillRect/>
-          </a:stretch>
-        </p:blipFill>
-        <p:spPr>
-          <a:xfrm>
-            <a:off x="2834640" y="5559552"/>
-            <a:ext cx="182880" cy="182880"/>
-          </a:xfrm>
-          <a:prstGeom prst="rect">
-            <a:avLst/>
-          </a:prstGeom>
-        </p:spPr>
-      </p:pic>
-      <p:sp>
-        <p:nvSpPr>
-          <p:cNvPr id="17" name="Text 11"/>
-          <p:cNvSpPr/>
-          <p:nvPr/>
-        </p:nvSpPr>
-        <p:spPr>
-          <a:xfrm>
-            <a:off x="3108960" y="5504688"/>
-            <a:ext cx="8168335" cy="310896"/>
-          </a:xfrm>
-          <a:prstGeom prst="rect">
-            <a:avLst/>
-          </a:prstGeom>
-          <a:noFill/>
-          <a:ln/>
-        </p:spPr>
-        <p:txBody>
-          <a:bodyPr wrap="square" rtlCol="0" anchor="ctr"/>
-          <a:lstStyle/>
-          <a:p>
-            <a:pPr indent="0" marL="0">
-              <a:buNone/>
-            </a:pPr>
-            <a:r>
-              <a:rPr lang="en-US" sz="1300" dirty="0">
-                <a:solidFill>
-                  <a:srgbClr val="1E2235"/>
-                </a:solidFill>
-                <a:latin typeface="Microsoft JhengHei" pitchFamily="34" charset="0"/>
-                <a:ea typeface="Microsoft JhengHei" pitchFamily="34" charset="-122"/>
-                <a:cs typeface="Microsoft JhengHei" pitchFamily="34" charset="-120"/>
-              </a:rPr>
-              <a:t>明確指出客服「當日派工」承諾與工單實際建立時間的落差，未沿用錯誤陳述</a:t>
-            </a:r>
-            <a:endParaRPr lang="en-US" sz="1300" dirty="0"/>
-          </a:p>
-        </p:txBody>
-      </p:sp>
-      <p:pic>
-        <p:nvPicPr>
-          <p:cNvPr id="18" name="Image 4" descr="preencoded.png">    </p:cNvPr>
-          <p:cNvPicPr>
-            <a:picLocks noChangeAspect="1"/>
-          </p:cNvPicPr>
-          <p:nvPr/>
-        </p:nvPicPr>
-        <p:blipFill>
-          <a:blip r:embed="rId5"/>
-          <a:stretch>
-            <a:fillRect/>
-          </a:stretch>
-        </p:blipFill>
-        <p:spPr>
-          <a:xfrm>
-            <a:off x="2834640" y="5897880"/>
-            <a:ext cx="182880" cy="182880"/>
-          </a:xfrm>
-          <a:prstGeom prst="rect">
-            <a:avLst/>
-          </a:prstGeom>
-        </p:spPr>
-      </p:pic>
-      <p:sp>
-        <p:nvSpPr>
-          <p:cNvPr id="19" name="Text 12"/>
-          <p:cNvSpPr/>
-          <p:nvPr/>
-        </p:nvSpPr>
-        <p:spPr>
-          <a:xfrm>
-            <a:off x="3108960" y="5843016"/>
-            <a:ext cx="8168335" cy="310896"/>
-          </a:xfrm>
-          <a:prstGeom prst="rect">
-            <a:avLst/>
-          </a:prstGeom>
-          <a:noFill/>
-          <a:ln/>
-        </p:spPr>
-        <p:txBody>
-          <a:bodyPr wrap="square" rtlCol="0" anchor="ctr"/>
-          <a:lstStyle/>
-          <a:p>
-            <a:pPr indent="0" marL="0">
-              <a:buNone/>
-            </a:pPr>
-            <a:r>
-              <a:rPr lang="en-US" sz="1300" dirty="0">
-                <a:solidFill>
-                  <a:srgbClr val="1E2235"/>
-                </a:solidFill>
-                <a:latin typeface="Microsoft JhengHei" pitchFamily="34" charset="0"/>
-                <a:ea typeface="Microsoft JhengHei" pitchFamily="34" charset="-122"/>
-                <a:cs typeface="Microsoft JhengHei" pitchFamily="34" charset="-120"/>
-              </a:rPr>
-              <a:t>服務中斷起算採設備異常時間，而非客戶首次申告時間</a:t>
-            </a:r>
-            <a:endParaRPr lang="en-US" sz="1300" dirty="0"/>
-          </a:p>
-        </p:txBody>
-      </p:sp>
-      <p:sp>
-        <p:nvSpPr>
-          <p:cNvPr id="20" name="Text 13"/>
-          <p:cNvSpPr/>
-          <p:nvPr/>
-        </p:nvSpPr>
-        <p:spPr>
-          <a:xfrm>
-            <a:off x="640080" y="6473952"/>
-            <a:ext cx="5486400" cy="274320"/>
-          </a:xfrm>
-          <a:prstGeom prst="rect">
-            <a:avLst/>
-          </a:prstGeom>
-          <a:noFill/>
-          <a:ln/>
-        </p:spPr>
-        <p:txBody>
-          <a:bodyPr wrap="square" rtlCol="0" anchor="ctr"/>
-          <a:lstStyle/>
-          <a:p>
-            <a:pPr algn="l" indent="0" marL="0">
-              <a:buNone/>
-            </a:pPr>
-            <a:r>
-              <a:rPr lang="en-US" sz="900" dirty="0">
-                <a:solidFill>
-                  <a:srgbClr val="5B6079"/>
-                </a:solidFill>
-                <a:latin typeface="Microsoft JhengHei" pitchFamily="34" charset="0"/>
-                <a:ea typeface="Microsoft JhengHei" pitchFamily="34" charset="-122"/>
-                <a:cs typeface="Microsoft JhengHei" pitchFamily="34" charset="-120"/>
-              </a:rPr>
-              <a:t>Microsoft 365 Copilot Cowork</a:t>
-            </a:r>
-            <a:endParaRPr lang="en-US" sz="900" dirty="0"/>
-          </a:p>
-        </p:txBody>
-      </p:sp>
-      <p:sp>
-        <p:nvSpPr>
-          <p:cNvPr id="21" name="Text 14"/>
-          <p:cNvSpPr/>
-          <p:nvPr/>
-        </p:nvSpPr>
-        <p:spPr>
-          <a:xfrm>
-            <a:off x="11002975" y="6473952"/>
-            <a:ext cx="548640" cy="274320"/>
-          </a:xfrm>
-          <a:prstGeom prst="rect">
-            <a:avLst/>
-          </a:prstGeom>
-          <a:noFill/>
-          <a:ln/>
-        </p:spPr>
-        <p:txBody>
-          <a:bodyPr wrap="square" rtlCol="0" anchor="ctr"/>
-          <a:lstStyle/>
-          <a:p>
-            <a:pPr algn="r" indent="0" marL="0">
-              <a:buNone/>
-            </a:pPr>
-            <a:r>
-              <a:rPr lang="en-US" sz="900" dirty="0">
-                <a:solidFill>
-                  <a:srgbClr val="5B6079"/>
                 </a:solidFill>
                 <a:latin typeface="Microsoft JhengHei" pitchFamily="34" charset="0"/>
                 <a:ea typeface="Microsoft JhengHei" pitchFamily="34" charset="-122"/>
